--- a/seminarski-3/Replikacija podataka (replication and mirroring) kod Firebird baze podataka.pptx
+++ b/seminarski-3/Replikacija podataka (replication and mirroring) kod Firebird baze podataka.pptx
@@ -375,6 +375,967 @@
           <a:bodyPr/>
           <a:lstStyle/>
           <a:p>
+            <a:r>
+              <a:rPr lang="en-US" dirty="0"/>
+              <a:t>Pet </a:t>
+            </a:r>
+            <a:r>
+              <a:rPr lang="en-US" dirty="0" err="1"/>
+              <a:t>verifikacionih</a:t>
+            </a:r>
+            <a:r>
+              <a:rPr lang="en-US" dirty="0"/>
+              <a:t> </a:t>
+            </a:r>
+            <a:r>
+              <a:rPr lang="en-US" dirty="0" err="1"/>
+              <a:t>testova</a:t>
+            </a:r>
+            <a:r>
+              <a:rPr lang="en-US" dirty="0"/>
+              <a:t> </a:t>
+            </a:r>
+            <a:r>
+              <a:rPr lang="en-US" dirty="0" err="1"/>
+              <a:t>potvrđuju</a:t>
+            </a:r>
+            <a:r>
+              <a:rPr lang="en-US" dirty="0"/>
+              <a:t> da </a:t>
+            </a:r>
+            <a:r>
+              <a:rPr lang="en-US" dirty="0" err="1"/>
+              <a:t>replikacija</a:t>
+            </a:r>
+            <a:r>
+              <a:rPr lang="en-US" dirty="0"/>
+              <a:t> </a:t>
+            </a:r>
+            <a:r>
+              <a:rPr lang="en-US" dirty="0" err="1"/>
+              <a:t>funkcioniše</a:t>
+            </a:r>
+            <a:r>
+              <a:rPr lang="en-US" dirty="0"/>
+              <a:t> </a:t>
+            </a:r>
+            <a:r>
+              <a:rPr lang="en-US" dirty="0" err="1"/>
+              <a:t>ispravno</a:t>
+            </a:r>
+            <a:r>
+              <a:rPr lang="en-US" dirty="0"/>
+              <a:t> u </a:t>
+            </a:r>
+            <a:r>
+              <a:rPr lang="en-US" dirty="0" err="1"/>
+              <a:t>svim</a:t>
+            </a:r>
+            <a:r>
+              <a:rPr lang="en-US" dirty="0"/>
+              <a:t> </a:t>
+            </a:r>
+            <a:r>
+              <a:rPr lang="en-US" dirty="0" err="1"/>
+              <a:t>ključnim</a:t>
+            </a:r>
+            <a:r>
+              <a:rPr lang="en-US" dirty="0"/>
+              <a:t> </a:t>
+            </a:r>
+            <a:r>
+              <a:rPr lang="en-US" dirty="0" err="1"/>
+              <a:t>scenarijima</a:t>
+            </a:r>
+            <a:r>
+              <a:rPr lang="en-US" dirty="0"/>
+              <a:t> rada </a:t>
+            </a:r>
+            <a:r>
+              <a:rPr lang="en-US" dirty="0" err="1"/>
+              <a:t>sistema</a:t>
+            </a:r>
+            <a:r>
+              <a:rPr lang="en-US" dirty="0"/>
+              <a:t>.</a:t>
+            </a:r>
+          </a:p>
+          <a:p>
+            <a:r>
+              <a:rPr lang="en-US" b="1" dirty="0"/>
+              <a:t>Test 1 — INSERT</a:t>
+            </a:r>
+            <a:r>
+              <a:rPr lang="en-US" dirty="0"/>
+              <a:t> </a:t>
+            </a:r>
+            <a:r>
+              <a:rPr lang="en-US" dirty="0" err="1"/>
+              <a:t>verifikuje</a:t>
+            </a:r>
+            <a:r>
+              <a:rPr lang="en-US" dirty="0"/>
+              <a:t> </a:t>
+            </a:r>
+            <a:r>
+              <a:rPr lang="en-US" dirty="0" err="1"/>
+              <a:t>osnovnu</a:t>
+            </a:r>
+            <a:r>
+              <a:rPr lang="en-US" dirty="0"/>
+              <a:t> </a:t>
+            </a:r>
+            <a:r>
+              <a:rPr lang="en-US" dirty="0" err="1"/>
+              <a:t>replikaciju</a:t>
+            </a:r>
+            <a:r>
+              <a:rPr lang="en-US" dirty="0"/>
+              <a:t> — </a:t>
+            </a:r>
+            <a:r>
+              <a:rPr lang="en-US" dirty="0" err="1"/>
+              <a:t>nakon</a:t>
+            </a:r>
+            <a:r>
+              <a:rPr lang="en-US" dirty="0"/>
+              <a:t> </a:t>
+            </a:r>
+            <a:r>
+              <a:rPr lang="en-US" dirty="0" err="1"/>
+              <a:t>unosa</a:t>
+            </a:r>
+            <a:r>
+              <a:rPr lang="en-US" dirty="0"/>
+              <a:t> </a:t>
+            </a:r>
+            <a:r>
+              <a:rPr lang="en-US" dirty="0" err="1"/>
+              <a:t>novog</a:t>
+            </a:r>
+            <a:r>
+              <a:rPr lang="en-US" dirty="0"/>
+              <a:t> </a:t>
+            </a:r>
+            <a:r>
+              <a:rPr lang="en-US" dirty="0" err="1"/>
+              <a:t>zaposlenog</a:t>
+            </a:r>
+            <a:r>
+              <a:rPr lang="en-US" dirty="0"/>
+              <a:t> </a:t>
+            </a:r>
+            <a:r>
+              <a:rPr lang="en-US" dirty="0" err="1"/>
+              <a:t>i</a:t>
+            </a:r>
+            <a:r>
+              <a:rPr lang="en-US" dirty="0"/>
+              <a:t> COMMIT-a </a:t>
+            </a:r>
+            <a:r>
+              <a:rPr lang="en-US" dirty="0" err="1"/>
+              <a:t>na</a:t>
+            </a:r>
+            <a:r>
+              <a:rPr lang="en-US" dirty="0"/>
+              <a:t> </a:t>
+            </a:r>
+            <a:r>
+              <a:rPr lang="en-US" dirty="0" err="1"/>
+              <a:t>masteru</a:t>
+            </a:r>
+            <a:r>
+              <a:rPr lang="en-US" dirty="0"/>
+              <a:t>, SELECT </a:t>
+            </a:r>
+            <a:r>
+              <a:rPr lang="en-US" dirty="0" err="1"/>
+              <a:t>na</a:t>
+            </a:r>
+            <a:r>
+              <a:rPr lang="en-US" dirty="0"/>
+              <a:t> slave </a:t>
+            </a:r>
+            <a:r>
+              <a:rPr lang="en-US" dirty="0" err="1"/>
+              <a:t>bazi</a:t>
+            </a:r>
+            <a:r>
+              <a:rPr lang="en-US" dirty="0"/>
+              <a:t> mora da </a:t>
+            </a:r>
+            <a:r>
+              <a:rPr lang="en-US" dirty="0" err="1"/>
+              <a:t>vrati</a:t>
+            </a:r>
+            <a:r>
+              <a:rPr lang="en-US" dirty="0"/>
+              <a:t> taj </a:t>
+            </a:r>
+            <a:r>
+              <a:rPr lang="en-US" dirty="0" err="1"/>
+              <a:t>isti</a:t>
+            </a:r>
+            <a:r>
+              <a:rPr lang="en-US" dirty="0"/>
+              <a:t> red, </a:t>
+            </a:r>
+            <a:r>
+              <a:rPr lang="en-US" dirty="0" err="1"/>
+              <a:t>što</a:t>
+            </a:r>
+            <a:r>
+              <a:rPr lang="en-US" dirty="0"/>
+              <a:t> </a:t>
+            </a:r>
+            <a:r>
+              <a:rPr lang="en-US" dirty="0" err="1"/>
+              <a:t>potvrđuje</a:t>
+            </a:r>
+            <a:r>
+              <a:rPr lang="en-US" dirty="0"/>
+              <a:t> da journal </a:t>
+            </a:r>
+            <a:r>
+              <a:rPr lang="en-US" dirty="0" err="1"/>
+              <a:t>segmenti</a:t>
+            </a:r>
+            <a:r>
+              <a:rPr lang="en-US" dirty="0"/>
+              <a:t> </a:t>
+            </a:r>
+            <a:r>
+              <a:rPr lang="en-US" dirty="0" err="1"/>
+              <a:t>i</a:t>
+            </a:r>
+            <a:r>
+              <a:rPr lang="en-US" dirty="0"/>
+              <a:t> </a:t>
+            </a:r>
+            <a:r>
+              <a:rPr lang="en-US" dirty="0" err="1"/>
+              <a:t>replikacioni</a:t>
+            </a:r>
+            <a:r>
+              <a:rPr lang="en-US" dirty="0"/>
+              <a:t> agent </a:t>
+            </a:r>
+            <a:r>
+              <a:rPr lang="en-US" dirty="0" err="1"/>
+              <a:t>rade</a:t>
+            </a:r>
+            <a:r>
+              <a:rPr lang="en-US" dirty="0"/>
+              <a:t> </a:t>
+            </a:r>
+            <a:r>
+              <a:rPr lang="en-US" dirty="0" err="1"/>
+              <a:t>ispravno</a:t>
+            </a:r>
+            <a:r>
+              <a:rPr lang="en-US" dirty="0"/>
+              <a:t>.</a:t>
+            </a:r>
+          </a:p>
+          <a:p>
+            <a:r>
+              <a:rPr lang="en-US" b="1" dirty="0"/>
+              <a:t>Test 2 — UPDATE</a:t>
+            </a:r>
+            <a:r>
+              <a:rPr lang="en-US" dirty="0"/>
+              <a:t> </a:t>
+            </a:r>
+            <a:r>
+              <a:rPr lang="en-US" dirty="0" err="1"/>
+              <a:t>verifikuje</a:t>
+            </a:r>
+            <a:r>
+              <a:rPr lang="en-US" dirty="0"/>
+              <a:t> </a:t>
+            </a:r>
+            <a:r>
+              <a:rPr lang="en-US" dirty="0" err="1"/>
+              <a:t>replikaciju</a:t>
+            </a:r>
+            <a:r>
+              <a:rPr lang="en-US" dirty="0"/>
+              <a:t> </a:t>
+            </a:r>
+            <a:r>
+              <a:rPr lang="en-US" dirty="0" err="1"/>
+              <a:t>izmena</a:t>
+            </a:r>
+            <a:r>
+              <a:rPr lang="en-US" dirty="0"/>
+              <a:t> — </a:t>
+            </a:r>
+            <a:r>
+              <a:rPr lang="en-US" dirty="0" err="1"/>
+              <a:t>promena</a:t>
+            </a:r>
+            <a:r>
+              <a:rPr lang="en-US" dirty="0"/>
+              <a:t> plate </a:t>
+            </a:r>
+            <a:r>
+              <a:rPr lang="en-US" dirty="0" err="1"/>
+              <a:t>na</a:t>
+            </a:r>
+            <a:r>
+              <a:rPr lang="en-US" dirty="0"/>
+              <a:t> </a:t>
+            </a:r>
+            <a:r>
+              <a:rPr lang="en-US" dirty="0" err="1"/>
+              <a:t>masteru</a:t>
+            </a:r>
+            <a:r>
+              <a:rPr lang="en-US" dirty="0"/>
+              <a:t> mora </a:t>
+            </a:r>
+            <a:r>
+              <a:rPr lang="en-US" dirty="0" err="1"/>
+              <a:t>biti</a:t>
+            </a:r>
+            <a:r>
+              <a:rPr lang="en-US" dirty="0"/>
+              <a:t> </a:t>
+            </a:r>
+            <a:r>
+              <a:rPr lang="en-US" dirty="0" err="1"/>
+              <a:t>vidljiva</a:t>
+            </a:r>
+            <a:r>
+              <a:rPr lang="en-US" dirty="0"/>
+              <a:t> </a:t>
+            </a:r>
+            <a:r>
+              <a:rPr lang="en-US" dirty="0" err="1"/>
+              <a:t>na</a:t>
+            </a:r>
+            <a:r>
+              <a:rPr lang="en-US" dirty="0"/>
+              <a:t> slave </a:t>
+            </a:r>
+            <a:r>
+              <a:rPr lang="en-US" dirty="0" err="1"/>
+              <a:t>bazi</a:t>
+            </a:r>
+            <a:r>
+              <a:rPr lang="en-US" dirty="0"/>
+              <a:t> </a:t>
+            </a:r>
+            <a:r>
+              <a:rPr lang="en-US" dirty="0" err="1"/>
+              <a:t>sa</a:t>
+            </a:r>
+            <a:r>
+              <a:rPr lang="en-US" dirty="0"/>
+              <a:t> </a:t>
+            </a:r>
+            <a:r>
+              <a:rPr lang="en-US" dirty="0" err="1"/>
+              <a:t>identičnom</a:t>
+            </a:r>
+            <a:r>
+              <a:rPr lang="en-US" dirty="0"/>
+              <a:t> </a:t>
+            </a:r>
+            <a:r>
+              <a:rPr lang="en-US" dirty="0" err="1"/>
+              <a:t>vrednošću</a:t>
+            </a:r>
+            <a:r>
+              <a:rPr lang="en-US" dirty="0"/>
+              <a:t>, </a:t>
+            </a:r>
+            <a:r>
+              <a:rPr lang="en-US" dirty="0" err="1"/>
+              <a:t>čime</a:t>
+            </a:r>
+            <a:r>
+              <a:rPr lang="en-US" dirty="0"/>
+              <a:t> se </a:t>
+            </a:r>
+            <a:r>
+              <a:rPr lang="en-US" dirty="0" err="1"/>
+              <a:t>potvrđuje</a:t>
+            </a:r>
+            <a:r>
+              <a:rPr lang="en-US" dirty="0"/>
+              <a:t> da se </a:t>
+            </a:r>
+            <a:r>
+              <a:rPr lang="en-US" dirty="0" err="1"/>
+              <a:t>binarne</a:t>
+            </a:r>
+            <a:r>
+              <a:rPr lang="en-US" dirty="0"/>
+              <a:t> </a:t>
+            </a:r>
+            <a:r>
+              <a:rPr lang="en-US" dirty="0" err="1"/>
+              <a:t>promene</a:t>
+            </a:r>
+            <a:r>
+              <a:rPr lang="en-US" dirty="0"/>
+              <a:t> </a:t>
+            </a:r>
+            <a:r>
+              <a:rPr lang="en-US" dirty="0" err="1"/>
+              <a:t>pravilno</a:t>
+            </a:r>
+            <a:r>
+              <a:rPr lang="en-US" dirty="0"/>
+              <a:t> </a:t>
+            </a:r>
+            <a:r>
+              <a:rPr lang="en-US" dirty="0" err="1"/>
+              <a:t>prenose</a:t>
+            </a:r>
+            <a:r>
+              <a:rPr lang="en-US" dirty="0"/>
+              <a:t> </a:t>
+            </a:r>
+            <a:r>
+              <a:rPr lang="en-US" dirty="0" err="1"/>
+              <a:t>kroz</a:t>
+            </a:r>
+            <a:r>
+              <a:rPr lang="en-US" dirty="0"/>
+              <a:t> archive directory.</a:t>
+            </a:r>
+          </a:p>
+          <a:p>
+            <a:r>
+              <a:rPr lang="en-US" b="1" dirty="0"/>
+              <a:t>Test 3 — DELETE</a:t>
+            </a:r>
+            <a:r>
+              <a:rPr lang="en-US" dirty="0"/>
+              <a:t> </a:t>
+            </a:r>
+            <a:r>
+              <a:rPr lang="en-US" dirty="0" err="1"/>
+              <a:t>verifikuje</a:t>
+            </a:r>
+            <a:r>
+              <a:rPr lang="en-US" dirty="0"/>
+              <a:t> </a:t>
+            </a:r>
+            <a:r>
+              <a:rPr lang="en-US" dirty="0" err="1"/>
+              <a:t>referijalni</a:t>
+            </a:r>
+            <a:r>
+              <a:rPr lang="en-US" dirty="0"/>
+              <a:t> </a:t>
+            </a:r>
+            <a:r>
+              <a:rPr lang="en-US" dirty="0" err="1"/>
+              <a:t>integritet</a:t>
+            </a:r>
+            <a:r>
+              <a:rPr lang="en-US" dirty="0"/>
+              <a:t> </a:t>
+            </a:r>
+            <a:r>
+              <a:rPr lang="en-US" dirty="0" err="1"/>
+              <a:t>pri</a:t>
+            </a:r>
+            <a:r>
+              <a:rPr lang="en-US" dirty="0"/>
+              <a:t> </a:t>
+            </a:r>
+            <a:r>
+              <a:rPr lang="en-US" dirty="0" err="1"/>
+              <a:t>brisanju</a:t>
+            </a:r>
+            <a:r>
+              <a:rPr lang="en-US" dirty="0"/>
+              <a:t> — </a:t>
+            </a:r>
+            <a:r>
+              <a:rPr lang="en-US" dirty="0" err="1"/>
+              <a:t>brisanje</a:t>
+            </a:r>
+            <a:r>
+              <a:rPr lang="en-US" dirty="0"/>
+              <a:t> se mora </a:t>
+            </a:r>
+            <a:r>
+              <a:rPr lang="en-US" dirty="0" err="1"/>
+              <a:t>izvršiti</a:t>
+            </a:r>
+            <a:r>
+              <a:rPr lang="en-US" dirty="0"/>
+              <a:t> u </a:t>
+            </a:r>
+            <a:r>
+              <a:rPr lang="en-US" dirty="0" err="1"/>
+              <a:t>ispravnom</a:t>
+            </a:r>
+            <a:r>
+              <a:rPr lang="en-US" dirty="0"/>
+              <a:t> </a:t>
+            </a:r>
+            <a:r>
+              <a:rPr lang="en-US" dirty="0" err="1"/>
+              <a:t>redosledu</a:t>
+            </a:r>
+            <a:r>
+              <a:rPr lang="en-US" dirty="0"/>
+              <a:t> (</a:t>
+            </a:r>
+            <a:r>
+              <a:rPr lang="en-US" dirty="0" err="1"/>
+              <a:t>prvo</a:t>
+            </a:r>
+            <a:r>
+              <a:rPr lang="en-US" dirty="0"/>
+              <a:t> SALARY_HISTORY, pa EMPLOYEE), a COUNT </a:t>
+            </a:r>
+            <a:r>
+              <a:rPr lang="en-US" dirty="0" err="1"/>
+              <a:t>na</a:t>
+            </a:r>
+            <a:r>
+              <a:rPr lang="en-US" dirty="0"/>
+              <a:t> slave </a:t>
+            </a:r>
+            <a:r>
+              <a:rPr lang="en-US" dirty="0" err="1"/>
+              <a:t>bazi</a:t>
+            </a:r>
+            <a:r>
+              <a:rPr lang="en-US" dirty="0"/>
+              <a:t> mora </a:t>
+            </a:r>
+            <a:r>
+              <a:rPr lang="en-US" dirty="0" err="1"/>
+              <a:t>potvrditi</a:t>
+            </a:r>
+            <a:r>
+              <a:rPr lang="en-US" dirty="0"/>
+              <a:t> da je </a:t>
+            </a:r>
+            <a:r>
+              <a:rPr lang="en-US" dirty="0" err="1"/>
+              <a:t>integritet</a:t>
+            </a:r>
+            <a:r>
+              <a:rPr lang="en-US" dirty="0"/>
+              <a:t> </a:t>
+            </a:r>
+            <a:r>
+              <a:rPr lang="en-US" dirty="0" err="1"/>
+              <a:t>očuvan</a:t>
+            </a:r>
+            <a:r>
+              <a:rPr lang="en-US" dirty="0"/>
+              <a:t> </a:t>
+            </a:r>
+            <a:r>
+              <a:rPr lang="en-US" dirty="0" err="1"/>
+              <a:t>na</a:t>
+            </a:r>
+            <a:r>
+              <a:rPr lang="en-US" dirty="0"/>
+              <a:t> oba </a:t>
+            </a:r>
+            <a:r>
+              <a:rPr lang="en-US" dirty="0" err="1"/>
+              <a:t>čvora</a:t>
+            </a:r>
+            <a:r>
+              <a:rPr lang="en-US" dirty="0"/>
+              <a:t>.</a:t>
+            </a:r>
+          </a:p>
+          <a:p>
+            <a:r>
+              <a:rPr lang="en-US" b="1" dirty="0"/>
+              <a:t>Test 4 — Health-check</a:t>
+            </a:r>
+            <a:r>
+              <a:rPr lang="en-US" dirty="0"/>
+              <a:t> je </a:t>
+            </a:r>
+            <a:r>
+              <a:rPr lang="en-US" dirty="0" err="1"/>
+              <a:t>najvažniji</a:t>
+            </a:r>
+            <a:r>
+              <a:rPr lang="en-US" dirty="0"/>
+              <a:t> monitoring </a:t>
+            </a:r>
+            <a:r>
+              <a:rPr lang="en-US" dirty="0" err="1"/>
+              <a:t>alat</a:t>
+            </a:r>
+            <a:r>
+              <a:rPr lang="en-US" dirty="0"/>
+              <a:t> — </a:t>
+            </a:r>
+            <a:r>
+              <a:rPr lang="en-US" dirty="0" err="1"/>
+              <a:t>poređenjem</a:t>
+            </a:r>
+            <a:r>
+              <a:rPr lang="en-US" dirty="0"/>
+              <a:t> MON$NEXT_TRANSACTION </a:t>
+            </a:r>
+            <a:r>
+              <a:rPr lang="en-US" dirty="0" err="1"/>
+              <a:t>između</a:t>
+            </a:r>
+            <a:r>
+              <a:rPr lang="en-US" dirty="0"/>
+              <a:t> </a:t>
+            </a:r>
+            <a:r>
+              <a:rPr lang="en-US" dirty="0" err="1"/>
+              <a:t>mastera</a:t>
+            </a:r>
+            <a:r>
+              <a:rPr lang="en-US" dirty="0"/>
+              <a:t> </a:t>
+            </a:r>
+            <a:r>
+              <a:rPr lang="en-US" dirty="0" err="1"/>
+              <a:t>i</a:t>
+            </a:r>
+            <a:r>
+              <a:rPr lang="en-US" dirty="0"/>
+              <a:t> </a:t>
+            </a:r>
+            <a:r>
+              <a:rPr lang="en-US" dirty="0" err="1"/>
+              <a:t>replike</a:t>
+            </a:r>
+            <a:r>
+              <a:rPr lang="en-US" dirty="0"/>
+              <a:t> </a:t>
+            </a:r>
+            <a:r>
+              <a:rPr lang="en-US" dirty="0" err="1"/>
+              <a:t>dobijamo</a:t>
+            </a:r>
+            <a:r>
+              <a:rPr lang="en-US" dirty="0"/>
+              <a:t> </a:t>
+            </a:r>
+            <a:r>
+              <a:rPr lang="en-US" dirty="0" err="1"/>
+              <a:t>direktan</a:t>
+            </a:r>
+            <a:r>
+              <a:rPr lang="en-US" dirty="0"/>
+              <a:t> </a:t>
+            </a:r>
+            <a:r>
+              <a:rPr lang="en-US" dirty="0" err="1"/>
+              <a:t>uvid</a:t>
+            </a:r>
+            <a:r>
+              <a:rPr lang="en-US" dirty="0"/>
+              <a:t> u </a:t>
+            </a:r>
+            <a:r>
+              <a:rPr lang="en-US" dirty="0" err="1"/>
+              <a:t>zdravlje</a:t>
+            </a:r>
+            <a:r>
+              <a:rPr lang="en-US" dirty="0"/>
+              <a:t> </a:t>
+            </a:r>
+            <a:r>
+              <a:rPr lang="en-US" dirty="0" err="1"/>
+              <a:t>replikacije</a:t>
+            </a:r>
+            <a:r>
+              <a:rPr lang="en-US" dirty="0"/>
+              <a:t>, mala </a:t>
+            </a:r>
+            <a:r>
+              <a:rPr lang="en-US" dirty="0" err="1"/>
+              <a:t>razlika</a:t>
+            </a:r>
+            <a:r>
+              <a:rPr lang="en-US" dirty="0"/>
+              <a:t> </a:t>
+            </a:r>
+            <a:r>
+              <a:rPr lang="en-US" dirty="0" err="1"/>
+              <a:t>znači</a:t>
+            </a:r>
+            <a:r>
+              <a:rPr lang="en-US" dirty="0"/>
+              <a:t> </a:t>
+            </a:r>
+            <a:r>
+              <a:rPr lang="en-US" dirty="0" err="1"/>
+              <a:t>zdravo</a:t>
+            </a:r>
+            <a:r>
+              <a:rPr lang="en-US" dirty="0"/>
+              <a:t> </a:t>
+            </a:r>
+            <a:r>
+              <a:rPr lang="en-US" dirty="0" err="1"/>
+              <a:t>okruženje</a:t>
+            </a:r>
+            <a:r>
+              <a:rPr lang="en-US" dirty="0"/>
+              <a:t>, a </a:t>
+            </a:r>
+            <a:r>
+              <a:rPr lang="en-US" dirty="0" err="1"/>
+              <a:t>velika</a:t>
+            </a:r>
+            <a:r>
+              <a:rPr lang="en-US" dirty="0"/>
+              <a:t> </a:t>
+            </a:r>
+            <a:r>
+              <a:rPr lang="en-US" dirty="0" err="1"/>
+              <a:t>razlika</a:t>
+            </a:r>
+            <a:r>
+              <a:rPr lang="en-US" dirty="0"/>
+              <a:t> </a:t>
+            </a:r>
+            <a:r>
+              <a:rPr lang="en-US" dirty="0" err="1"/>
+              <a:t>signalizira</a:t>
+            </a:r>
+            <a:r>
+              <a:rPr lang="en-US" dirty="0"/>
+              <a:t> lag problem koji </a:t>
+            </a:r>
+            <a:r>
+              <a:rPr lang="en-US" dirty="0" err="1"/>
+              <a:t>zahteva</a:t>
+            </a:r>
+            <a:r>
+              <a:rPr lang="en-US" dirty="0"/>
+              <a:t> </a:t>
+            </a:r>
+            <a:r>
+              <a:rPr lang="en-US" dirty="0" err="1"/>
+              <a:t>hitnu</a:t>
+            </a:r>
+            <a:r>
+              <a:rPr lang="en-US" dirty="0"/>
+              <a:t> </a:t>
+            </a:r>
+            <a:r>
+              <a:rPr lang="en-US" dirty="0" err="1"/>
+              <a:t>dijagnostiku</a:t>
+            </a:r>
+            <a:r>
+              <a:rPr lang="en-US" dirty="0"/>
+              <a:t>.</a:t>
+            </a:r>
+          </a:p>
+          <a:p>
+            <a:r>
+              <a:rPr lang="en-US" b="1" dirty="0"/>
+              <a:t>Test 5 — </a:t>
+            </a:r>
+            <a:r>
+              <a:rPr lang="en-US" b="1" dirty="0" err="1"/>
+              <a:t>Isključivanje</a:t>
+            </a:r>
+            <a:r>
+              <a:rPr lang="en-US" b="1" dirty="0"/>
+              <a:t> </a:t>
+            </a:r>
+            <a:r>
+              <a:rPr lang="en-US" b="1" dirty="0" err="1"/>
+              <a:t>tabele</a:t>
+            </a:r>
+            <a:r>
+              <a:rPr lang="en-US" dirty="0"/>
+              <a:t> </a:t>
+            </a:r>
+            <a:r>
+              <a:rPr lang="en-US" dirty="0" err="1"/>
+              <a:t>demonstrira</a:t>
+            </a:r>
+            <a:r>
+              <a:rPr lang="en-US" dirty="0"/>
+              <a:t> </a:t>
+            </a:r>
+            <a:r>
+              <a:rPr lang="en-US" dirty="0" err="1"/>
+              <a:t>fleksibilnost</a:t>
+            </a:r>
+            <a:r>
+              <a:rPr lang="en-US" dirty="0"/>
+              <a:t> </a:t>
+            </a:r>
+            <a:r>
+              <a:rPr lang="en-US" dirty="0" err="1"/>
+              <a:t>logičke</a:t>
+            </a:r>
+            <a:r>
+              <a:rPr lang="en-US" dirty="0"/>
+              <a:t> </a:t>
+            </a:r>
+            <a:r>
+              <a:rPr lang="en-US" dirty="0" err="1"/>
+              <a:t>replikacije</a:t>
+            </a:r>
+            <a:r>
+              <a:rPr lang="en-US" dirty="0"/>
+              <a:t> — </a:t>
+            </a:r>
+            <a:r>
+              <a:rPr lang="en-US" dirty="0" err="1"/>
+              <a:t>komandom</a:t>
+            </a:r>
+            <a:r>
+              <a:rPr lang="en-US" dirty="0"/>
+              <a:t> ALTER PUBLICATION </a:t>
+            </a:r>
+            <a:r>
+              <a:rPr lang="en-US" dirty="0" err="1"/>
+              <a:t>konkretna</a:t>
+            </a:r>
+            <a:r>
+              <a:rPr lang="en-US" dirty="0"/>
+              <a:t> </a:t>
+            </a:r>
+            <a:r>
+              <a:rPr lang="en-US" dirty="0" err="1"/>
+              <a:t>tabela</a:t>
+            </a:r>
+            <a:r>
+              <a:rPr lang="en-US" dirty="0"/>
+              <a:t> se </a:t>
+            </a:r>
+            <a:r>
+              <a:rPr lang="en-US" dirty="0" err="1"/>
+              <a:t>isključuje</a:t>
+            </a:r>
+            <a:r>
+              <a:rPr lang="en-US" dirty="0"/>
+              <a:t> </a:t>
+            </a:r>
+            <a:r>
+              <a:rPr lang="en-US" dirty="0" err="1"/>
+              <a:t>iz</a:t>
+            </a:r>
+            <a:r>
+              <a:rPr lang="en-US" dirty="0"/>
+              <a:t> </a:t>
+            </a:r>
+            <a:r>
+              <a:rPr lang="en-US" dirty="0" err="1"/>
+              <a:t>replikacije</a:t>
+            </a:r>
+            <a:r>
+              <a:rPr lang="en-US" dirty="0"/>
+              <a:t> bez </a:t>
+            </a:r>
+            <a:r>
+              <a:rPr lang="en-US" dirty="0" err="1"/>
+              <a:t>uticaja</a:t>
+            </a:r>
+            <a:r>
+              <a:rPr lang="en-US" dirty="0"/>
+              <a:t> </a:t>
+            </a:r>
+            <a:r>
+              <a:rPr lang="en-US" dirty="0" err="1"/>
+              <a:t>na</a:t>
+            </a:r>
+            <a:r>
+              <a:rPr lang="en-US" dirty="0"/>
+              <a:t> </a:t>
+            </a:r>
+            <a:r>
+              <a:rPr lang="en-US" dirty="0" err="1"/>
+              <a:t>ostale</a:t>
+            </a:r>
+            <a:r>
+              <a:rPr lang="en-US" dirty="0"/>
+              <a:t> </a:t>
+            </a:r>
+            <a:r>
+              <a:rPr lang="en-US" dirty="0" err="1"/>
+              <a:t>tabele</a:t>
+            </a:r>
+            <a:r>
+              <a:rPr lang="en-US" dirty="0"/>
+              <a:t>, </a:t>
+            </a:r>
+            <a:r>
+              <a:rPr lang="en-US" dirty="0" err="1"/>
+              <a:t>što</a:t>
+            </a:r>
+            <a:r>
+              <a:rPr lang="en-US" dirty="0"/>
+              <a:t> je </a:t>
+            </a:r>
+            <a:r>
+              <a:rPr lang="en-US" dirty="0" err="1"/>
+              <a:t>jedna</a:t>
+            </a:r>
+            <a:r>
+              <a:rPr lang="en-US" dirty="0"/>
+              <a:t> od </a:t>
+            </a:r>
+            <a:r>
+              <a:rPr lang="en-US" dirty="0" err="1"/>
+              <a:t>ključnih</a:t>
+            </a:r>
+            <a:r>
+              <a:rPr lang="en-US" dirty="0"/>
+              <a:t> </a:t>
+            </a:r>
+            <a:r>
+              <a:rPr lang="en-US" dirty="0" err="1"/>
+              <a:t>prednosti</a:t>
+            </a:r>
+            <a:r>
+              <a:rPr lang="en-US" dirty="0"/>
+              <a:t> </a:t>
+            </a:r>
+            <a:r>
+              <a:rPr lang="en-US" dirty="0" err="1"/>
+              <a:t>logičke</a:t>
+            </a:r>
+            <a:r>
+              <a:rPr lang="en-US" dirty="0"/>
+              <a:t> </a:t>
+            </a:r>
+            <a:r>
+              <a:rPr lang="en-US" dirty="0" err="1"/>
+              <a:t>nad</a:t>
+            </a:r>
+            <a:r>
+              <a:rPr lang="en-US" dirty="0"/>
+              <a:t> </a:t>
+            </a:r>
+            <a:r>
+              <a:rPr lang="en-US" dirty="0" err="1"/>
+              <a:t>binarnom</a:t>
+            </a:r>
+            <a:r>
+              <a:rPr lang="en-US" dirty="0"/>
+              <a:t> </a:t>
+            </a:r>
+            <a:r>
+              <a:rPr lang="en-US" dirty="0" err="1"/>
+              <a:t>replikacijom</a:t>
+            </a:r>
+            <a:endParaRPr lang="en-US" dirty="0"/>
+          </a:p>
+          <a:p>
             <a:endParaRPr lang="en-US" dirty="0"/>
           </a:p>
         </p:txBody>
@@ -459,6 +1420,841 @@
           <a:bodyPr/>
           <a:lstStyle/>
           <a:p>
+            <a:r>
+              <a:rPr lang="en-US" dirty="0"/>
+              <a:t>Mirroring </a:t>
+            </a:r>
+            <a:r>
+              <a:rPr lang="en-US" dirty="0" err="1"/>
+              <a:t>i</a:t>
+            </a:r>
+            <a:r>
+              <a:rPr lang="en-US" dirty="0"/>
+              <a:t> </a:t>
+            </a:r>
+            <a:r>
+              <a:rPr lang="en-US" dirty="0" err="1"/>
+              <a:t>replikacija</a:t>
+            </a:r>
+            <a:r>
+              <a:rPr lang="en-US" dirty="0"/>
+              <a:t> </a:t>
+            </a:r>
+            <a:r>
+              <a:rPr lang="en-US" dirty="0" err="1"/>
+              <a:t>su</a:t>
+            </a:r>
+            <a:r>
+              <a:rPr lang="en-US" dirty="0"/>
+              <a:t> </a:t>
+            </a:r>
+            <a:r>
+              <a:rPr lang="en-US" dirty="0" err="1"/>
+              <a:t>dva</a:t>
+            </a:r>
+            <a:r>
+              <a:rPr lang="en-US" dirty="0"/>
+              <a:t> </a:t>
+            </a:r>
+            <a:r>
+              <a:rPr lang="en-US" dirty="0" err="1"/>
+              <a:t>fundamentalno</a:t>
+            </a:r>
+            <a:r>
+              <a:rPr lang="en-US" dirty="0"/>
+              <a:t> </a:t>
+            </a:r>
+            <a:r>
+              <a:rPr lang="en-US" dirty="0" err="1"/>
+              <a:t>različita</a:t>
+            </a:r>
+            <a:r>
+              <a:rPr lang="en-US" dirty="0"/>
+              <a:t> </a:t>
+            </a:r>
+            <a:r>
+              <a:rPr lang="en-US" dirty="0" err="1"/>
+              <a:t>mehanizma</a:t>
+            </a:r>
+            <a:r>
+              <a:rPr lang="en-US" dirty="0"/>
+              <a:t> — Mirroring je </a:t>
+            </a:r>
+            <a:r>
+              <a:rPr lang="en-US" dirty="0" err="1"/>
+              <a:t>hardverska</a:t>
+            </a:r>
+            <a:r>
+              <a:rPr lang="en-US" dirty="0"/>
+              <a:t> </a:t>
+            </a:r>
+            <a:r>
+              <a:rPr lang="en-US" dirty="0" err="1"/>
+              <a:t>redundansa</a:t>
+            </a:r>
+            <a:r>
+              <a:rPr lang="en-US" dirty="0"/>
+              <a:t> </a:t>
+            </a:r>
+            <a:r>
+              <a:rPr lang="en-US" dirty="0" err="1"/>
+              <a:t>koja</a:t>
+            </a:r>
+            <a:r>
+              <a:rPr lang="en-US" dirty="0"/>
+              <a:t> </a:t>
+            </a:r>
+            <a:r>
+              <a:rPr lang="en-US" dirty="0" err="1"/>
+              <a:t>radi</a:t>
+            </a:r>
+            <a:r>
+              <a:rPr lang="en-US" dirty="0"/>
+              <a:t> </a:t>
+            </a:r>
+            <a:r>
+              <a:rPr lang="en-US" dirty="0" err="1"/>
+              <a:t>na</a:t>
+            </a:r>
+            <a:r>
+              <a:rPr lang="en-US" dirty="0"/>
+              <a:t> </a:t>
+            </a:r>
+            <a:r>
+              <a:rPr lang="en-US" dirty="0" err="1"/>
+              <a:t>nivou</a:t>
+            </a:r>
+            <a:r>
+              <a:rPr lang="en-US" dirty="0"/>
+              <a:t> </a:t>
+            </a:r>
+            <a:r>
+              <a:rPr lang="en-US" dirty="0" err="1"/>
+              <a:t>stranica</a:t>
+            </a:r>
+            <a:r>
+              <a:rPr lang="en-US" dirty="0"/>
+              <a:t> </a:t>
+            </a:r>
+            <a:r>
+              <a:rPr lang="en-US" dirty="0" err="1"/>
+              <a:t>isključivo</a:t>
+            </a:r>
+            <a:r>
+              <a:rPr lang="en-US" dirty="0"/>
+              <a:t> </a:t>
+            </a:r>
+            <a:r>
+              <a:rPr lang="en-US" dirty="0" err="1"/>
+              <a:t>unutar</a:t>
+            </a:r>
+            <a:r>
+              <a:rPr lang="en-US" dirty="0"/>
+              <a:t> LAN-a, </a:t>
+            </a:r>
+            <a:r>
+              <a:rPr lang="en-US" dirty="0" err="1"/>
+              <a:t>dok</a:t>
+            </a:r>
+            <a:r>
+              <a:rPr lang="en-US" dirty="0"/>
+              <a:t> je </a:t>
+            </a:r>
+            <a:r>
+              <a:rPr lang="en-US" dirty="0" err="1"/>
+              <a:t>replikacija</a:t>
+            </a:r>
+            <a:r>
+              <a:rPr lang="en-US" dirty="0"/>
+              <a:t> </a:t>
+            </a:r>
+            <a:r>
+              <a:rPr lang="en-US" dirty="0" err="1"/>
+              <a:t>logička</a:t>
+            </a:r>
+            <a:r>
+              <a:rPr lang="en-US" dirty="0"/>
+              <a:t> </a:t>
+            </a:r>
+            <a:r>
+              <a:rPr lang="en-US" dirty="0" err="1"/>
+              <a:t>sinhronizacija</a:t>
+            </a:r>
+            <a:r>
+              <a:rPr lang="en-US" dirty="0"/>
+              <a:t> </a:t>
+            </a:r>
+            <a:r>
+              <a:rPr lang="en-US" dirty="0" err="1"/>
+              <a:t>koja</a:t>
+            </a:r>
+            <a:r>
+              <a:rPr lang="en-US" dirty="0"/>
+              <a:t> </a:t>
+            </a:r>
+            <a:r>
+              <a:rPr lang="en-US" dirty="0" err="1"/>
+              <a:t>podržava</a:t>
+            </a:r>
+            <a:r>
+              <a:rPr lang="en-US" dirty="0"/>
+              <a:t> WAN </a:t>
+            </a:r>
+            <a:r>
+              <a:rPr lang="en-US" dirty="0" err="1"/>
+              <a:t>veze</a:t>
+            </a:r>
+            <a:r>
+              <a:rPr lang="en-US" dirty="0"/>
+              <a:t> </a:t>
+            </a:r>
+            <a:r>
+              <a:rPr lang="en-US" dirty="0" err="1"/>
+              <a:t>i</a:t>
+            </a:r>
+            <a:r>
+              <a:rPr lang="en-US" dirty="0"/>
+              <a:t> </a:t>
+            </a:r>
+            <a:r>
+              <a:rPr lang="en-US" dirty="0" err="1"/>
+              <a:t>selektivno</a:t>
+            </a:r>
+            <a:r>
+              <a:rPr lang="en-US" dirty="0"/>
+              <a:t> </a:t>
+            </a:r>
+            <a:r>
+              <a:rPr lang="en-US" dirty="0" err="1"/>
+              <a:t>kopiranje</a:t>
+            </a:r>
+            <a:r>
+              <a:rPr lang="en-US" dirty="0"/>
+              <a:t> </a:t>
+            </a:r>
+            <a:r>
+              <a:rPr lang="en-US" dirty="0" err="1"/>
+              <a:t>specifičnih</a:t>
+            </a:r>
+            <a:r>
+              <a:rPr lang="en-US" dirty="0"/>
+              <a:t> </a:t>
+            </a:r>
+            <a:r>
+              <a:rPr lang="en-US" dirty="0" err="1"/>
+              <a:t>tabela</a:t>
+            </a:r>
+            <a:r>
+              <a:rPr lang="en-US" dirty="0"/>
+              <a:t>.</a:t>
+            </a:r>
+          </a:p>
+          <a:p>
+            <a:r>
+              <a:rPr lang="en-US" dirty="0" err="1"/>
+              <a:t>Nativna</a:t>
+            </a:r>
+            <a:r>
+              <a:rPr lang="en-US" dirty="0"/>
+              <a:t> </a:t>
+            </a:r>
+            <a:r>
+              <a:rPr lang="en-US" dirty="0" err="1"/>
+              <a:t>replikacija</a:t>
+            </a:r>
+            <a:r>
+              <a:rPr lang="en-US" dirty="0"/>
+              <a:t> </a:t>
+            </a:r>
+            <a:r>
+              <a:rPr lang="en-US" dirty="0" err="1"/>
+              <a:t>uvedena</a:t>
+            </a:r>
+            <a:r>
+              <a:rPr lang="en-US" dirty="0"/>
+              <a:t> u Firebird 4.0 </a:t>
+            </a:r>
+            <a:r>
+              <a:rPr lang="en-US" dirty="0" err="1"/>
+              <a:t>predstavlja</a:t>
+            </a:r>
+            <a:r>
+              <a:rPr lang="en-US" dirty="0"/>
+              <a:t> </a:t>
+            </a:r>
+            <a:r>
+              <a:rPr lang="en-US" dirty="0" err="1"/>
+              <a:t>revolucionarnu</a:t>
+            </a:r>
+            <a:r>
+              <a:rPr lang="en-US" dirty="0"/>
+              <a:t> </a:t>
+            </a:r>
+            <a:r>
+              <a:rPr lang="en-US" dirty="0" err="1"/>
+              <a:t>promenu</a:t>
+            </a:r>
+            <a:r>
+              <a:rPr lang="en-US" dirty="0"/>
+              <a:t> — po </a:t>
+            </a:r>
+            <a:r>
+              <a:rPr lang="en-US" dirty="0" err="1"/>
+              <a:t>prvi</a:t>
+            </a:r>
+            <a:r>
+              <a:rPr lang="en-US" dirty="0"/>
+              <a:t> put je </a:t>
+            </a:r>
+            <a:r>
+              <a:rPr lang="en-US" dirty="0" err="1"/>
+              <a:t>replikacija</a:t>
+            </a:r>
+            <a:r>
+              <a:rPr lang="en-US" dirty="0"/>
+              <a:t> </a:t>
+            </a:r>
+            <a:r>
+              <a:rPr lang="en-US" dirty="0" err="1"/>
+              <a:t>ugrađeni</a:t>
+            </a:r>
+            <a:r>
+              <a:rPr lang="en-US" dirty="0"/>
+              <a:t> </a:t>
+            </a:r>
+            <a:r>
+              <a:rPr lang="en-US" dirty="0" err="1"/>
+              <a:t>mehanizam</a:t>
+            </a:r>
+            <a:r>
+              <a:rPr lang="en-US" dirty="0"/>
+              <a:t> </a:t>
+            </a:r>
+            <a:r>
+              <a:rPr lang="en-US" dirty="0" err="1"/>
+              <a:t>samog</a:t>
+            </a:r>
+            <a:r>
+              <a:rPr lang="en-US" dirty="0"/>
+              <a:t> engine-a bez </a:t>
+            </a:r>
+            <a:r>
+              <a:rPr lang="en-US" dirty="0" err="1"/>
+              <a:t>potrebe</a:t>
+            </a:r>
+            <a:r>
+              <a:rPr lang="en-US" dirty="0"/>
+              <a:t> za </a:t>
+            </a:r>
+            <a:r>
+              <a:rPr lang="en-US" dirty="0" err="1"/>
+              <a:t>alatima</a:t>
+            </a:r>
+            <a:r>
+              <a:rPr lang="en-US" dirty="0"/>
+              <a:t> </a:t>
+            </a:r>
+            <a:r>
+              <a:rPr lang="en-US" dirty="0" err="1"/>
+              <a:t>trećih</a:t>
+            </a:r>
+            <a:r>
+              <a:rPr lang="en-US" dirty="0"/>
+              <a:t> </a:t>
+            </a:r>
+            <a:r>
+              <a:rPr lang="en-US" dirty="0" err="1"/>
+              <a:t>strana</a:t>
+            </a:r>
+            <a:r>
+              <a:rPr lang="en-US" dirty="0"/>
+              <a:t>.</a:t>
+            </a:r>
+          </a:p>
+          <a:p>
+            <a:r>
+              <a:rPr lang="en-US" dirty="0"/>
+              <a:t>Izbor </a:t>
+            </a:r>
+            <a:r>
+              <a:rPr lang="en-US" dirty="0" err="1"/>
+              <a:t>između</a:t>
+            </a:r>
+            <a:r>
+              <a:rPr lang="en-US" dirty="0"/>
+              <a:t> </a:t>
+            </a:r>
+            <a:r>
+              <a:rPr lang="en-US" dirty="0" err="1"/>
+              <a:t>sinhrona</a:t>
+            </a:r>
+            <a:r>
+              <a:rPr lang="en-US" dirty="0"/>
+              <a:t> </a:t>
+            </a:r>
+            <a:r>
+              <a:rPr lang="en-US" dirty="0" err="1"/>
+              <a:t>i</a:t>
+            </a:r>
+            <a:r>
+              <a:rPr lang="en-US" dirty="0"/>
+              <a:t> </a:t>
+            </a:r>
+            <a:r>
+              <a:rPr lang="en-US" dirty="0" err="1"/>
+              <a:t>asinhrona</a:t>
+            </a:r>
+            <a:r>
+              <a:rPr lang="en-US" dirty="0"/>
+              <a:t> </a:t>
+            </a:r>
+            <a:r>
+              <a:rPr lang="en-US" dirty="0" err="1"/>
+              <a:t>režima</a:t>
+            </a:r>
+            <a:r>
+              <a:rPr lang="en-US" dirty="0"/>
+              <a:t> </a:t>
+            </a:r>
+            <a:r>
+              <a:rPr lang="en-US" dirty="0" err="1"/>
+              <a:t>uvek</a:t>
+            </a:r>
+            <a:r>
+              <a:rPr lang="en-US" dirty="0"/>
+              <a:t> se </a:t>
+            </a:r>
+            <a:r>
+              <a:rPr lang="en-US" dirty="0" err="1"/>
+              <a:t>svodi</a:t>
+            </a:r>
+            <a:r>
+              <a:rPr lang="en-US" dirty="0"/>
+              <a:t> </a:t>
+            </a:r>
+            <a:r>
+              <a:rPr lang="en-US" dirty="0" err="1"/>
+              <a:t>na</a:t>
+            </a:r>
+            <a:r>
+              <a:rPr lang="en-US" dirty="0"/>
+              <a:t> </a:t>
+            </a:r>
+            <a:r>
+              <a:rPr lang="en-US" dirty="0" err="1"/>
+              <a:t>poslovni</a:t>
+            </a:r>
+            <a:r>
+              <a:rPr lang="en-US" dirty="0"/>
+              <a:t> </a:t>
+            </a:r>
+            <a:r>
+              <a:rPr lang="en-US" dirty="0" err="1"/>
+              <a:t>zahtev</a:t>
+            </a:r>
+            <a:r>
+              <a:rPr lang="en-US" dirty="0"/>
+              <a:t> — Zero Data Loss za </a:t>
+            </a:r>
+            <a:r>
+              <a:rPr lang="en-US" dirty="0" err="1"/>
+              <a:t>finansije</a:t>
+            </a:r>
+            <a:r>
+              <a:rPr lang="en-US" dirty="0"/>
+              <a:t> </a:t>
+            </a:r>
+            <a:r>
+              <a:rPr lang="en-US" dirty="0" err="1"/>
+              <a:t>i</a:t>
+            </a:r>
+            <a:r>
+              <a:rPr lang="en-US" dirty="0"/>
+              <a:t> </a:t>
+            </a:r>
+            <a:r>
+              <a:rPr lang="en-US" dirty="0" err="1"/>
+              <a:t>zdravstvo</a:t>
+            </a:r>
+            <a:r>
+              <a:rPr lang="en-US" dirty="0"/>
+              <a:t>, </a:t>
+            </a:r>
+            <a:r>
+              <a:rPr lang="en-US" dirty="0" err="1"/>
+              <a:t>maksimalna</a:t>
+            </a:r>
+            <a:r>
+              <a:rPr lang="en-US" dirty="0"/>
+              <a:t> </a:t>
+            </a:r>
+            <a:r>
+              <a:rPr lang="en-US" dirty="0" err="1"/>
+              <a:t>brzina</a:t>
+            </a:r>
+            <a:r>
+              <a:rPr lang="en-US" dirty="0"/>
+              <a:t> za </a:t>
+            </a:r>
+            <a:r>
+              <a:rPr lang="en-US" dirty="0" err="1"/>
+              <a:t>geografski</a:t>
+            </a:r>
+            <a:r>
+              <a:rPr lang="en-US" dirty="0"/>
+              <a:t> </a:t>
+            </a:r>
+            <a:r>
+              <a:rPr lang="en-US" dirty="0" err="1"/>
+              <a:t>distribuirane</a:t>
+            </a:r>
+            <a:r>
+              <a:rPr lang="en-US" dirty="0"/>
+              <a:t> </a:t>
+            </a:r>
+            <a:r>
+              <a:rPr lang="en-US" dirty="0" err="1"/>
+              <a:t>sisteme</a:t>
+            </a:r>
+            <a:r>
+              <a:rPr lang="en-US" dirty="0"/>
+              <a:t> </a:t>
+            </a:r>
+            <a:r>
+              <a:rPr lang="en-US" dirty="0" err="1"/>
+              <a:t>sa</a:t>
+            </a:r>
+            <a:r>
+              <a:rPr lang="en-US" dirty="0"/>
+              <a:t> WAN </a:t>
+            </a:r>
+            <a:r>
+              <a:rPr lang="en-US" dirty="0" err="1"/>
+              <a:t>vezama</a:t>
+            </a:r>
+            <a:r>
+              <a:rPr lang="en-US" dirty="0"/>
+              <a:t>.</a:t>
+            </a:r>
+          </a:p>
+          <a:p>
+            <a:r>
+              <a:rPr lang="en-US" dirty="0" err="1"/>
+              <a:t>Eho</a:t>
+            </a:r>
+            <a:r>
+              <a:rPr lang="en-US" dirty="0"/>
+              <a:t> </a:t>
+            </a:r>
+            <a:r>
+              <a:rPr lang="en-US" dirty="0" err="1"/>
+              <a:t>efekat</a:t>
+            </a:r>
+            <a:r>
+              <a:rPr lang="en-US" dirty="0"/>
+              <a:t> je </a:t>
+            </a:r>
+            <a:r>
+              <a:rPr lang="en-US" dirty="0" err="1"/>
+              <a:t>jedan</a:t>
+            </a:r>
+            <a:r>
+              <a:rPr lang="en-US" dirty="0"/>
+              <a:t> od </a:t>
+            </a:r>
+            <a:r>
+              <a:rPr lang="en-US" dirty="0" err="1"/>
+              <a:t>najvećih</a:t>
+            </a:r>
+            <a:r>
+              <a:rPr lang="en-US" dirty="0"/>
+              <a:t> </a:t>
+            </a:r>
+            <a:r>
+              <a:rPr lang="en-US" dirty="0" err="1"/>
+              <a:t>izazova</a:t>
+            </a:r>
+            <a:r>
+              <a:rPr lang="en-US" dirty="0"/>
+              <a:t> u Multi-Master </a:t>
+            </a:r>
+            <a:r>
+              <a:rPr lang="en-US" dirty="0" err="1"/>
+              <a:t>topologijama</a:t>
+            </a:r>
+            <a:r>
+              <a:rPr lang="en-US" dirty="0"/>
+              <a:t> — RDB$GET_CONTEXT('SYSTEM','REPLICATING') je </a:t>
+            </a:r>
+            <a:r>
+              <a:rPr lang="en-US" dirty="0" err="1"/>
+              <a:t>ključni</a:t>
+            </a:r>
+            <a:r>
+              <a:rPr lang="en-US" dirty="0"/>
+              <a:t> </a:t>
+            </a:r>
+            <a:r>
+              <a:rPr lang="en-US" dirty="0" err="1"/>
+              <a:t>mehanizam</a:t>
+            </a:r>
+            <a:r>
+              <a:rPr lang="en-US" dirty="0"/>
+              <a:t> koji </a:t>
+            </a:r>
+            <a:r>
+              <a:rPr lang="en-US" dirty="0" err="1"/>
+              <a:t>sprečava</a:t>
+            </a:r>
+            <a:r>
+              <a:rPr lang="en-US" dirty="0"/>
+              <a:t> </a:t>
+            </a:r>
+            <a:r>
+              <a:rPr lang="en-US" dirty="0" err="1"/>
+              <a:t>beskonačne</a:t>
+            </a:r>
+            <a:r>
+              <a:rPr lang="en-US" dirty="0"/>
+              <a:t> </a:t>
+            </a:r>
+            <a:r>
+              <a:rPr lang="en-US" dirty="0" err="1"/>
+              <a:t>petlje</a:t>
+            </a:r>
+            <a:r>
+              <a:rPr lang="en-US" dirty="0"/>
+              <a:t> </a:t>
+            </a:r>
+            <a:r>
+              <a:rPr lang="en-US" dirty="0" err="1"/>
+              <a:t>tako</a:t>
+            </a:r>
+            <a:r>
+              <a:rPr lang="en-US" dirty="0"/>
+              <a:t> </a:t>
+            </a:r>
+            <a:r>
+              <a:rPr lang="en-US" dirty="0" err="1"/>
+              <a:t>što</a:t>
+            </a:r>
+            <a:r>
+              <a:rPr lang="en-US" dirty="0"/>
+              <a:t> </a:t>
+            </a:r>
+            <a:r>
+              <a:rPr lang="en-US" dirty="0" err="1"/>
+              <a:t>trigeri</a:t>
+            </a:r>
+            <a:r>
+              <a:rPr lang="en-US" dirty="0"/>
+              <a:t> ne </a:t>
+            </a:r>
+            <a:r>
+              <a:rPr lang="en-US" dirty="0" err="1"/>
+              <a:t>okidaju</a:t>
+            </a:r>
+            <a:r>
+              <a:rPr lang="en-US" dirty="0"/>
+              <a:t> </a:t>
+            </a:r>
+            <a:r>
+              <a:rPr lang="en-US" dirty="0" err="1"/>
+              <a:t>ponovo</a:t>
+            </a:r>
+            <a:r>
+              <a:rPr lang="en-US" dirty="0"/>
+              <a:t> </a:t>
+            </a:r>
+            <a:r>
+              <a:rPr lang="en-US" dirty="0" err="1"/>
+              <a:t>tokom</a:t>
+            </a:r>
+            <a:r>
+              <a:rPr lang="en-US" dirty="0"/>
+              <a:t> </a:t>
+            </a:r>
+            <a:r>
+              <a:rPr lang="en-US" dirty="0" err="1"/>
+              <a:t>procesa</a:t>
+            </a:r>
+            <a:r>
+              <a:rPr lang="en-US" dirty="0"/>
+              <a:t> </a:t>
+            </a:r>
+            <a:r>
+              <a:rPr lang="en-US" dirty="0" err="1"/>
+              <a:t>replikacije</a:t>
+            </a:r>
+            <a:r>
+              <a:rPr lang="en-US" dirty="0"/>
+              <a:t>.</a:t>
+            </a:r>
+          </a:p>
+          <a:p>
+            <a:r>
+              <a:rPr lang="en-US" dirty="0"/>
+              <a:t>Firebird 4.0/5.0 je </a:t>
+            </a:r>
+            <a:r>
+              <a:rPr lang="en-US" dirty="0" err="1"/>
+              <a:t>tek</a:t>
+            </a:r>
+            <a:r>
+              <a:rPr lang="en-US" dirty="0"/>
+              <a:t> </a:t>
+            </a:r>
+            <a:r>
+              <a:rPr lang="en-US" dirty="0" err="1"/>
+              <a:t>nedavno</a:t>
+            </a:r>
+            <a:r>
+              <a:rPr lang="en-US" dirty="0"/>
+              <a:t> </a:t>
+            </a:r>
+            <a:r>
+              <a:rPr lang="en-US" dirty="0" err="1"/>
+              <a:t>dostigao</a:t>
+            </a:r>
+            <a:r>
+              <a:rPr lang="en-US" dirty="0"/>
+              <a:t> enterprise </a:t>
+            </a:r>
+            <a:r>
+              <a:rPr lang="en-US" dirty="0" err="1"/>
+              <a:t>nivo</a:t>
+            </a:r>
+            <a:r>
+              <a:rPr lang="en-US" dirty="0"/>
+              <a:t> </a:t>
+            </a:r>
+            <a:r>
+              <a:rPr lang="en-US" dirty="0" err="1"/>
+              <a:t>replikacije</a:t>
+            </a:r>
+            <a:r>
+              <a:rPr lang="en-US" dirty="0"/>
+              <a:t> koji PostgreSQL </a:t>
+            </a:r>
+            <a:r>
+              <a:rPr lang="en-US" dirty="0" err="1"/>
+              <a:t>i</a:t>
+            </a:r>
+            <a:r>
+              <a:rPr lang="en-US" dirty="0"/>
+              <a:t> MSSQL </a:t>
+            </a:r>
+            <a:r>
+              <a:rPr lang="en-US" dirty="0" err="1"/>
+              <a:t>imaju</a:t>
+            </a:r>
+            <a:r>
+              <a:rPr lang="en-US" dirty="0"/>
+              <a:t> </a:t>
+            </a:r>
+            <a:r>
+              <a:rPr lang="en-US" dirty="0" err="1"/>
+              <a:t>već</a:t>
+            </a:r>
+            <a:r>
+              <a:rPr lang="en-US" dirty="0"/>
+              <a:t> </a:t>
+            </a:r>
+            <a:r>
+              <a:rPr lang="en-US" dirty="0" err="1"/>
+              <a:t>godinama</a:t>
+            </a:r>
+            <a:r>
+              <a:rPr lang="en-US" dirty="0"/>
+              <a:t> — </a:t>
+            </a:r>
+            <a:r>
+              <a:rPr lang="en-US" dirty="0" err="1"/>
+              <a:t>ali</a:t>
+            </a:r>
+            <a:r>
+              <a:rPr lang="en-US" dirty="0"/>
+              <a:t> </a:t>
+            </a:r>
+            <a:r>
+              <a:rPr lang="en-US" dirty="0" err="1"/>
+              <a:t>prednost</a:t>
+            </a:r>
+            <a:r>
+              <a:rPr lang="en-US" dirty="0"/>
+              <a:t> </a:t>
+            </a:r>
+            <a:r>
+              <a:rPr lang="en-US" dirty="0" err="1"/>
+              <a:t>Firebirda</a:t>
+            </a:r>
+            <a:r>
+              <a:rPr lang="en-US" dirty="0"/>
+              <a:t> </a:t>
+            </a:r>
+            <a:r>
+              <a:rPr lang="en-US" dirty="0" err="1"/>
+              <a:t>ostaje</a:t>
+            </a:r>
+            <a:r>
+              <a:rPr lang="en-US" dirty="0"/>
+              <a:t> </a:t>
+            </a:r>
+            <a:r>
+              <a:rPr lang="en-US" dirty="0" err="1"/>
+              <a:t>izuzetno</a:t>
+            </a:r>
+            <a:r>
+              <a:rPr lang="en-US" dirty="0"/>
+              <a:t> </a:t>
+            </a:r>
+            <a:r>
+              <a:rPr lang="en-US" dirty="0" err="1"/>
+              <a:t>niska</a:t>
+            </a:r>
+            <a:r>
+              <a:rPr lang="en-US" dirty="0"/>
+              <a:t> </a:t>
+            </a:r>
+            <a:r>
+              <a:rPr lang="en-US" dirty="0" err="1"/>
+              <a:t>potrošnja</a:t>
+            </a:r>
+            <a:r>
+              <a:rPr lang="en-US" dirty="0"/>
+              <a:t> </a:t>
+            </a:r>
+            <a:r>
+              <a:rPr lang="en-US" dirty="0" err="1"/>
+              <a:t>resursa</a:t>
+            </a:r>
+            <a:r>
+              <a:rPr lang="en-US" dirty="0"/>
+              <a:t> </a:t>
+            </a:r>
+            <a:r>
+              <a:rPr lang="en-US" dirty="0" err="1"/>
+              <a:t>i</a:t>
+            </a:r>
+            <a:r>
+              <a:rPr lang="en-US" dirty="0"/>
+              <a:t> </a:t>
+            </a:r>
+            <a:r>
+              <a:rPr lang="en-US" dirty="0" err="1"/>
+              <a:t>jednostavnost</a:t>
+            </a:r>
+            <a:r>
+              <a:rPr lang="en-US" dirty="0"/>
+              <a:t> </a:t>
+            </a:r>
+            <a:r>
+              <a:rPr lang="en-US" dirty="0" err="1"/>
+              <a:t>administracije</a:t>
+            </a:r>
+            <a:endParaRPr lang="en-US" dirty="0"/>
+          </a:p>
+          <a:p>
             <a:endParaRPr lang="en-US" dirty="0"/>
           </a:p>
         </p:txBody>
@@ -675,19 +2471,11 @@
             </a:r>
             <a:r>
               <a:rPr lang="en-US" dirty="0" err="1"/>
-              <a:t>teorijskog</a:t>
-            </a:r>
-            <a:r>
-              <a:rPr lang="en-US" dirty="0"/>
-              <a:t> </a:t>
-            </a:r>
-            <a:r>
-              <a:rPr lang="en-US" dirty="0" err="1"/>
-              <a:t>temelja</a:t>
-            </a:r>
-            <a:r>
-              <a:rPr lang="en-US" dirty="0"/>
-              <a:t> — </a:t>
+              <a:t>teorijsk</a:t>
+            </a:r>
+            <a:r>
+              <a:rPr lang="sr-Latn-RS" dirty="0"/>
+              <a:t>e osnove, odnosno, </a:t>
             </a:r>
             <a:r>
               <a:rPr lang="en-US" dirty="0" err="1"/>
@@ -3614,6 +5402,11 @@
               <a:rPr lang="en-US" dirty="0"/>
               <a:t> engine-a.</a:t>
             </a:r>
+            <a:r>
+              <a:rPr lang="sr-Latn-RS" dirty="0"/>
+              <a:t> </a:t>
+            </a:r>
+            <a:endParaRPr lang="en-US" dirty="0"/>
           </a:p>
           <a:p>
             <a:r>
@@ -3844,8 +5637,10 @@
               <a:rPr lang="en-US" dirty="0"/>
               <a:t> SQL replay.</a:t>
             </a:r>
-          </a:p>
-          <a:p>
+            <a:r>
+              <a:rPr lang="sr-Latn-RS" dirty="0"/>
+              <a:t> </a:t>
+            </a:r>
             <a:r>
               <a:rPr lang="en-US" b="1" dirty="0"/>
               <a:t>Journal Segment</a:t>
@@ -4006,8 +5801,10 @@
               <a:rPr lang="en-US" dirty="0"/>
               <a:t> segment.</a:t>
             </a:r>
-          </a:p>
-          <a:p>
+            <a:r>
+              <a:rPr lang="sr-Latn-RS" dirty="0"/>
+              <a:t> </a:t>
+            </a:r>
             <a:r>
               <a:rPr lang="en-US" b="1" dirty="0"/>
               <a:t>Source GUID</a:t>
@@ -5415,6 +7212,976 @@
           <a:bodyPr/>
           <a:lstStyle/>
           <a:p>
+            <a:r>
+              <a:rPr lang="en-US" dirty="0" err="1"/>
+              <a:t>Logička</a:t>
+            </a:r>
+            <a:r>
+              <a:rPr lang="en-US" dirty="0"/>
+              <a:t> </a:t>
+            </a:r>
+            <a:r>
+              <a:rPr lang="en-US" dirty="0" err="1"/>
+              <a:t>replikacija</a:t>
+            </a:r>
+            <a:r>
+              <a:rPr lang="en-US" dirty="0"/>
+              <a:t> </a:t>
+            </a:r>
+            <a:r>
+              <a:rPr lang="en-US" dirty="0" err="1"/>
+              <a:t>zasnovana</a:t>
+            </a:r>
+            <a:r>
+              <a:rPr lang="en-US" dirty="0"/>
+              <a:t> </a:t>
+            </a:r>
+            <a:r>
+              <a:rPr lang="en-US" dirty="0" err="1"/>
+              <a:t>na</a:t>
+            </a:r>
+            <a:r>
+              <a:rPr lang="en-US" dirty="0"/>
+              <a:t> CDC </a:t>
+            </a:r>
+            <a:r>
+              <a:rPr lang="en-US" dirty="0" err="1"/>
+              <a:t>principu</a:t>
+            </a:r>
+            <a:r>
+              <a:rPr lang="en-US" dirty="0"/>
+              <a:t> </a:t>
+            </a:r>
+            <a:r>
+              <a:rPr lang="en-US" dirty="0" err="1"/>
+              <a:t>presreće</a:t>
+            </a:r>
+            <a:r>
+              <a:rPr lang="en-US" dirty="0"/>
+              <a:t> </a:t>
+            </a:r>
+            <a:r>
+              <a:rPr lang="en-US" dirty="0" err="1"/>
+              <a:t>svaki</a:t>
+            </a:r>
+            <a:r>
+              <a:rPr lang="en-US" dirty="0"/>
+              <a:t> INSERT, UPDATE </a:t>
+            </a:r>
+            <a:r>
+              <a:rPr lang="en-US" dirty="0" err="1"/>
+              <a:t>i</a:t>
+            </a:r>
+            <a:r>
+              <a:rPr lang="en-US" dirty="0"/>
+              <a:t> DELETE </a:t>
+            </a:r>
+            <a:r>
+              <a:rPr lang="en-US" dirty="0" err="1"/>
+              <a:t>kroz</a:t>
+            </a:r>
+            <a:r>
+              <a:rPr lang="en-US" dirty="0"/>
+              <a:t> </a:t>
+            </a:r>
+            <a:r>
+              <a:rPr lang="en-US" dirty="0" err="1"/>
+              <a:t>trigere</a:t>
+            </a:r>
+            <a:r>
+              <a:rPr lang="en-US" dirty="0"/>
+              <a:t> </a:t>
+            </a:r>
+            <a:r>
+              <a:rPr lang="en-US" dirty="0" err="1"/>
+              <a:t>i</a:t>
+            </a:r>
+            <a:r>
+              <a:rPr lang="en-US" dirty="0"/>
+              <a:t> </a:t>
+            </a:r>
+            <a:r>
+              <a:rPr lang="en-US" dirty="0" err="1"/>
+              <a:t>beleži</a:t>
+            </a:r>
+            <a:r>
+              <a:rPr lang="en-US" dirty="0"/>
+              <a:t> </a:t>
+            </a:r>
+            <a:r>
+              <a:rPr lang="en-US" dirty="0" err="1"/>
+              <a:t>promene</a:t>
+            </a:r>
+            <a:r>
+              <a:rPr lang="en-US" dirty="0"/>
+              <a:t> u </a:t>
+            </a:r>
+            <a:r>
+              <a:rPr lang="en-US" dirty="0" err="1"/>
+              <a:t>namensku</a:t>
+            </a:r>
+            <a:r>
+              <a:rPr lang="en-US" dirty="0"/>
+              <a:t> REPLICATION_LOG </a:t>
+            </a:r>
+            <a:r>
+              <a:rPr lang="en-US" dirty="0" err="1"/>
+              <a:t>tabelu</a:t>
+            </a:r>
+            <a:r>
+              <a:rPr lang="en-US" dirty="0"/>
+              <a:t>, za </a:t>
+            </a:r>
+            <a:r>
+              <a:rPr lang="en-US" dirty="0" err="1"/>
+              <a:t>razliku</a:t>
+            </a:r>
+            <a:r>
+              <a:rPr lang="en-US" dirty="0"/>
+              <a:t> od </a:t>
+            </a:r>
+            <a:r>
+              <a:rPr lang="en-US" dirty="0" err="1"/>
+              <a:t>binarne</a:t>
+            </a:r>
+            <a:r>
+              <a:rPr lang="en-US" dirty="0"/>
+              <a:t> </a:t>
+            </a:r>
+            <a:r>
+              <a:rPr lang="en-US" dirty="0" err="1"/>
+              <a:t>replikacije</a:t>
+            </a:r>
+            <a:r>
+              <a:rPr lang="en-US" dirty="0"/>
+              <a:t> </a:t>
+            </a:r>
+            <a:r>
+              <a:rPr lang="en-US" dirty="0" err="1"/>
+              <a:t>koja</a:t>
+            </a:r>
+            <a:r>
+              <a:rPr lang="en-US" dirty="0"/>
+              <a:t> </a:t>
+            </a:r>
+            <a:r>
+              <a:rPr lang="en-US" dirty="0" err="1"/>
+              <a:t>kopira</a:t>
+            </a:r>
+            <a:r>
+              <a:rPr lang="en-US" dirty="0"/>
+              <a:t> </a:t>
+            </a:r>
+            <a:r>
+              <a:rPr lang="en-US" dirty="0" err="1"/>
+              <a:t>fizičke</a:t>
+            </a:r>
+            <a:r>
+              <a:rPr lang="en-US" dirty="0"/>
+              <a:t> </a:t>
+            </a:r>
+            <a:r>
+              <a:rPr lang="en-US" dirty="0" err="1"/>
+              <a:t>stranice</a:t>
+            </a:r>
+            <a:r>
+              <a:rPr lang="en-US" dirty="0"/>
+              <a:t>.</a:t>
+            </a:r>
+          </a:p>
+          <a:p>
+            <a:r>
+              <a:rPr lang="en-US" dirty="0" err="1"/>
+              <a:t>Ključna</a:t>
+            </a:r>
+            <a:r>
+              <a:rPr lang="en-US" dirty="0"/>
+              <a:t> </a:t>
+            </a:r>
+            <a:r>
+              <a:rPr lang="en-US" dirty="0" err="1"/>
+              <a:t>prednost</a:t>
+            </a:r>
+            <a:r>
+              <a:rPr lang="en-US" dirty="0"/>
+              <a:t> CDC </a:t>
+            </a:r>
+            <a:r>
+              <a:rPr lang="en-US" dirty="0" err="1"/>
+              <a:t>pristupa</a:t>
+            </a:r>
+            <a:r>
+              <a:rPr lang="en-US" dirty="0"/>
+              <a:t> je </a:t>
+            </a:r>
+            <a:r>
+              <a:rPr lang="en-US" dirty="0" err="1"/>
+              <a:t>selektivnost</a:t>
+            </a:r>
+            <a:r>
+              <a:rPr lang="en-US" dirty="0"/>
+              <a:t> </a:t>
+            </a:r>
+            <a:r>
+              <a:rPr lang="en-US" dirty="0" err="1"/>
+              <a:t>i</a:t>
+            </a:r>
+            <a:r>
+              <a:rPr lang="en-US" dirty="0"/>
+              <a:t> </a:t>
+            </a:r>
+            <a:r>
+              <a:rPr lang="en-US" dirty="0" err="1"/>
+              <a:t>fleksibilnost</a:t>
+            </a:r>
+            <a:r>
+              <a:rPr lang="en-US" dirty="0"/>
+              <a:t> — </a:t>
+            </a:r>
+            <a:r>
+              <a:rPr lang="en-US" dirty="0" err="1"/>
+              <a:t>moguće</a:t>
+            </a:r>
+            <a:r>
+              <a:rPr lang="en-US" dirty="0"/>
+              <a:t> je </a:t>
+            </a:r>
+            <a:r>
+              <a:rPr lang="en-US" dirty="0" err="1"/>
+              <a:t>replicirati</a:t>
+            </a:r>
+            <a:r>
+              <a:rPr lang="en-US" dirty="0"/>
+              <a:t> </a:t>
+            </a:r>
+            <a:r>
+              <a:rPr lang="en-US" dirty="0" err="1"/>
+              <a:t>samo</a:t>
+            </a:r>
+            <a:r>
+              <a:rPr lang="en-US" dirty="0"/>
+              <a:t> </a:t>
+            </a:r>
+            <a:r>
+              <a:rPr lang="en-US" dirty="0" err="1"/>
+              <a:t>specifične</a:t>
+            </a:r>
+            <a:r>
+              <a:rPr lang="en-US" dirty="0"/>
+              <a:t> </a:t>
+            </a:r>
+            <a:r>
+              <a:rPr lang="en-US" dirty="0" err="1"/>
+              <a:t>tabele</a:t>
+            </a:r>
+            <a:r>
+              <a:rPr lang="en-US" dirty="0"/>
+              <a:t>, </a:t>
+            </a:r>
+            <a:r>
+              <a:rPr lang="en-US" dirty="0" err="1"/>
+              <a:t>između</a:t>
+            </a:r>
+            <a:r>
+              <a:rPr lang="en-US" dirty="0"/>
+              <a:t> </a:t>
+            </a:r>
+            <a:r>
+              <a:rPr lang="en-US" dirty="0" err="1"/>
+              <a:t>različitih</a:t>
+            </a:r>
+            <a:r>
+              <a:rPr lang="en-US" dirty="0"/>
+              <a:t> </a:t>
+            </a:r>
+            <a:r>
+              <a:rPr lang="en-US" dirty="0" err="1"/>
+              <a:t>verzija</a:t>
+            </a:r>
+            <a:r>
+              <a:rPr lang="en-US" dirty="0"/>
+              <a:t> </a:t>
+            </a:r>
+            <a:r>
+              <a:rPr lang="en-US" dirty="0" err="1"/>
+              <a:t>Firebirda</a:t>
+            </a:r>
+            <a:r>
+              <a:rPr lang="en-US" dirty="0"/>
+              <a:t>, pa </a:t>
+            </a:r>
+            <a:r>
+              <a:rPr lang="en-US" dirty="0" err="1"/>
+              <a:t>čak</a:t>
+            </a:r>
+            <a:r>
+              <a:rPr lang="en-US" dirty="0"/>
+              <a:t> </a:t>
+            </a:r>
+            <a:r>
+              <a:rPr lang="en-US" dirty="0" err="1"/>
+              <a:t>i</a:t>
+            </a:r>
+            <a:r>
+              <a:rPr lang="en-US" dirty="0"/>
+              <a:t> ka </a:t>
+            </a:r>
+            <a:r>
+              <a:rPr lang="en-US" dirty="0" err="1"/>
+              <a:t>heterogenim</a:t>
+            </a:r>
+            <a:r>
+              <a:rPr lang="en-US" dirty="0"/>
+              <a:t> </a:t>
+            </a:r>
+            <a:r>
+              <a:rPr lang="en-US" dirty="0" err="1"/>
+              <a:t>sistemima</a:t>
+            </a:r>
+            <a:r>
+              <a:rPr lang="en-US" dirty="0"/>
+              <a:t> </a:t>
+            </a:r>
+            <a:r>
+              <a:rPr lang="en-US" dirty="0" err="1"/>
+              <a:t>poput</a:t>
+            </a:r>
+            <a:r>
+              <a:rPr lang="en-US" dirty="0"/>
+              <a:t> PostgreSQL-a, </a:t>
+            </a:r>
+            <a:r>
+              <a:rPr lang="en-US" dirty="0" err="1"/>
+              <a:t>što</a:t>
+            </a:r>
+            <a:r>
+              <a:rPr lang="en-US" dirty="0"/>
+              <a:t> </a:t>
+            </a:r>
+            <a:r>
+              <a:rPr lang="en-US" dirty="0" err="1"/>
+              <a:t>binarnu</a:t>
+            </a:r>
+            <a:r>
+              <a:rPr lang="en-US" dirty="0"/>
+              <a:t> </a:t>
+            </a:r>
+            <a:r>
+              <a:rPr lang="en-US" dirty="0" err="1"/>
+              <a:t>replikaciju</a:t>
+            </a:r>
+            <a:r>
+              <a:rPr lang="en-US" dirty="0"/>
+              <a:t> ne </a:t>
+            </a:r>
+            <a:r>
+              <a:rPr lang="en-US" dirty="0" err="1"/>
+              <a:t>može</a:t>
+            </a:r>
+            <a:r>
+              <a:rPr lang="en-US" dirty="0"/>
+              <a:t>.</a:t>
+            </a:r>
+          </a:p>
+          <a:p>
+            <a:r>
+              <a:rPr lang="en-US" b="1" dirty="0"/>
+              <a:t>REPLICATION_LOG </a:t>
+            </a:r>
+            <a:r>
+              <a:rPr lang="en-US" b="1" dirty="0" err="1"/>
+              <a:t>tabela</a:t>
+            </a:r>
+            <a:r>
+              <a:rPr lang="en-US" dirty="0"/>
+              <a:t> </a:t>
+            </a:r>
+            <a:r>
+              <a:rPr lang="en-US" dirty="0" err="1"/>
+              <a:t>čuva</a:t>
+            </a:r>
+            <a:r>
+              <a:rPr lang="en-US" dirty="0"/>
+              <a:t> </a:t>
+            </a:r>
+            <a:r>
+              <a:rPr lang="en-US" dirty="0" err="1"/>
+              <a:t>sve</a:t>
+            </a:r>
+            <a:r>
+              <a:rPr lang="en-US" dirty="0"/>
+              <a:t> </a:t>
+            </a:r>
+            <a:r>
+              <a:rPr lang="en-US" dirty="0" err="1"/>
+              <a:t>potrebne</a:t>
+            </a:r>
+            <a:r>
+              <a:rPr lang="en-US" dirty="0"/>
+              <a:t> </a:t>
+            </a:r>
+            <a:r>
+              <a:rPr lang="en-US" dirty="0" err="1"/>
+              <a:t>informacije</a:t>
+            </a:r>
+            <a:r>
+              <a:rPr lang="en-US" dirty="0"/>
+              <a:t> o </a:t>
+            </a:r>
+            <a:r>
+              <a:rPr lang="en-US" dirty="0" err="1"/>
+              <a:t>svakoj</a:t>
+            </a:r>
+            <a:r>
+              <a:rPr lang="en-US" dirty="0"/>
+              <a:t> </a:t>
+            </a:r>
+            <a:r>
+              <a:rPr lang="en-US" dirty="0" err="1"/>
+              <a:t>promeni</a:t>
+            </a:r>
+            <a:r>
+              <a:rPr lang="en-US" dirty="0"/>
+              <a:t> — </a:t>
+            </a:r>
+            <a:r>
+              <a:rPr lang="en-US" dirty="0" err="1"/>
+              <a:t>ime</a:t>
+            </a:r>
+            <a:r>
+              <a:rPr lang="en-US" dirty="0"/>
+              <a:t> </a:t>
+            </a:r>
+            <a:r>
+              <a:rPr lang="en-US" dirty="0" err="1"/>
+              <a:t>tabele</a:t>
+            </a:r>
+            <a:r>
+              <a:rPr lang="en-US" dirty="0"/>
+              <a:t>, tip </a:t>
+            </a:r>
+            <a:r>
+              <a:rPr lang="en-US" dirty="0" err="1"/>
+              <a:t>operacije</a:t>
+            </a:r>
+            <a:r>
+              <a:rPr lang="en-US" dirty="0"/>
+              <a:t>, </a:t>
+            </a:r>
+            <a:r>
+              <a:rPr lang="en-US" dirty="0" err="1"/>
+              <a:t>vrednost</a:t>
+            </a:r>
+            <a:r>
+              <a:rPr lang="en-US" dirty="0"/>
+              <a:t> </a:t>
+            </a:r>
+            <a:r>
+              <a:rPr lang="en-US" dirty="0" err="1"/>
+              <a:t>primarnog</a:t>
+            </a:r>
+            <a:r>
+              <a:rPr lang="en-US" dirty="0"/>
+              <a:t> </a:t>
+            </a:r>
+            <a:r>
+              <a:rPr lang="en-US" dirty="0" err="1"/>
+              <a:t>ključa</a:t>
+            </a:r>
+            <a:r>
+              <a:rPr lang="en-US" dirty="0"/>
+              <a:t>, timestamp </a:t>
+            </a:r>
+            <a:r>
+              <a:rPr lang="en-US" dirty="0" err="1"/>
+              <a:t>i</a:t>
+            </a:r>
+            <a:r>
+              <a:rPr lang="en-US" dirty="0"/>
+              <a:t> </a:t>
+            </a:r>
+            <a:r>
+              <a:rPr lang="en-US" dirty="0" err="1"/>
+              <a:t>kompletan</a:t>
+            </a:r>
+            <a:r>
+              <a:rPr lang="en-US" dirty="0"/>
+              <a:t> JSON/XML </a:t>
+            </a:r>
+            <a:r>
+              <a:rPr lang="en-US" dirty="0" err="1"/>
+              <a:t>sadržaj</a:t>
+            </a:r>
+            <a:r>
+              <a:rPr lang="en-US" dirty="0"/>
+              <a:t> </a:t>
+            </a:r>
+            <a:r>
+              <a:rPr lang="en-US" dirty="0" err="1"/>
+              <a:t>promene</a:t>
+            </a:r>
+            <a:r>
+              <a:rPr lang="en-US" dirty="0"/>
+              <a:t> </a:t>
+            </a:r>
+            <a:r>
+              <a:rPr lang="en-US" dirty="0" err="1"/>
+              <a:t>kao</a:t>
+            </a:r>
+            <a:r>
+              <a:rPr lang="en-US" dirty="0"/>
+              <a:t> payload.</a:t>
+            </a:r>
+          </a:p>
+          <a:p>
+            <a:r>
+              <a:rPr lang="en-US" b="1" dirty="0"/>
+              <a:t>Triger TRG_EMP_REPL</a:t>
+            </a:r>
+            <a:r>
+              <a:rPr lang="en-US" dirty="0"/>
+              <a:t> se </a:t>
+            </a:r>
+            <a:r>
+              <a:rPr lang="en-US" dirty="0" err="1"/>
+              <a:t>aktivira</a:t>
+            </a:r>
+            <a:r>
+              <a:rPr lang="en-US" dirty="0"/>
+              <a:t> </a:t>
+            </a:r>
+            <a:r>
+              <a:rPr lang="en-US" dirty="0" err="1"/>
+              <a:t>nakon</a:t>
+            </a:r>
+            <a:r>
+              <a:rPr lang="en-US" dirty="0"/>
+              <a:t> </a:t>
+            </a:r>
+            <a:r>
+              <a:rPr lang="en-US" dirty="0" err="1"/>
+              <a:t>svake</a:t>
+            </a:r>
+            <a:r>
+              <a:rPr lang="en-US" dirty="0"/>
+              <a:t> </a:t>
+            </a:r>
+            <a:r>
+              <a:rPr lang="en-US" dirty="0" err="1"/>
+              <a:t>promene</a:t>
+            </a:r>
+            <a:r>
+              <a:rPr lang="en-US" dirty="0"/>
+              <a:t> </a:t>
+            </a:r>
+            <a:r>
+              <a:rPr lang="en-US" dirty="0" err="1"/>
+              <a:t>na</a:t>
+            </a:r>
+            <a:r>
+              <a:rPr lang="en-US" dirty="0"/>
+              <a:t> </a:t>
+            </a:r>
+            <a:r>
+              <a:rPr lang="en-US" dirty="0" err="1"/>
+              <a:t>tabeli</a:t>
+            </a:r>
+            <a:r>
+              <a:rPr lang="en-US" dirty="0"/>
+              <a:t> EMPLOYEE, </a:t>
+            </a:r>
+            <a:r>
+              <a:rPr lang="en-US" dirty="0" err="1"/>
+              <a:t>ali</a:t>
+            </a:r>
+            <a:r>
+              <a:rPr lang="en-US" dirty="0"/>
+              <a:t> pre </a:t>
+            </a:r>
+            <a:r>
+              <a:rPr lang="en-US" dirty="0" err="1"/>
+              <a:t>upisa</a:t>
+            </a:r>
+            <a:r>
+              <a:rPr lang="en-US" dirty="0"/>
+              <a:t> u log </a:t>
+            </a:r>
+            <a:r>
+              <a:rPr lang="en-US" dirty="0" err="1"/>
+              <a:t>proverava</a:t>
+            </a:r>
+            <a:r>
+              <a:rPr lang="en-US" dirty="0"/>
+              <a:t> RDB$GET_CONTEXT — </a:t>
+            </a:r>
+            <a:r>
+              <a:rPr lang="en-US" dirty="0" err="1"/>
+              <a:t>ako</a:t>
+            </a:r>
+            <a:r>
+              <a:rPr lang="en-US" dirty="0"/>
+              <a:t> je </a:t>
+            </a:r>
+            <a:r>
+              <a:rPr lang="en-US" dirty="0" err="1"/>
+              <a:t>vrednost</a:t>
+            </a:r>
+            <a:r>
+              <a:rPr lang="en-US" dirty="0"/>
+              <a:t> NULL, </a:t>
+            </a:r>
+            <a:r>
+              <a:rPr lang="en-US" dirty="0" err="1"/>
+              <a:t>promena</a:t>
+            </a:r>
+            <a:r>
+              <a:rPr lang="en-US" dirty="0"/>
+              <a:t> </a:t>
+            </a:r>
+            <a:r>
+              <a:rPr lang="en-US" dirty="0" err="1"/>
+              <a:t>dolazi</a:t>
+            </a:r>
+            <a:r>
+              <a:rPr lang="en-US" dirty="0"/>
+              <a:t> od </a:t>
+            </a:r>
+            <a:r>
+              <a:rPr lang="en-US" dirty="0" err="1"/>
+              <a:t>korisnika</a:t>
+            </a:r>
+            <a:r>
+              <a:rPr lang="en-US" dirty="0"/>
+              <a:t> </a:t>
+            </a:r>
+            <a:r>
+              <a:rPr lang="en-US" dirty="0" err="1"/>
+              <a:t>i</a:t>
+            </a:r>
+            <a:r>
+              <a:rPr lang="en-US" dirty="0"/>
+              <a:t> </a:t>
+            </a:r>
+            <a:r>
+              <a:rPr lang="en-US" dirty="0" err="1"/>
+              <a:t>beleži</a:t>
+            </a:r>
+            <a:r>
+              <a:rPr lang="en-US" dirty="0"/>
+              <a:t> se, a </a:t>
+            </a:r>
+            <a:r>
+              <a:rPr lang="en-US" dirty="0" err="1"/>
+              <a:t>ako</a:t>
+            </a:r>
+            <a:r>
+              <a:rPr lang="en-US" dirty="0"/>
+              <a:t> </a:t>
+            </a:r>
+            <a:r>
+              <a:rPr lang="en-US" dirty="0" err="1"/>
+              <a:t>nije</a:t>
+            </a:r>
+            <a:r>
+              <a:rPr lang="en-US" dirty="0"/>
+              <a:t> NULL, </a:t>
+            </a:r>
+            <a:r>
+              <a:rPr lang="en-US" dirty="0" err="1"/>
+              <a:t>promena</a:t>
+            </a:r>
+            <a:r>
+              <a:rPr lang="en-US" dirty="0"/>
+              <a:t> </a:t>
+            </a:r>
+            <a:r>
+              <a:rPr lang="en-US" dirty="0" err="1"/>
+              <a:t>dolazi</a:t>
+            </a:r>
+            <a:r>
+              <a:rPr lang="en-US" dirty="0"/>
+              <a:t> od </a:t>
+            </a:r>
+            <a:r>
+              <a:rPr lang="en-US" dirty="0" err="1"/>
+              <a:t>replikacionog</a:t>
+            </a:r>
+            <a:r>
+              <a:rPr lang="en-US" dirty="0"/>
+              <a:t> </a:t>
+            </a:r>
+            <a:r>
+              <a:rPr lang="en-US" dirty="0" err="1"/>
+              <a:t>agenta</a:t>
+            </a:r>
+            <a:r>
+              <a:rPr lang="en-US" dirty="0"/>
+              <a:t> </a:t>
+            </a:r>
+            <a:r>
+              <a:rPr lang="en-US" dirty="0" err="1"/>
+              <a:t>i</a:t>
+            </a:r>
+            <a:r>
+              <a:rPr lang="en-US" dirty="0"/>
+              <a:t> </a:t>
+            </a:r>
+            <a:r>
+              <a:rPr lang="en-US" dirty="0" err="1"/>
+              <a:t>preskače</a:t>
+            </a:r>
+            <a:r>
+              <a:rPr lang="en-US" dirty="0"/>
+              <a:t> se, </a:t>
+            </a:r>
+            <a:r>
+              <a:rPr lang="en-US" dirty="0" err="1"/>
+              <a:t>čime</a:t>
+            </a:r>
+            <a:r>
+              <a:rPr lang="en-US" dirty="0"/>
+              <a:t> se </a:t>
+            </a:r>
+            <a:r>
+              <a:rPr lang="en-US" dirty="0" err="1"/>
+              <a:t>sprečava</a:t>
+            </a:r>
+            <a:r>
+              <a:rPr lang="en-US" dirty="0"/>
+              <a:t> </a:t>
+            </a:r>
+            <a:r>
+              <a:rPr lang="en-US" dirty="0" err="1"/>
+              <a:t>beskonačna</a:t>
+            </a:r>
+            <a:r>
+              <a:rPr lang="en-US" dirty="0"/>
+              <a:t> </a:t>
+            </a:r>
+            <a:r>
+              <a:rPr lang="en-US" dirty="0" err="1"/>
+              <a:t>petlja</a:t>
+            </a:r>
+            <a:r>
+              <a:rPr lang="en-US" dirty="0"/>
+              <a:t>.</a:t>
+            </a:r>
+          </a:p>
+          <a:p>
+            <a:r>
+              <a:rPr lang="en-US" dirty="0"/>
+              <a:t>Za </a:t>
+            </a:r>
+            <a:r>
+              <a:rPr lang="en-US" dirty="0" err="1"/>
+              <a:t>rešavanje</a:t>
+            </a:r>
+            <a:r>
+              <a:rPr lang="en-US" dirty="0"/>
+              <a:t> </a:t>
+            </a:r>
+            <a:r>
+              <a:rPr lang="en-US" dirty="0" err="1"/>
+              <a:t>konflikata</a:t>
+            </a:r>
+            <a:r>
+              <a:rPr lang="en-US" dirty="0"/>
+              <a:t> </a:t>
+            </a:r>
+            <a:r>
+              <a:rPr lang="en-US" dirty="0" err="1"/>
+              <a:t>postoje</a:t>
+            </a:r>
+            <a:r>
+              <a:rPr lang="en-US" dirty="0"/>
+              <a:t> tri </a:t>
+            </a:r>
+            <a:r>
+              <a:rPr lang="en-US" dirty="0" err="1"/>
+              <a:t>strategije</a:t>
+            </a:r>
+            <a:r>
+              <a:rPr lang="en-US" dirty="0"/>
+              <a:t> — </a:t>
+            </a:r>
+            <a:r>
+              <a:rPr lang="en-US" b="1" dirty="0"/>
+              <a:t>Last Write Wins</a:t>
+            </a:r>
+            <a:r>
+              <a:rPr lang="en-US" dirty="0"/>
+              <a:t> </a:t>
+            </a:r>
+            <a:r>
+              <a:rPr lang="en-US" dirty="0" err="1"/>
+              <a:t>gde</a:t>
+            </a:r>
+            <a:r>
+              <a:rPr lang="en-US" dirty="0"/>
+              <a:t> timestamp </a:t>
+            </a:r>
+            <a:r>
+              <a:rPr lang="en-US" dirty="0" err="1"/>
+              <a:t>odlučuje</a:t>
+            </a:r>
+            <a:r>
+              <a:rPr lang="en-US" dirty="0"/>
+              <a:t> koji </a:t>
+            </a:r>
+            <a:r>
+              <a:rPr lang="en-US" dirty="0" err="1"/>
+              <a:t>zapis</a:t>
+            </a:r>
+            <a:r>
+              <a:rPr lang="en-US" dirty="0"/>
+              <a:t> </a:t>
+            </a:r>
+            <a:r>
+              <a:rPr lang="en-US" dirty="0" err="1"/>
+              <a:t>pobeđuje</a:t>
+            </a:r>
+            <a:r>
+              <a:rPr lang="en-US" dirty="0"/>
+              <a:t>, </a:t>
+            </a:r>
+            <a:r>
+              <a:rPr lang="en-US" b="1" dirty="0"/>
+              <a:t>Static Priority</a:t>
+            </a:r>
+            <a:r>
+              <a:rPr lang="en-US" dirty="0"/>
+              <a:t> </a:t>
+            </a:r>
+            <a:r>
+              <a:rPr lang="en-US" dirty="0" err="1"/>
+              <a:t>gde</a:t>
+            </a:r>
+            <a:r>
+              <a:rPr lang="en-US" dirty="0"/>
+              <a:t> master </a:t>
+            </a:r>
+            <a:r>
+              <a:rPr lang="en-US" dirty="0" err="1"/>
+              <a:t>uvek</a:t>
+            </a:r>
+            <a:r>
+              <a:rPr lang="en-US" dirty="0"/>
+              <a:t> </a:t>
+            </a:r>
+            <a:r>
+              <a:rPr lang="en-US" dirty="0" err="1"/>
+              <a:t>pobeđuje</a:t>
+            </a:r>
+            <a:r>
+              <a:rPr lang="en-US" dirty="0"/>
+              <a:t> </a:t>
+            </a:r>
+            <a:r>
+              <a:rPr lang="en-US" dirty="0" err="1"/>
+              <a:t>nad</a:t>
+            </a:r>
+            <a:r>
+              <a:rPr lang="en-US" dirty="0"/>
+              <a:t> slave </a:t>
+            </a:r>
+            <a:r>
+              <a:rPr lang="en-US" dirty="0" err="1"/>
+              <a:t>čvorom</a:t>
+            </a:r>
+            <a:r>
+              <a:rPr lang="en-US" dirty="0"/>
+              <a:t>, </a:t>
+            </a:r>
+            <a:r>
+              <a:rPr lang="en-US" dirty="0" err="1"/>
+              <a:t>i</a:t>
+            </a:r>
+            <a:r>
+              <a:rPr lang="en-US" dirty="0"/>
+              <a:t> </a:t>
+            </a:r>
+            <a:r>
+              <a:rPr lang="en-US" b="1" dirty="0" err="1"/>
+              <a:t>Aplikativna</a:t>
+            </a:r>
+            <a:r>
+              <a:rPr lang="en-US" b="1" dirty="0"/>
+              <a:t> </a:t>
+            </a:r>
+            <a:r>
+              <a:rPr lang="en-US" b="1" dirty="0" err="1"/>
+              <a:t>logika</a:t>
+            </a:r>
+            <a:r>
+              <a:rPr lang="en-US" dirty="0"/>
+              <a:t> </a:t>
+            </a:r>
+            <a:r>
+              <a:rPr lang="en-US" dirty="0" err="1"/>
+              <a:t>kao</a:t>
+            </a:r>
+            <a:r>
+              <a:rPr lang="en-US" dirty="0"/>
+              <a:t> </a:t>
+            </a:r>
+            <a:r>
+              <a:rPr lang="en-US" dirty="0" err="1"/>
+              <a:t>najsigurniji</a:t>
+            </a:r>
+            <a:r>
+              <a:rPr lang="en-US" dirty="0"/>
+              <a:t> </a:t>
+            </a:r>
+            <a:r>
+              <a:rPr lang="en-US" dirty="0" err="1"/>
+              <a:t>ali</a:t>
+            </a:r>
+            <a:r>
+              <a:rPr lang="en-US" dirty="0"/>
+              <a:t> </a:t>
+            </a:r>
+            <a:r>
+              <a:rPr lang="en-US" dirty="0" err="1"/>
+              <a:t>najsloženiji</a:t>
+            </a:r>
+            <a:r>
+              <a:rPr lang="en-US" dirty="0"/>
+              <a:t> </a:t>
+            </a:r>
+            <a:r>
+              <a:rPr lang="en-US" dirty="0" err="1"/>
+              <a:t>pristup</a:t>
+            </a:r>
+            <a:r>
+              <a:rPr lang="en-US" dirty="0"/>
+              <a:t> za </a:t>
+            </a:r>
+            <a:r>
+              <a:rPr lang="en-US" dirty="0" err="1"/>
+              <a:t>kritične</a:t>
+            </a:r>
+            <a:r>
+              <a:rPr lang="en-US" dirty="0"/>
+              <a:t> </a:t>
+            </a:r>
+            <a:r>
+              <a:rPr lang="en-US" dirty="0" err="1"/>
+              <a:t>poslovne</a:t>
+            </a:r>
+            <a:r>
+              <a:rPr lang="en-US" dirty="0"/>
+              <a:t> </a:t>
+            </a:r>
+            <a:r>
+              <a:rPr lang="en-US" dirty="0" err="1"/>
+              <a:t>podatke</a:t>
+            </a:r>
+            <a:r>
+              <a:rPr lang="en-US" dirty="0"/>
+              <a:t>. </a:t>
+            </a:r>
+          </a:p>
+          <a:p>
             <a:endParaRPr lang="en-US" dirty="0"/>
           </a:p>
         </p:txBody>
@@ -5499,6 +8266,1116 @@
           <a:bodyPr/>
           <a:lstStyle/>
           <a:p>
+            <a:r>
+              <a:rPr lang="en-US" dirty="0"/>
+              <a:t>Multi-Master </a:t>
+            </a:r>
+            <a:r>
+              <a:rPr lang="en-US" dirty="0" err="1"/>
+              <a:t>topologije</a:t>
+            </a:r>
+            <a:r>
+              <a:rPr lang="en-US" dirty="0"/>
+              <a:t> </a:t>
+            </a:r>
+            <a:r>
+              <a:rPr lang="en-US" dirty="0" err="1"/>
+              <a:t>omogućavaju</a:t>
+            </a:r>
+            <a:r>
+              <a:rPr lang="en-US" dirty="0"/>
+              <a:t> da </a:t>
+            </a:r>
+            <a:r>
+              <a:rPr lang="en-US" dirty="0" err="1"/>
+              <a:t>više</a:t>
+            </a:r>
+            <a:r>
+              <a:rPr lang="en-US" dirty="0"/>
+              <a:t> </a:t>
+            </a:r>
+            <a:r>
+              <a:rPr lang="en-US" dirty="0" err="1"/>
+              <a:t>čvorova</a:t>
+            </a:r>
+            <a:r>
+              <a:rPr lang="en-US" dirty="0"/>
+              <a:t> </a:t>
+            </a:r>
+            <a:r>
+              <a:rPr lang="en-US" dirty="0" err="1"/>
+              <a:t>istovremeno</a:t>
+            </a:r>
+            <a:r>
+              <a:rPr lang="en-US" dirty="0"/>
+              <a:t> prima </a:t>
+            </a:r>
+            <a:r>
+              <a:rPr lang="en-US" dirty="0" err="1"/>
+              <a:t>upise</a:t>
+            </a:r>
+            <a:r>
+              <a:rPr lang="en-US" dirty="0"/>
+              <a:t>, </a:t>
+            </a:r>
+            <a:r>
+              <a:rPr lang="en-US" dirty="0" err="1"/>
+              <a:t>ali</a:t>
+            </a:r>
+            <a:r>
+              <a:rPr lang="en-US" dirty="0"/>
+              <a:t> </a:t>
+            </a:r>
+            <a:r>
+              <a:rPr lang="en-US" dirty="0" err="1"/>
+              <a:t>svaka</a:t>
+            </a:r>
+            <a:r>
+              <a:rPr lang="en-US" dirty="0"/>
+              <a:t> </a:t>
+            </a:r>
+            <a:r>
+              <a:rPr lang="en-US" dirty="0" err="1"/>
+              <a:t>topologija</a:t>
+            </a:r>
+            <a:r>
+              <a:rPr lang="en-US" dirty="0"/>
+              <a:t> </a:t>
+            </a:r>
+            <a:r>
+              <a:rPr lang="en-US" dirty="0" err="1"/>
+              <a:t>nosi</a:t>
+            </a:r>
+            <a:r>
+              <a:rPr lang="en-US" dirty="0"/>
+              <a:t> </a:t>
+            </a:r>
+            <a:r>
+              <a:rPr lang="en-US" dirty="0" err="1"/>
+              <a:t>drugačiji</a:t>
+            </a:r>
+            <a:r>
+              <a:rPr lang="en-US" dirty="0"/>
+              <a:t> </a:t>
+            </a:r>
+            <a:r>
+              <a:rPr lang="en-US" dirty="0" err="1"/>
+              <a:t>kompromis</a:t>
+            </a:r>
+            <a:r>
+              <a:rPr lang="en-US" dirty="0"/>
+              <a:t> </a:t>
+            </a:r>
+            <a:r>
+              <a:rPr lang="en-US" dirty="0" err="1"/>
+              <a:t>između</a:t>
+            </a:r>
+            <a:r>
+              <a:rPr lang="en-US" dirty="0"/>
+              <a:t> </a:t>
+            </a:r>
+            <a:r>
+              <a:rPr lang="en-US" dirty="0" err="1"/>
+              <a:t>jednostavnosti</a:t>
+            </a:r>
+            <a:r>
+              <a:rPr lang="en-US" dirty="0"/>
+              <a:t>, </a:t>
+            </a:r>
+            <a:r>
+              <a:rPr lang="en-US" dirty="0" err="1"/>
+              <a:t>redundanse</a:t>
+            </a:r>
+            <a:r>
+              <a:rPr lang="en-US" dirty="0"/>
+              <a:t> </a:t>
+            </a:r>
+            <a:r>
+              <a:rPr lang="en-US" dirty="0" err="1"/>
+              <a:t>i</a:t>
+            </a:r>
+            <a:r>
+              <a:rPr lang="en-US" dirty="0"/>
+              <a:t> </a:t>
+            </a:r>
+            <a:r>
+              <a:rPr lang="en-US" dirty="0" err="1"/>
+              <a:t>brzine</a:t>
+            </a:r>
+            <a:r>
+              <a:rPr lang="en-US" dirty="0"/>
+              <a:t> </a:t>
+            </a:r>
+            <a:r>
+              <a:rPr lang="en-US" dirty="0" err="1"/>
+              <a:t>oporavka</a:t>
+            </a:r>
+            <a:r>
+              <a:rPr lang="en-US" dirty="0"/>
+              <a:t>.</a:t>
+            </a:r>
+          </a:p>
+          <a:p>
+            <a:r>
+              <a:rPr lang="en-US" b="1" dirty="0"/>
+              <a:t>Star (Zvezda)</a:t>
+            </a:r>
+            <a:r>
+              <a:rPr lang="en-US" dirty="0"/>
+              <a:t> </a:t>
+            </a:r>
+            <a:r>
+              <a:rPr lang="en-US" dirty="0" err="1"/>
+              <a:t>topologija</a:t>
+            </a:r>
+            <a:r>
+              <a:rPr lang="en-US" dirty="0"/>
+              <a:t> </a:t>
+            </a:r>
+            <a:r>
+              <a:rPr lang="en-US" dirty="0" err="1"/>
+              <a:t>povezuje</a:t>
+            </a:r>
+            <a:r>
+              <a:rPr lang="en-US" dirty="0"/>
+              <a:t> </a:t>
+            </a:r>
+            <a:r>
+              <a:rPr lang="en-US" dirty="0" err="1"/>
+              <a:t>sve</a:t>
+            </a:r>
+            <a:r>
+              <a:rPr lang="en-US" dirty="0"/>
+              <a:t> </a:t>
+            </a:r>
+            <a:r>
+              <a:rPr lang="en-US" dirty="0" err="1"/>
+              <a:t>periferne</a:t>
+            </a:r>
+            <a:r>
+              <a:rPr lang="en-US" dirty="0"/>
+              <a:t> </a:t>
+            </a:r>
+            <a:r>
+              <a:rPr lang="en-US" dirty="0" err="1"/>
+              <a:t>čvorove</a:t>
+            </a:r>
+            <a:r>
+              <a:rPr lang="en-US" dirty="0"/>
+              <a:t> </a:t>
+            </a:r>
+            <a:r>
+              <a:rPr lang="en-US" dirty="0" err="1"/>
+              <a:t>isključivo</a:t>
+            </a:r>
+            <a:r>
+              <a:rPr lang="en-US" dirty="0"/>
+              <a:t> </a:t>
+            </a:r>
+            <a:r>
+              <a:rPr lang="en-US" dirty="0" err="1"/>
+              <a:t>sa</a:t>
+            </a:r>
+            <a:r>
+              <a:rPr lang="en-US" dirty="0"/>
+              <a:t> </a:t>
+            </a:r>
+            <a:r>
+              <a:rPr lang="en-US" dirty="0" err="1"/>
+              <a:t>centralnim</a:t>
+            </a:r>
+            <a:r>
+              <a:rPr lang="en-US" dirty="0"/>
+              <a:t> </a:t>
+            </a:r>
+            <a:r>
+              <a:rPr lang="en-US" dirty="0" err="1"/>
+              <a:t>serverom</a:t>
+            </a:r>
+            <a:r>
+              <a:rPr lang="en-US" dirty="0"/>
+              <a:t> — </a:t>
+            </a:r>
+            <a:r>
+              <a:rPr lang="en-US" dirty="0" err="1"/>
+              <a:t>jednostavna</a:t>
+            </a:r>
+            <a:r>
+              <a:rPr lang="en-US" dirty="0"/>
+              <a:t> je za </a:t>
+            </a:r>
+            <a:r>
+              <a:rPr lang="en-US" dirty="0" err="1"/>
+              <a:t>administraciju</a:t>
+            </a:r>
+            <a:r>
+              <a:rPr lang="en-US" dirty="0"/>
+              <a:t> </a:t>
+            </a:r>
+            <a:r>
+              <a:rPr lang="en-US" dirty="0" err="1"/>
+              <a:t>i</a:t>
+            </a:r>
+            <a:r>
+              <a:rPr lang="en-US" dirty="0"/>
+              <a:t> </a:t>
+            </a:r>
+            <a:r>
+              <a:rPr lang="en-US" dirty="0" err="1"/>
+              <a:t>centralizovanu</a:t>
+            </a:r>
+            <a:r>
+              <a:rPr lang="en-US" dirty="0"/>
+              <a:t> </a:t>
+            </a:r>
+            <a:r>
+              <a:rPr lang="en-US" dirty="0" err="1"/>
+              <a:t>kontrolu</a:t>
+            </a:r>
+            <a:r>
+              <a:rPr lang="en-US" dirty="0"/>
+              <a:t>, </a:t>
+            </a:r>
+            <a:r>
+              <a:rPr lang="en-US" dirty="0" err="1"/>
+              <a:t>ali</a:t>
+            </a:r>
+            <a:r>
+              <a:rPr lang="en-US" dirty="0"/>
+              <a:t> </a:t>
+            </a:r>
+            <a:r>
+              <a:rPr lang="en-US" dirty="0" err="1"/>
+              <a:t>centralni</a:t>
+            </a:r>
+            <a:r>
+              <a:rPr lang="en-US" dirty="0"/>
+              <a:t> server </a:t>
+            </a:r>
+            <a:r>
+              <a:rPr lang="en-US" dirty="0" err="1"/>
+              <a:t>predstavlja</a:t>
+            </a:r>
+            <a:r>
+              <a:rPr lang="en-US" dirty="0"/>
+              <a:t> </a:t>
+            </a:r>
+            <a:r>
+              <a:rPr lang="en-US" dirty="0" err="1"/>
+              <a:t>jedinu</a:t>
+            </a:r>
+            <a:r>
+              <a:rPr lang="en-US" dirty="0"/>
+              <a:t> </a:t>
+            </a:r>
+            <a:r>
+              <a:rPr lang="en-US" dirty="0" err="1"/>
+              <a:t>tačku</a:t>
+            </a:r>
+            <a:r>
+              <a:rPr lang="en-US" dirty="0"/>
+              <a:t> </a:t>
+            </a:r>
+            <a:r>
+              <a:rPr lang="en-US" dirty="0" err="1"/>
+              <a:t>kvara</a:t>
+            </a:r>
+            <a:r>
+              <a:rPr lang="en-US" dirty="0"/>
+              <a:t> (SPOF), </a:t>
+            </a:r>
+            <a:r>
+              <a:rPr lang="en-US" dirty="0" err="1"/>
+              <a:t>što</a:t>
+            </a:r>
+            <a:r>
+              <a:rPr lang="en-US" dirty="0"/>
+              <a:t> je </a:t>
+            </a:r>
+            <a:r>
+              <a:rPr lang="en-US" dirty="0" err="1"/>
+              <a:t>čini</a:t>
+            </a:r>
+            <a:r>
+              <a:rPr lang="en-US" dirty="0"/>
+              <a:t> </a:t>
+            </a:r>
+            <a:r>
+              <a:rPr lang="en-US" dirty="0" err="1"/>
+              <a:t>idealnom</a:t>
+            </a:r>
+            <a:r>
+              <a:rPr lang="en-US" dirty="0"/>
+              <a:t> za ERP </a:t>
+            </a:r>
+            <a:r>
+              <a:rPr lang="en-US" dirty="0" err="1"/>
+              <a:t>sisteme</a:t>
+            </a:r>
+            <a:r>
+              <a:rPr lang="en-US" dirty="0"/>
+              <a:t> </a:t>
+            </a:r>
+            <a:r>
+              <a:rPr lang="en-US" dirty="0" err="1"/>
+              <a:t>sa</a:t>
+            </a:r>
+            <a:r>
+              <a:rPr lang="en-US" dirty="0"/>
+              <a:t> </a:t>
+            </a:r>
+            <a:r>
+              <a:rPr lang="en-US" dirty="0" err="1"/>
+              <a:t>centralnom</a:t>
+            </a:r>
+            <a:r>
+              <a:rPr lang="en-US" dirty="0"/>
+              <a:t> </a:t>
+            </a:r>
+            <a:r>
+              <a:rPr lang="en-US" dirty="0" err="1"/>
+              <a:t>bazom</a:t>
+            </a:r>
+            <a:r>
+              <a:rPr lang="en-US" dirty="0"/>
+              <a:t> </a:t>
+            </a:r>
+            <a:r>
+              <a:rPr lang="en-US" dirty="0" err="1"/>
+              <a:t>i</a:t>
+            </a:r>
+            <a:r>
+              <a:rPr lang="en-US" dirty="0"/>
+              <a:t> </a:t>
+            </a:r>
+            <a:r>
+              <a:rPr lang="en-US" dirty="0" err="1"/>
+              <a:t>filijalama</a:t>
+            </a:r>
+            <a:r>
+              <a:rPr lang="en-US" dirty="0"/>
+              <a:t>.</a:t>
+            </a:r>
+          </a:p>
+          <a:p>
+            <a:r>
+              <a:rPr lang="en-US" b="1" dirty="0"/>
+              <a:t>Mesh (</a:t>
+            </a:r>
+            <a:r>
+              <a:rPr lang="en-US" b="1" dirty="0" err="1"/>
+              <a:t>Mreža</a:t>
+            </a:r>
+            <a:r>
+              <a:rPr lang="en-US" b="1" dirty="0"/>
+              <a:t>)</a:t>
+            </a:r>
+            <a:r>
+              <a:rPr lang="en-US" dirty="0"/>
+              <a:t> </a:t>
+            </a:r>
+            <a:r>
+              <a:rPr lang="en-US" dirty="0" err="1"/>
+              <a:t>topologija</a:t>
+            </a:r>
+            <a:r>
+              <a:rPr lang="en-US" dirty="0"/>
+              <a:t> </a:t>
+            </a:r>
+            <a:r>
+              <a:rPr lang="en-US" dirty="0" err="1"/>
+              <a:t>direktno</a:t>
+            </a:r>
+            <a:r>
+              <a:rPr lang="en-US" dirty="0"/>
+              <a:t> </a:t>
+            </a:r>
+            <a:r>
+              <a:rPr lang="en-US" dirty="0" err="1"/>
+              <a:t>povezuje</a:t>
+            </a:r>
+            <a:r>
+              <a:rPr lang="en-US" dirty="0"/>
+              <a:t> </a:t>
+            </a:r>
+            <a:r>
+              <a:rPr lang="en-US" dirty="0" err="1"/>
+              <a:t>svaki</a:t>
+            </a:r>
+            <a:r>
+              <a:rPr lang="en-US" dirty="0"/>
+              <a:t> </a:t>
+            </a:r>
+            <a:r>
+              <a:rPr lang="en-US" dirty="0" err="1"/>
+              <a:t>čvor</a:t>
+            </a:r>
+            <a:r>
+              <a:rPr lang="en-US" dirty="0"/>
+              <a:t> </a:t>
+            </a:r>
+            <a:r>
+              <a:rPr lang="en-US" dirty="0" err="1"/>
+              <a:t>sa</a:t>
+            </a:r>
+            <a:r>
+              <a:rPr lang="en-US" dirty="0"/>
+              <a:t> </a:t>
+            </a:r>
+            <a:r>
+              <a:rPr lang="en-US" dirty="0" err="1"/>
+              <a:t>svim</a:t>
+            </a:r>
+            <a:r>
+              <a:rPr lang="en-US" dirty="0"/>
+              <a:t> </a:t>
+            </a:r>
+            <a:r>
+              <a:rPr lang="en-US" dirty="0" err="1"/>
+              <a:t>ostalima</a:t>
+            </a:r>
+            <a:r>
+              <a:rPr lang="en-US" dirty="0"/>
+              <a:t> — </a:t>
+            </a:r>
+            <a:r>
+              <a:rPr lang="en-US" dirty="0" err="1"/>
+              <a:t>nema</a:t>
+            </a:r>
+            <a:r>
+              <a:rPr lang="en-US" dirty="0"/>
+              <a:t> SPOF-a, </a:t>
+            </a:r>
+            <a:r>
+              <a:rPr lang="en-US" dirty="0" err="1"/>
+              <a:t>pruža</a:t>
+            </a:r>
+            <a:r>
+              <a:rPr lang="en-US" dirty="0"/>
+              <a:t> </a:t>
+            </a:r>
+            <a:r>
+              <a:rPr lang="en-US" dirty="0" err="1"/>
+              <a:t>maksimalnu</a:t>
+            </a:r>
+            <a:r>
+              <a:rPr lang="en-US" dirty="0"/>
+              <a:t> </a:t>
+            </a:r>
+            <a:r>
+              <a:rPr lang="en-US" dirty="0" err="1"/>
+              <a:t>redundansu</a:t>
+            </a:r>
+            <a:r>
+              <a:rPr lang="en-US" dirty="0"/>
+              <a:t> </a:t>
+            </a:r>
+            <a:r>
+              <a:rPr lang="en-US" dirty="0" err="1"/>
+              <a:t>i</a:t>
+            </a:r>
+            <a:r>
+              <a:rPr lang="en-US" dirty="0"/>
+              <a:t> </a:t>
+            </a:r>
+            <a:r>
+              <a:rPr lang="en-US" dirty="0" err="1"/>
+              <a:t>propusnost</a:t>
+            </a:r>
+            <a:r>
+              <a:rPr lang="en-US" dirty="0"/>
+              <a:t>, </a:t>
+            </a:r>
+            <a:r>
+              <a:rPr lang="en-US" dirty="0" err="1"/>
+              <a:t>ali</a:t>
+            </a:r>
+            <a:r>
+              <a:rPr lang="en-US" dirty="0"/>
+              <a:t> </a:t>
+            </a:r>
+            <a:r>
+              <a:rPr lang="en-US" dirty="0" err="1"/>
+              <a:t>eksponencijalni</a:t>
+            </a:r>
+            <a:r>
+              <a:rPr lang="en-US" dirty="0"/>
+              <a:t> </a:t>
+            </a:r>
+            <a:r>
+              <a:rPr lang="en-US" dirty="0" err="1"/>
+              <a:t>rast</a:t>
+            </a:r>
+            <a:r>
+              <a:rPr lang="en-US" dirty="0"/>
+              <a:t> </a:t>
+            </a:r>
+            <a:r>
+              <a:rPr lang="en-US" dirty="0" err="1"/>
+              <a:t>veza</a:t>
+            </a:r>
+            <a:r>
+              <a:rPr lang="en-US" dirty="0"/>
+              <a:t> </a:t>
+            </a:r>
+            <a:r>
+              <a:rPr lang="en-US" dirty="0" err="1"/>
+              <a:t>čini</a:t>
+            </a:r>
+            <a:r>
+              <a:rPr lang="en-US" dirty="0"/>
+              <a:t> </a:t>
+            </a:r>
+            <a:r>
+              <a:rPr lang="en-US" dirty="0" err="1"/>
+              <a:t>konfiguraciju</a:t>
+            </a:r>
+            <a:r>
+              <a:rPr lang="en-US" dirty="0"/>
+              <a:t> </a:t>
+            </a:r>
+            <a:r>
+              <a:rPr lang="en-US" dirty="0" err="1"/>
+              <a:t>kompleksnom</a:t>
+            </a:r>
+            <a:r>
+              <a:rPr lang="en-US" dirty="0"/>
+              <a:t>, </a:t>
+            </a:r>
+            <a:r>
+              <a:rPr lang="en-US" dirty="0" err="1"/>
+              <a:t>što</a:t>
+            </a:r>
+            <a:r>
+              <a:rPr lang="en-US" dirty="0"/>
+              <a:t> je </a:t>
+            </a:r>
+            <a:r>
+              <a:rPr lang="en-US" dirty="0" err="1"/>
+              <a:t>idealno</a:t>
+            </a:r>
+            <a:r>
+              <a:rPr lang="en-US" dirty="0"/>
+              <a:t> za mission-critical </a:t>
+            </a:r>
+            <a:r>
+              <a:rPr lang="en-US" dirty="0" err="1"/>
+              <a:t>sisteme</a:t>
+            </a:r>
+            <a:r>
+              <a:rPr lang="en-US" dirty="0"/>
+              <a:t> </a:t>
+            </a:r>
+            <a:r>
+              <a:rPr lang="en-US" dirty="0" err="1"/>
+              <a:t>i</a:t>
+            </a:r>
+            <a:r>
+              <a:rPr lang="en-US" dirty="0"/>
+              <a:t> </a:t>
+            </a:r>
+            <a:r>
+              <a:rPr lang="en-US" dirty="0" err="1"/>
+              <a:t>finansijske</a:t>
+            </a:r>
+            <a:r>
+              <a:rPr lang="en-US" dirty="0"/>
+              <a:t> </a:t>
+            </a:r>
+            <a:r>
+              <a:rPr lang="en-US" dirty="0" err="1"/>
+              <a:t>berze</a:t>
+            </a:r>
+            <a:r>
+              <a:rPr lang="en-US" dirty="0"/>
+              <a:t>.</a:t>
+            </a:r>
+          </a:p>
+          <a:p>
+            <a:r>
+              <a:rPr lang="en-US" b="1" dirty="0"/>
+              <a:t>Ring (</a:t>
+            </a:r>
+            <a:r>
+              <a:rPr lang="en-US" b="1" dirty="0" err="1"/>
+              <a:t>Prsten</a:t>
+            </a:r>
+            <a:r>
+              <a:rPr lang="en-US" b="1" dirty="0"/>
+              <a:t>)</a:t>
+            </a:r>
+            <a:r>
+              <a:rPr lang="en-US" dirty="0"/>
+              <a:t> </a:t>
+            </a:r>
+            <a:r>
+              <a:rPr lang="en-US" dirty="0" err="1"/>
+              <a:t>topologija</a:t>
+            </a:r>
+            <a:r>
+              <a:rPr lang="en-US" dirty="0"/>
+              <a:t> </a:t>
+            </a:r>
+            <a:r>
+              <a:rPr lang="en-US" dirty="0" err="1"/>
+              <a:t>šalje</a:t>
+            </a:r>
+            <a:r>
+              <a:rPr lang="en-US" dirty="0"/>
+              <a:t> </a:t>
+            </a:r>
+            <a:r>
+              <a:rPr lang="en-US" dirty="0" err="1"/>
+              <a:t>podatke</a:t>
+            </a:r>
+            <a:r>
+              <a:rPr lang="en-US" dirty="0"/>
+              <a:t> </a:t>
+            </a:r>
+            <a:r>
+              <a:rPr lang="en-US" dirty="0" err="1"/>
+              <a:t>sekvencijalno</a:t>
+            </a:r>
+            <a:r>
+              <a:rPr lang="en-US" dirty="0"/>
+              <a:t> od </a:t>
+            </a:r>
+            <a:r>
+              <a:rPr lang="en-US" dirty="0" err="1"/>
+              <a:t>čvora</a:t>
+            </a:r>
+            <a:r>
+              <a:rPr lang="en-US" dirty="0"/>
+              <a:t> do </a:t>
+            </a:r>
+            <a:r>
+              <a:rPr lang="en-US" dirty="0" err="1"/>
+              <a:t>čvora</a:t>
+            </a:r>
+            <a:r>
+              <a:rPr lang="en-US" dirty="0"/>
+              <a:t> </a:t>
+            </a:r>
+            <a:r>
+              <a:rPr lang="en-US" dirty="0" err="1"/>
+              <a:t>dok</a:t>
+            </a:r>
+            <a:r>
+              <a:rPr lang="en-US" dirty="0"/>
+              <a:t> se </a:t>
+            </a:r>
+            <a:r>
+              <a:rPr lang="en-US" dirty="0" err="1"/>
+              <a:t>krug</a:t>
+            </a:r>
+            <a:r>
+              <a:rPr lang="en-US" dirty="0"/>
+              <a:t> ne </a:t>
+            </a:r>
+            <a:r>
+              <a:rPr lang="en-US" dirty="0" err="1"/>
+              <a:t>zatvori</a:t>
+            </a:r>
+            <a:r>
+              <a:rPr lang="en-US" dirty="0"/>
+              <a:t> — </a:t>
+            </a:r>
+            <a:r>
+              <a:rPr lang="en-US" dirty="0" err="1"/>
+              <a:t>ravnomerna</a:t>
+            </a:r>
+            <a:r>
+              <a:rPr lang="en-US" dirty="0"/>
+              <a:t> </a:t>
+            </a:r>
+            <a:r>
+              <a:rPr lang="en-US" dirty="0" err="1"/>
+              <a:t>raspodela</a:t>
+            </a:r>
+            <a:r>
+              <a:rPr lang="en-US" dirty="0"/>
+              <a:t> </a:t>
+            </a:r>
+            <a:r>
+              <a:rPr lang="en-US" dirty="0" err="1"/>
+              <a:t>opterećenja</a:t>
+            </a:r>
+            <a:r>
+              <a:rPr lang="en-US" dirty="0"/>
+              <a:t> je </a:t>
+            </a:r>
+            <a:r>
+              <a:rPr lang="en-US" dirty="0" err="1"/>
+              <a:t>njena</a:t>
+            </a:r>
+            <a:r>
+              <a:rPr lang="en-US" dirty="0"/>
+              <a:t> </a:t>
+            </a:r>
+            <a:r>
+              <a:rPr lang="en-US" dirty="0" err="1"/>
+              <a:t>prednost</a:t>
+            </a:r>
+            <a:r>
+              <a:rPr lang="en-US" dirty="0"/>
+              <a:t>, </a:t>
+            </a:r>
+            <a:r>
+              <a:rPr lang="en-US" dirty="0" err="1"/>
+              <a:t>ali</a:t>
+            </a:r>
+            <a:r>
+              <a:rPr lang="en-US" dirty="0"/>
+              <a:t> </a:t>
+            </a:r>
+            <a:r>
+              <a:rPr lang="en-US" dirty="0" err="1"/>
+              <a:t>jedan</a:t>
+            </a:r>
+            <a:r>
+              <a:rPr lang="en-US" dirty="0"/>
+              <a:t> </a:t>
+            </a:r>
+            <a:r>
+              <a:rPr lang="en-US" dirty="0" err="1"/>
+              <a:t>kvar</a:t>
+            </a:r>
+            <a:r>
+              <a:rPr lang="en-US" dirty="0"/>
+              <a:t> </a:t>
+            </a:r>
+            <a:r>
+              <a:rPr lang="en-US" dirty="0" err="1"/>
+              <a:t>prekida</a:t>
+            </a:r>
+            <a:r>
+              <a:rPr lang="en-US" dirty="0"/>
+              <a:t> </a:t>
+            </a:r>
+            <a:r>
+              <a:rPr lang="en-US" dirty="0" err="1"/>
+              <a:t>ceo</a:t>
+            </a:r>
+            <a:r>
+              <a:rPr lang="en-US" dirty="0"/>
+              <a:t> </a:t>
+            </a:r>
+            <a:r>
+              <a:rPr lang="en-US" dirty="0" err="1"/>
+              <a:t>prsten</a:t>
+            </a:r>
+            <a:r>
+              <a:rPr lang="en-US" dirty="0"/>
+              <a:t>, pa je </a:t>
+            </a:r>
+            <a:r>
+              <a:rPr lang="en-US" dirty="0" err="1"/>
+              <a:t>idealna</a:t>
+            </a:r>
+            <a:r>
+              <a:rPr lang="en-US" dirty="0"/>
+              <a:t> za </a:t>
+            </a:r>
+            <a:r>
+              <a:rPr lang="en-US" dirty="0" err="1"/>
+              <a:t>sisteme</a:t>
+            </a:r>
+            <a:r>
+              <a:rPr lang="en-US" dirty="0"/>
+              <a:t> </a:t>
+            </a:r>
+            <a:r>
+              <a:rPr lang="en-US" dirty="0" err="1"/>
+              <a:t>sa</a:t>
+            </a:r>
+            <a:r>
+              <a:rPr lang="en-US" dirty="0"/>
+              <a:t> </a:t>
+            </a:r>
+            <a:r>
+              <a:rPr lang="en-US" dirty="0" err="1"/>
+              <a:t>jasnom</a:t>
+            </a:r>
+            <a:r>
+              <a:rPr lang="en-US" dirty="0"/>
+              <a:t> </a:t>
+            </a:r>
+            <a:r>
+              <a:rPr lang="en-US" dirty="0" err="1"/>
+              <a:t>geografskom</a:t>
+            </a:r>
+            <a:r>
+              <a:rPr lang="en-US" dirty="0"/>
+              <a:t> </a:t>
+            </a:r>
+            <a:r>
+              <a:rPr lang="en-US" dirty="0" err="1"/>
+              <a:t>distribucijom</a:t>
+            </a:r>
+            <a:r>
+              <a:rPr lang="en-US" dirty="0"/>
+              <a:t>.</a:t>
+            </a:r>
+          </a:p>
+          <a:p>
+            <a:r>
+              <a:rPr lang="en-US" dirty="0" err="1"/>
+              <a:t>Najveći</a:t>
+            </a:r>
+            <a:r>
+              <a:rPr lang="en-US" dirty="0"/>
+              <a:t> </a:t>
+            </a:r>
+            <a:r>
+              <a:rPr lang="en-US" dirty="0" err="1"/>
+              <a:t>izazov</a:t>
+            </a:r>
+            <a:r>
+              <a:rPr lang="en-US" dirty="0"/>
+              <a:t> Multi-Master </a:t>
+            </a:r>
+            <a:r>
+              <a:rPr lang="en-US" dirty="0" err="1"/>
+              <a:t>topologija</a:t>
+            </a:r>
+            <a:r>
+              <a:rPr lang="en-US" dirty="0"/>
+              <a:t> je </a:t>
+            </a:r>
+            <a:r>
+              <a:rPr lang="en-US" b="1" dirty="0" err="1"/>
+              <a:t>eho</a:t>
+            </a:r>
+            <a:r>
+              <a:rPr lang="en-US" b="1" dirty="0"/>
+              <a:t> </a:t>
+            </a:r>
+            <a:r>
+              <a:rPr lang="en-US" b="1" dirty="0" err="1"/>
+              <a:t>efekat</a:t>
+            </a:r>
+            <a:r>
+              <a:rPr lang="en-US" dirty="0"/>
+              <a:t> — </a:t>
+            </a:r>
+            <a:r>
+              <a:rPr lang="en-US" dirty="0" err="1"/>
+              <a:t>kada</a:t>
+            </a:r>
+            <a:r>
+              <a:rPr lang="en-US" dirty="0"/>
+              <a:t> </a:t>
+            </a:r>
+            <a:r>
+              <a:rPr lang="en-US" dirty="0" err="1"/>
+              <a:t>čvor</a:t>
+            </a:r>
+            <a:r>
+              <a:rPr lang="en-US" dirty="0"/>
+              <a:t> A </a:t>
+            </a:r>
+            <a:r>
+              <a:rPr lang="en-US" dirty="0" err="1"/>
+              <a:t>replicira</a:t>
+            </a:r>
+            <a:r>
+              <a:rPr lang="en-US" dirty="0"/>
+              <a:t> </a:t>
+            </a:r>
+            <a:r>
+              <a:rPr lang="en-US" dirty="0" err="1"/>
+              <a:t>promenu</a:t>
+            </a:r>
+            <a:r>
+              <a:rPr lang="en-US" dirty="0"/>
+              <a:t> </a:t>
+            </a:r>
+            <a:r>
+              <a:rPr lang="en-US" dirty="0" err="1"/>
+              <a:t>na</a:t>
+            </a:r>
+            <a:r>
+              <a:rPr lang="en-US" dirty="0"/>
+              <a:t> B, a B je </a:t>
+            </a:r>
+            <a:r>
+              <a:rPr lang="en-US" dirty="0" err="1"/>
+              <a:t>replicira</a:t>
+            </a:r>
+            <a:r>
+              <a:rPr lang="en-US" dirty="0"/>
+              <a:t> </a:t>
+            </a:r>
+            <a:r>
+              <a:rPr lang="en-US" dirty="0" err="1"/>
+              <a:t>nazad</a:t>
+            </a:r>
+            <a:r>
+              <a:rPr lang="en-US" dirty="0"/>
+              <a:t> </a:t>
+            </a:r>
+            <a:r>
+              <a:rPr lang="en-US" dirty="0" err="1"/>
+              <a:t>na</a:t>
+            </a:r>
+            <a:r>
+              <a:rPr lang="en-US" dirty="0"/>
+              <a:t> A </a:t>
+            </a:r>
+            <a:r>
+              <a:rPr lang="en-US" dirty="0" err="1"/>
+              <a:t>nastaje</a:t>
+            </a:r>
+            <a:r>
+              <a:rPr lang="en-US" dirty="0"/>
+              <a:t> </a:t>
+            </a:r>
+            <a:r>
+              <a:rPr lang="en-US" dirty="0" err="1"/>
+              <a:t>beskonačna</a:t>
+            </a:r>
+            <a:r>
+              <a:rPr lang="en-US" dirty="0"/>
+              <a:t> </a:t>
+            </a:r>
+            <a:r>
+              <a:rPr lang="en-US" dirty="0" err="1"/>
+              <a:t>petlja</a:t>
+            </a:r>
+            <a:r>
+              <a:rPr lang="en-US" dirty="0"/>
+              <a:t>, a Firebird 4.0 to </a:t>
+            </a:r>
+            <a:r>
+              <a:rPr lang="en-US" dirty="0" err="1"/>
+              <a:t>rešava</a:t>
+            </a:r>
+            <a:r>
+              <a:rPr lang="en-US" dirty="0"/>
+              <a:t> </a:t>
+            </a:r>
+            <a:r>
+              <a:rPr lang="en-US" dirty="0" err="1"/>
+              <a:t>automatskim</a:t>
+            </a:r>
+            <a:r>
+              <a:rPr lang="en-US" dirty="0"/>
+              <a:t> </a:t>
+            </a:r>
+            <a:r>
+              <a:rPr lang="en-US" dirty="0" err="1"/>
+              <a:t>postavljanjem</a:t>
+            </a:r>
+            <a:r>
+              <a:rPr lang="en-US" dirty="0"/>
+              <a:t> REPLICATING </a:t>
+            </a:r>
+            <a:r>
+              <a:rPr lang="en-US" dirty="0" err="1"/>
+              <a:t>konteksta</a:t>
+            </a:r>
+            <a:r>
+              <a:rPr lang="en-US" dirty="0"/>
+              <a:t> </a:t>
+            </a:r>
+            <a:r>
+              <a:rPr lang="en-US" dirty="0" err="1"/>
+              <a:t>na</a:t>
+            </a:r>
+            <a:r>
+              <a:rPr lang="en-US" dirty="0"/>
+              <a:t> TRUE </a:t>
+            </a:r>
+            <a:r>
+              <a:rPr lang="en-US" dirty="0" err="1"/>
+              <a:t>pri</a:t>
+            </a:r>
+            <a:r>
+              <a:rPr lang="en-US" dirty="0"/>
+              <a:t> </a:t>
+            </a:r>
+            <a:r>
+              <a:rPr lang="en-US" dirty="0" err="1"/>
+              <a:t>primeni</a:t>
+            </a:r>
+            <a:r>
+              <a:rPr lang="en-US" dirty="0"/>
+              <a:t> </a:t>
+            </a:r>
+            <a:r>
+              <a:rPr lang="en-US" dirty="0" err="1"/>
+              <a:t>logova</a:t>
+            </a:r>
+            <a:r>
+              <a:rPr lang="en-US" dirty="0"/>
+              <a:t>, </a:t>
+            </a:r>
+            <a:r>
+              <a:rPr lang="en-US" dirty="0" err="1"/>
+              <a:t>čime</a:t>
+            </a:r>
+            <a:r>
+              <a:rPr lang="en-US" dirty="0"/>
+              <a:t> </a:t>
+            </a:r>
+            <a:r>
+              <a:rPr lang="en-US" dirty="0" err="1"/>
+              <a:t>triger</a:t>
+            </a:r>
+            <a:r>
+              <a:rPr lang="en-US" dirty="0"/>
+              <a:t> </a:t>
+            </a:r>
+            <a:r>
+              <a:rPr lang="en-US" dirty="0" err="1"/>
+              <a:t>prepoznaje</a:t>
+            </a:r>
+            <a:r>
+              <a:rPr lang="en-US" dirty="0"/>
+              <a:t> da se </a:t>
+            </a:r>
+            <a:r>
+              <a:rPr lang="en-US" dirty="0" err="1"/>
+              <a:t>radi</a:t>
+            </a:r>
+            <a:r>
+              <a:rPr lang="en-US" dirty="0"/>
+              <a:t> o </a:t>
+            </a:r>
+            <a:r>
+              <a:rPr lang="en-US" dirty="0" err="1"/>
+              <a:t>replikacionoj</a:t>
+            </a:r>
+            <a:r>
+              <a:rPr lang="en-US" dirty="0"/>
+              <a:t> </a:t>
+            </a:r>
+            <a:r>
+              <a:rPr lang="en-US" dirty="0" err="1"/>
+              <a:t>promeni</a:t>
+            </a:r>
+            <a:r>
+              <a:rPr lang="en-US" dirty="0"/>
+              <a:t> </a:t>
+            </a:r>
+            <a:r>
+              <a:rPr lang="en-US" dirty="0" err="1"/>
+              <a:t>i</a:t>
+            </a:r>
+            <a:r>
+              <a:rPr lang="en-US" dirty="0"/>
+              <a:t> </a:t>
+            </a:r>
+            <a:r>
+              <a:rPr lang="en-US" dirty="0" err="1"/>
+              <a:t>preskače</a:t>
+            </a:r>
+            <a:r>
+              <a:rPr lang="en-US" dirty="0"/>
+              <a:t> je</a:t>
+            </a:r>
+          </a:p>
+          <a:p>
             <a:endParaRPr lang="en-US" dirty="0"/>
           </a:p>
         </p:txBody>
@@ -5582,6 +9459,982 @@
         <p:txBody>
           <a:bodyPr/>
           <a:lstStyle/>
+          <a:p>
+            <a:r>
+              <a:rPr lang="en-US" dirty="0" err="1"/>
+              <a:t>Konfiguracija</a:t>
+            </a:r>
+            <a:r>
+              <a:rPr lang="en-US" dirty="0"/>
+              <a:t> </a:t>
+            </a:r>
+            <a:r>
+              <a:rPr lang="en-US" dirty="0" err="1"/>
+              <a:t>nativne</a:t>
+            </a:r>
+            <a:r>
+              <a:rPr lang="en-US" dirty="0"/>
+              <a:t> </a:t>
+            </a:r>
+            <a:r>
+              <a:rPr lang="en-US" dirty="0" err="1"/>
+              <a:t>replikacije</a:t>
+            </a:r>
+            <a:r>
+              <a:rPr lang="en-US" dirty="0"/>
+              <a:t> u Firebird 4.0 </a:t>
+            </a:r>
+            <a:r>
+              <a:rPr lang="en-US" dirty="0" err="1"/>
+              <a:t>odvija</a:t>
+            </a:r>
+            <a:r>
+              <a:rPr lang="en-US" dirty="0"/>
+              <a:t> se </a:t>
+            </a:r>
+            <a:r>
+              <a:rPr lang="en-US" dirty="0" err="1"/>
+              <a:t>kroz</a:t>
+            </a:r>
+            <a:r>
+              <a:rPr lang="en-US" dirty="0"/>
+              <a:t> 8 </a:t>
+            </a:r>
+            <a:r>
+              <a:rPr lang="en-US" dirty="0" err="1"/>
+              <a:t>precizno</a:t>
+            </a:r>
+            <a:r>
+              <a:rPr lang="en-US" dirty="0"/>
+              <a:t> </a:t>
+            </a:r>
+            <a:r>
+              <a:rPr lang="en-US" dirty="0" err="1"/>
+              <a:t>definisanih</a:t>
+            </a:r>
+            <a:r>
+              <a:rPr lang="en-US" dirty="0"/>
+              <a:t> </a:t>
+            </a:r>
+            <a:r>
+              <a:rPr lang="en-US" dirty="0" err="1"/>
+              <a:t>koraka</a:t>
+            </a:r>
+            <a:r>
+              <a:rPr lang="en-US" dirty="0"/>
+              <a:t> koji </a:t>
+            </a:r>
+            <a:r>
+              <a:rPr lang="en-US" dirty="0" err="1"/>
+              <a:t>moraju</a:t>
+            </a:r>
+            <a:r>
+              <a:rPr lang="en-US" dirty="0"/>
+              <a:t> </a:t>
+            </a:r>
+            <a:r>
+              <a:rPr lang="en-US" dirty="0" err="1"/>
+              <a:t>biti</a:t>
+            </a:r>
+            <a:r>
+              <a:rPr lang="en-US" dirty="0"/>
+              <a:t> </a:t>
+            </a:r>
+            <a:r>
+              <a:rPr lang="en-US" dirty="0" err="1"/>
+              <a:t>izvršeni</a:t>
+            </a:r>
+            <a:r>
+              <a:rPr lang="en-US" dirty="0"/>
+              <a:t> </a:t>
+            </a:r>
+            <a:r>
+              <a:rPr lang="en-US" dirty="0" err="1"/>
+              <a:t>ispravnim</a:t>
+            </a:r>
+            <a:r>
+              <a:rPr lang="en-US" dirty="0"/>
+              <a:t> </a:t>
+            </a:r>
+            <a:r>
+              <a:rPr lang="en-US" dirty="0" err="1"/>
+              <a:t>redosledom</a:t>
+            </a:r>
+            <a:r>
+              <a:rPr lang="en-US" dirty="0"/>
+              <a:t>.</a:t>
+            </a:r>
+          </a:p>
+          <a:p>
+            <a:r>
+              <a:rPr lang="en-US" b="1" dirty="0" err="1"/>
+              <a:t>Koraci</a:t>
+            </a:r>
+            <a:r>
+              <a:rPr lang="en-US" b="1" dirty="0"/>
+              <a:t> 1-2</a:t>
+            </a:r>
+            <a:r>
+              <a:rPr lang="en-US" dirty="0"/>
+              <a:t> </a:t>
+            </a:r>
+            <a:r>
+              <a:rPr lang="en-US" dirty="0" err="1"/>
+              <a:t>postavljaju</a:t>
+            </a:r>
+            <a:r>
+              <a:rPr lang="en-US" dirty="0"/>
+              <a:t> </a:t>
+            </a:r>
+            <a:r>
+              <a:rPr lang="en-US" dirty="0" err="1"/>
+              <a:t>osnovu</a:t>
+            </a:r>
+            <a:r>
+              <a:rPr lang="en-US" dirty="0"/>
+              <a:t> — </a:t>
+            </a:r>
+            <a:r>
+              <a:rPr lang="en-US" dirty="0" err="1"/>
+              <a:t>kreiranje</a:t>
+            </a:r>
+            <a:r>
+              <a:rPr lang="en-US" dirty="0"/>
+              <a:t> </a:t>
+            </a:r>
+            <a:r>
+              <a:rPr lang="en-US" dirty="0" err="1"/>
+              <a:t>aliasa</a:t>
+            </a:r>
+            <a:r>
+              <a:rPr lang="en-US" dirty="0"/>
+              <a:t> za master </a:t>
+            </a:r>
+            <a:r>
+              <a:rPr lang="en-US" dirty="0" err="1"/>
+              <a:t>i</a:t>
+            </a:r>
+            <a:r>
+              <a:rPr lang="en-US" dirty="0"/>
+              <a:t> slave </a:t>
+            </a:r>
+            <a:r>
+              <a:rPr lang="en-US" dirty="0" err="1"/>
+              <a:t>bazu</a:t>
+            </a:r>
+            <a:r>
+              <a:rPr lang="en-US" dirty="0"/>
+              <a:t> u </a:t>
+            </a:r>
+            <a:r>
+              <a:rPr lang="en-US" dirty="0" err="1"/>
+              <a:t>databases.conf</a:t>
+            </a:r>
+            <a:r>
+              <a:rPr lang="en-US" dirty="0"/>
+              <a:t>, </a:t>
+            </a:r>
+            <a:r>
+              <a:rPr lang="en-US" dirty="0" err="1"/>
+              <a:t>nakon</a:t>
+            </a:r>
+            <a:r>
+              <a:rPr lang="en-US" dirty="0"/>
+              <a:t> </a:t>
+            </a:r>
+            <a:r>
+              <a:rPr lang="en-US" dirty="0" err="1"/>
+              <a:t>čega</a:t>
+            </a:r>
+            <a:r>
+              <a:rPr lang="en-US" dirty="0"/>
+              <a:t> se slave </a:t>
+            </a:r>
+            <a:r>
+              <a:rPr lang="en-US" dirty="0" err="1"/>
+              <a:t>baza</a:t>
+            </a:r>
+            <a:r>
+              <a:rPr lang="en-US" dirty="0"/>
+              <a:t> </a:t>
+            </a:r>
+            <a:r>
+              <a:rPr lang="en-US" dirty="0" err="1"/>
+              <a:t>kreira</a:t>
+            </a:r>
+            <a:r>
+              <a:rPr lang="en-US" dirty="0"/>
+              <a:t> </a:t>
+            </a:r>
+            <a:r>
+              <a:rPr lang="en-US" dirty="0" err="1"/>
+              <a:t>kao</a:t>
+            </a:r>
+            <a:r>
+              <a:rPr lang="en-US" dirty="0"/>
+              <a:t> </a:t>
+            </a:r>
+            <a:r>
+              <a:rPr lang="en-US" dirty="0" err="1"/>
+              <a:t>tačna</a:t>
+            </a:r>
+            <a:r>
+              <a:rPr lang="en-US" dirty="0"/>
+              <a:t> </a:t>
+            </a:r>
+            <a:r>
+              <a:rPr lang="en-US" dirty="0" err="1"/>
+              <a:t>kopija</a:t>
+            </a:r>
+            <a:r>
+              <a:rPr lang="en-US" dirty="0"/>
+              <a:t> </a:t>
+            </a:r>
+            <a:r>
+              <a:rPr lang="en-US" dirty="0" err="1"/>
+              <a:t>mastera</a:t>
+            </a:r>
+            <a:r>
+              <a:rPr lang="en-US" dirty="0"/>
+              <a:t> </a:t>
+            </a:r>
+            <a:r>
+              <a:rPr lang="en-US" dirty="0" err="1"/>
+              <a:t>kroz</a:t>
+            </a:r>
+            <a:r>
+              <a:rPr lang="en-US" dirty="0"/>
+              <a:t> backup </a:t>
+            </a:r>
+            <a:r>
+              <a:rPr lang="en-US" dirty="0" err="1"/>
+              <a:t>i</a:t>
+            </a:r>
+            <a:r>
+              <a:rPr lang="en-US" dirty="0"/>
+              <a:t> restore </a:t>
+            </a:r>
+            <a:r>
+              <a:rPr lang="en-US" dirty="0" err="1"/>
+              <a:t>proceduru</a:t>
+            </a:r>
+            <a:r>
+              <a:rPr lang="en-US" dirty="0"/>
+              <a:t> </a:t>
+            </a:r>
+            <a:r>
+              <a:rPr lang="en-US" dirty="0" err="1"/>
+              <a:t>komandama</a:t>
+            </a:r>
+            <a:r>
+              <a:rPr lang="en-US" dirty="0"/>
+              <a:t> </a:t>
+            </a:r>
+            <a:r>
+              <a:rPr lang="en-US" dirty="0" err="1"/>
+              <a:t>gbak</a:t>
+            </a:r>
+            <a:r>
+              <a:rPr lang="en-US" dirty="0"/>
+              <a:t>.</a:t>
+            </a:r>
+          </a:p>
+          <a:p>
+            <a:r>
+              <a:rPr lang="en-US" b="1" dirty="0" err="1"/>
+              <a:t>Koraci</a:t>
+            </a:r>
+            <a:r>
+              <a:rPr lang="en-US" b="1" dirty="0"/>
+              <a:t> 3-4</a:t>
+            </a:r>
+            <a:r>
+              <a:rPr lang="en-US" dirty="0"/>
+              <a:t> </a:t>
+            </a:r>
+            <a:r>
+              <a:rPr lang="en-US" dirty="0" err="1"/>
+              <a:t>pripremaju</a:t>
+            </a:r>
+            <a:r>
+              <a:rPr lang="en-US" dirty="0"/>
+              <a:t> </a:t>
+            </a:r>
+            <a:r>
+              <a:rPr lang="en-US" dirty="0" err="1"/>
+              <a:t>replikacionu</a:t>
+            </a:r>
+            <a:r>
+              <a:rPr lang="en-US" dirty="0"/>
+              <a:t> </a:t>
+            </a:r>
+            <a:r>
+              <a:rPr lang="en-US" dirty="0" err="1"/>
+              <a:t>infrastrukturu</a:t>
+            </a:r>
+            <a:r>
+              <a:rPr lang="en-US" dirty="0"/>
+              <a:t> — </a:t>
+            </a:r>
+            <a:r>
+              <a:rPr lang="en-US" dirty="0" err="1"/>
+              <a:t>preuzimanje</a:t>
+            </a:r>
+            <a:r>
+              <a:rPr lang="en-US" dirty="0"/>
+              <a:t> DATABASE GUID </a:t>
+            </a:r>
+            <a:r>
+              <a:rPr lang="en-US" dirty="0" err="1"/>
+              <a:t>mastera</a:t>
+            </a:r>
+            <a:r>
+              <a:rPr lang="en-US" dirty="0"/>
+              <a:t> </a:t>
+            </a:r>
+            <a:r>
+              <a:rPr lang="en-US" dirty="0" err="1"/>
+              <a:t>komandom</a:t>
+            </a:r>
+            <a:r>
+              <a:rPr lang="en-US" dirty="0"/>
+              <a:t> </a:t>
+            </a:r>
+            <a:r>
+              <a:rPr lang="en-US" dirty="0" err="1"/>
+              <a:t>gstat</a:t>
+            </a:r>
+            <a:r>
+              <a:rPr lang="en-US" dirty="0"/>
+              <a:t> </a:t>
+            </a:r>
+            <a:r>
+              <a:rPr lang="en-US" dirty="0" err="1"/>
+              <a:t>i</a:t>
+            </a:r>
+            <a:r>
+              <a:rPr lang="en-US" dirty="0"/>
+              <a:t> </a:t>
+            </a:r>
+            <a:r>
+              <a:rPr lang="en-US" dirty="0" err="1"/>
+              <a:t>upisivanje</a:t>
+            </a:r>
+            <a:r>
+              <a:rPr lang="en-US" dirty="0"/>
+              <a:t> u </a:t>
+            </a:r>
+            <a:r>
+              <a:rPr lang="en-US" dirty="0" err="1"/>
+              <a:t>konfiguraciju</a:t>
+            </a:r>
+            <a:r>
+              <a:rPr lang="en-US" dirty="0"/>
+              <a:t> </a:t>
+            </a:r>
+            <a:r>
+              <a:rPr lang="en-US" dirty="0" err="1"/>
+              <a:t>kao</a:t>
+            </a:r>
+            <a:r>
+              <a:rPr lang="en-US" dirty="0"/>
+              <a:t> </a:t>
+            </a:r>
+            <a:r>
+              <a:rPr lang="en-US" dirty="0" err="1"/>
+              <a:t>source_guid</a:t>
+            </a:r>
+            <a:r>
+              <a:rPr lang="en-US" dirty="0"/>
+              <a:t>, </a:t>
+            </a:r>
+            <a:r>
+              <a:rPr lang="en-US" dirty="0" err="1"/>
+              <a:t>te</a:t>
+            </a:r>
+            <a:r>
+              <a:rPr lang="en-US" dirty="0"/>
+              <a:t> </a:t>
+            </a:r>
+            <a:r>
+              <a:rPr lang="en-US" dirty="0" err="1"/>
+              <a:t>kreiranje</a:t>
+            </a:r>
+            <a:r>
+              <a:rPr lang="en-US" dirty="0"/>
+              <a:t> Journal </a:t>
+            </a:r>
+            <a:r>
+              <a:rPr lang="en-US" dirty="0" err="1"/>
+              <a:t>i</a:t>
+            </a:r>
+            <a:r>
+              <a:rPr lang="en-US" dirty="0"/>
+              <a:t> Archive </a:t>
+            </a:r>
+            <a:r>
+              <a:rPr lang="en-US" dirty="0" err="1"/>
+              <a:t>direktorijuma</a:t>
+            </a:r>
+            <a:r>
+              <a:rPr lang="en-US" dirty="0"/>
+              <a:t> za </a:t>
+            </a:r>
+            <a:r>
+              <a:rPr lang="en-US" dirty="0" err="1"/>
+              <a:t>odvajanje</a:t>
+            </a:r>
+            <a:r>
+              <a:rPr lang="en-US" dirty="0"/>
+              <a:t> </a:t>
+            </a:r>
+            <a:r>
+              <a:rPr lang="en-US" dirty="0" err="1"/>
+              <a:t>privremenih</a:t>
+            </a:r>
+            <a:r>
+              <a:rPr lang="en-US" dirty="0"/>
+              <a:t> od </a:t>
+            </a:r>
+            <a:r>
+              <a:rPr lang="en-US" dirty="0" err="1"/>
+              <a:t>trajnih</a:t>
+            </a:r>
+            <a:r>
+              <a:rPr lang="en-US" dirty="0"/>
+              <a:t> </a:t>
+            </a:r>
+            <a:r>
+              <a:rPr lang="en-US" dirty="0" err="1"/>
+              <a:t>segmenata</a:t>
+            </a:r>
+            <a:r>
+              <a:rPr lang="en-US" dirty="0"/>
+              <a:t>.</a:t>
+            </a:r>
+          </a:p>
+          <a:p>
+            <a:r>
+              <a:rPr lang="en-US" b="1" dirty="0"/>
+              <a:t>Korak 5</a:t>
+            </a:r>
+            <a:r>
+              <a:rPr lang="en-US" dirty="0"/>
+              <a:t> je </a:t>
+            </a:r>
+            <a:r>
+              <a:rPr lang="en-US" dirty="0" err="1"/>
+              <a:t>centralni</a:t>
+            </a:r>
+            <a:r>
+              <a:rPr lang="en-US" dirty="0"/>
+              <a:t> </a:t>
+            </a:r>
+            <a:r>
+              <a:rPr lang="en-US" dirty="0" err="1"/>
+              <a:t>korak</a:t>
+            </a:r>
+            <a:r>
+              <a:rPr lang="en-US" dirty="0"/>
+              <a:t> </a:t>
+            </a:r>
+            <a:r>
+              <a:rPr lang="en-US" dirty="0" err="1"/>
+              <a:t>konfiguracije</a:t>
+            </a:r>
+            <a:r>
+              <a:rPr lang="en-US" dirty="0"/>
+              <a:t> — u </a:t>
+            </a:r>
+            <a:r>
+              <a:rPr lang="en-US" dirty="0" err="1"/>
+              <a:t>replication.conf</a:t>
+            </a:r>
+            <a:r>
+              <a:rPr lang="en-US" dirty="0"/>
+              <a:t> se </a:t>
+            </a:r>
+            <a:r>
+              <a:rPr lang="en-US" dirty="0" err="1"/>
+              <a:t>podešavaju</a:t>
+            </a:r>
+            <a:r>
+              <a:rPr lang="en-US" dirty="0"/>
+              <a:t> </a:t>
+            </a:r>
+            <a:r>
+              <a:rPr lang="en-US" dirty="0" err="1"/>
+              <a:t>putanje</a:t>
+            </a:r>
+            <a:r>
+              <a:rPr lang="en-US" dirty="0"/>
+              <a:t> journal </a:t>
+            </a:r>
+            <a:r>
+              <a:rPr lang="en-US" dirty="0" err="1"/>
+              <a:t>i</a:t>
+            </a:r>
+            <a:r>
+              <a:rPr lang="en-US" dirty="0"/>
+              <a:t> archive </a:t>
+            </a:r>
+            <a:r>
+              <a:rPr lang="en-US" dirty="0" err="1"/>
+              <a:t>direktorijuma</a:t>
+            </a:r>
+            <a:r>
+              <a:rPr lang="en-US" dirty="0"/>
+              <a:t>, </a:t>
+            </a:r>
+            <a:r>
+              <a:rPr lang="en-US" dirty="0" err="1"/>
+              <a:t>source_guid</a:t>
+            </a:r>
+            <a:r>
+              <a:rPr lang="en-US" dirty="0"/>
+              <a:t> </a:t>
+            </a:r>
+            <a:r>
+              <a:rPr lang="en-US" dirty="0" err="1"/>
+              <a:t>i</a:t>
+            </a:r>
+            <a:r>
+              <a:rPr lang="en-US" dirty="0"/>
+              <a:t> </a:t>
+            </a:r>
+            <a:r>
+              <a:rPr lang="en-US" dirty="0" err="1"/>
+              <a:t>sync_replica</a:t>
+            </a:r>
+            <a:r>
+              <a:rPr lang="en-US" dirty="0"/>
+              <a:t> </a:t>
+            </a:r>
+            <a:r>
+              <a:rPr lang="en-US" dirty="0" err="1"/>
+              <a:t>parametri</a:t>
+            </a:r>
+            <a:r>
+              <a:rPr lang="en-US" dirty="0"/>
+              <a:t> za </a:t>
+            </a:r>
+            <a:r>
+              <a:rPr lang="en-US" dirty="0" err="1"/>
+              <a:t>obe</a:t>
+            </a:r>
+            <a:r>
+              <a:rPr lang="en-US" dirty="0"/>
+              <a:t> instance, </a:t>
+            </a:r>
+            <a:r>
+              <a:rPr lang="en-US" dirty="0" err="1"/>
+              <a:t>što</a:t>
+            </a:r>
+            <a:r>
+              <a:rPr lang="en-US" dirty="0"/>
+              <a:t> </a:t>
+            </a:r>
+            <a:r>
+              <a:rPr lang="en-US" dirty="0" err="1"/>
+              <a:t>direktno</a:t>
+            </a:r>
+            <a:r>
+              <a:rPr lang="en-US" dirty="0"/>
+              <a:t> </a:t>
+            </a:r>
+            <a:r>
+              <a:rPr lang="en-US" dirty="0" err="1"/>
+              <a:t>određuje</a:t>
+            </a:r>
+            <a:r>
+              <a:rPr lang="en-US" dirty="0"/>
+              <a:t> da li </a:t>
+            </a:r>
+            <a:r>
+              <a:rPr lang="en-US" dirty="0" err="1"/>
+              <a:t>će</a:t>
+            </a:r>
+            <a:r>
+              <a:rPr lang="en-US" dirty="0"/>
+              <a:t> </a:t>
+            </a:r>
+            <a:r>
+              <a:rPr lang="en-US" dirty="0" err="1"/>
+              <a:t>replikacija</a:t>
+            </a:r>
+            <a:r>
+              <a:rPr lang="en-US" dirty="0"/>
+              <a:t> </a:t>
+            </a:r>
+            <a:r>
+              <a:rPr lang="en-US" dirty="0" err="1"/>
+              <a:t>biti</a:t>
+            </a:r>
+            <a:r>
+              <a:rPr lang="en-US" dirty="0"/>
+              <a:t> </a:t>
+            </a:r>
+            <a:r>
+              <a:rPr lang="en-US" dirty="0" err="1"/>
+              <a:t>sinhrona</a:t>
+            </a:r>
+            <a:r>
+              <a:rPr lang="en-US" dirty="0"/>
+              <a:t> </a:t>
+            </a:r>
+            <a:r>
+              <a:rPr lang="en-US" dirty="0" err="1"/>
+              <a:t>ili</a:t>
+            </a:r>
+            <a:r>
+              <a:rPr lang="en-US" dirty="0"/>
+              <a:t> </a:t>
+            </a:r>
+            <a:r>
+              <a:rPr lang="en-US" dirty="0" err="1"/>
+              <a:t>asinhrona</a:t>
+            </a:r>
+            <a:r>
+              <a:rPr lang="en-US" dirty="0"/>
+              <a:t>.</a:t>
+            </a:r>
+          </a:p>
+          <a:p>
+            <a:r>
+              <a:rPr lang="en-US" b="1" dirty="0" err="1"/>
+              <a:t>Koraci</a:t>
+            </a:r>
+            <a:r>
+              <a:rPr lang="en-US" b="1" dirty="0"/>
+              <a:t> 6-7</a:t>
+            </a:r>
+            <a:r>
+              <a:rPr lang="en-US" dirty="0"/>
+              <a:t> </a:t>
+            </a:r>
+            <a:r>
+              <a:rPr lang="en-US" dirty="0" err="1"/>
+              <a:t>aktiviraju</a:t>
+            </a:r>
+            <a:r>
+              <a:rPr lang="en-US" dirty="0"/>
+              <a:t> </a:t>
+            </a:r>
+            <a:r>
+              <a:rPr lang="en-US" dirty="0" err="1"/>
+              <a:t>replikaciju</a:t>
+            </a:r>
+            <a:r>
+              <a:rPr lang="en-US" dirty="0"/>
+              <a:t> — Firebird </a:t>
+            </a:r>
+            <a:r>
+              <a:rPr lang="en-US" dirty="0" err="1"/>
+              <a:t>servis</a:t>
+            </a:r>
+            <a:r>
+              <a:rPr lang="en-US" dirty="0"/>
+              <a:t> se </a:t>
+            </a:r>
+            <a:r>
+              <a:rPr lang="en-US" dirty="0" err="1"/>
+              <a:t>restartuje</a:t>
+            </a:r>
+            <a:r>
+              <a:rPr lang="en-US" dirty="0"/>
+              <a:t> </a:t>
+            </a:r>
+            <a:r>
+              <a:rPr lang="en-US" dirty="0" err="1"/>
+              <a:t>nakon</a:t>
+            </a:r>
+            <a:r>
+              <a:rPr lang="en-US" dirty="0"/>
+              <a:t> </a:t>
+            </a:r>
+            <a:r>
+              <a:rPr lang="en-US" dirty="0" err="1"/>
+              <a:t>izmena</a:t>
+            </a:r>
+            <a:r>
+              <a:rPr lang="en-US" dirty="0"/>
+              <a:t> </a:t>
+            </a:r>
+            <a:r>
+              <a:rPr lang="en-US" dirty="0" err="1"/>
+              <a:t>konfiguracionih</a:t>
+            </a:r>
+            <a:r>
+              <a:rPr lang="en-US" dirty="0"/>
+              <a:t> </a:t>
+            </a:r>
+            <a:r>
+              <a:rPr lang="en-US" dirty="0" err="1"/>
+              <a:t>fajlova</a:t>
+            </a:r>
+            <a:r>
+              <a:rPr lang="en-US" dirty="0"/>
+              <a:t>, </a:t>
+            </a:r>
+            <a:r>
+              <a:rPr lang="en-US" dirty="0" err="1"/>
+              <a:t>nakon</a:t>
+            </a:r>
+            <a:r>
+              <a:rPr lang="en-US" dirty="0"/>
+              <a:t> </a:t>
+            </a:r>
+            <a:r>
+              <a:rPr lang="en-US" dirty="0" err="1"/>
+              <a:t>čega</a:t>
+            </a:r>
+            <a:r>
+              <a:rPr lang="en-US" dirty="0"/>
+              <a:t> se </a:t>
+            </a:r>
+            <a:r>
+              <a:rPr lang="en-US" dirty="0" err="1"/>
+              <a:t>na</a:t>
+            </a:r>
+            <a:r>
+              <a:rPr lang="en-US" dirty="0"/>
+              <a:t> </a:t>
+            </a:r>
+            <a:r>
+              <a:rPr lang="en-US" dirty="0" err="1"/>
+              <a:t>masteru</a:t>
+            </a:r>
+            <a:r>
+              <a:rPr lang="en-US" dirty="0"/>
+              <a:t> </a:t>
+            </a:r>
+            <a:r>
+              <a:rPr lang="en-US" dirty="0" err="1"/>
+              <a:t>izvršava</a:t>
+            </a:r>
+            <a:r>
+              <a:rPr lang="en-US" dirty="0"/>
+              <a:t> ALTER DATABASE ENABLE PUBLICATION za </a:t>
+            </a:r>
+            <a:r>
+              <a:rPr lang="en-US" dirty="0" err="1"/>
+              <a:t>uključivanje</a:t>
+            </a:r>
+            <a:r>
+              <a:rPr lang="en-US" dirty="0"/>
+              <a:t> </a:t>
+            </a:r>
+            <a:r>
+              <a:rPr lang="en-US" dirty="0" err="1"/>
+              <a:t>praćenja</a:t>
+            </a:r>
+            <a:r>
+              <a:rPr lang="en-US" dirty="0"/>
+              <a:t> </a:t>
+            </a:r>
+            <a:r>
+              <a:rPr lang="en-US" dirty="0" err="1"/>
+              <a:t>tabela</a:t>
+            </a:r>
+            <a:r>
+              <a:rPr lang="en-US" dirty="0"/>
+              <a:t>, a </a:t>
+            </a:r>
+            <a:r>
+              <a:rPr lang="en-US" dirty="0" err="1"/>
+              <a:t>na</a:t>
+            </a:r>
+            <a:r>
+              <a:rPr lang="en-US" dirty="0"/>
+              <a:t> slave </a:t>
+            </a:r>
+            <a:r>
+              <a:rPr lang="en-US" dirty="0" err="1"/>
+              <a:t>bazi</a:t>
+            </a:r>
+            <a:r>
+              <a:rPr lang="en-US" dirty="0"/>
+              <a:t> </a:t>
+            </a:r>
+            <a:r>
+              <a:rPr lang="en-US" dirty="0" err="1"/>
+              <a:t>gfix</a:t>
+            </a:r>
+            <a:r>
+              <a:rPr lang="en-US" dirty="0"/>
+              <a:t> -replica READ_ONLY </a:t>
+            </a:r>
+            <a:r>
+              <a:rPr lang="en-US" dirty="0" err="1"/>
+              <a:t>postavlja</a:t>
+            </a:r>
+            <a:r>
+              <a:rPr lang="en-US" dirty="0"/>
+              <a:t> je u read-only mod.</a:t>
+            </a:r>
+          </a:p>
+          <a:p>
+            <a:r>
+              <a:rPr lang="en-US" b="1" dirty="0"/>
+              <a:t>Korak 8</a:t>
+            </a:r>
+            <a:r>
+              <a:rPr lang="en-US" dirty="0"/>
+              <a:t> </a:t>
+            </a:r>
+            <a:r>
+              <a:rPr lang="en-US" dirty="0" err="1"/>
+              <a:t>rešava</a:t>
+            </a:r>
+            <a:r>
+              <a:rPr lang="en-US" dirty="0"/>
+              <a:t> </a:t>
+            </a:r>
+            <a:r>
+              <a:rPr lang="en-US" dirty="0" err="1"/>
+              <a:t>bezbednosni</a:t>
+            </a:r>
+            <a:r>
+              <a:rPr lang="en-US" dirty="0"/>
+              <a:t> </a:t>
+            </a:r>
+            <a:r>
+              <a:rPr lang="en-US" dirty="0" err="1"/>
+              <a:t>aspekt</a:t>
+            </a:r>
+            <a:r>
+              <a:rPr lang="en-US" dirty="0"/>
+              <a:t> — CREATE MAPPING </a:t>
+            </a:r>
+            <a:r>
+              <a:rPr lang="en-US" dirty="0" err="1"/>
+              <a:t>omogućava</a:t>
+            </a:r>
+            <a:r>
+              <a:rPr lang="en-US" dirty="0"/>
+              <a:t> </a:t>
+            </a:r>
+            <a:r>
+              <a:rPr lang="en-US" dirty="0" err="1"/>
+              <a:t>replikacionom</a:t>
+            </a:r>
+            <a:r>
+              <a:rPr lang="en-US" dirty="0"/>
+              <a:t> </a:t>
+            </a:r>
+            <a:r>
+              <a:rPr lang="en-US" dirty="0" err="1"/>
+              <a:t>agentu</a:t>
+            </a:r>
+            <a:r>
+              <a:rPr lang="en-US" dirty="0"/>
+              <a:t> da se </a:t>
+            </a:r>
+            <a:r>
+              <a:rPr lang="en-US" dirty="0" err="1"/>
+              <a:t>autentifikuje</a:t>
+            </a:r>
+            <a:r>
+              <a:rPr lang="en-US" dirty="0"/>
+              <a:t> </a:t>
+            </a:r>
+            <a:r>
+              <a:rPr lang="en-US" dirty="0" err="1"/>
+              <a:t>na</a:t>
+            </a:r>
+            <a:r>
+              <a:rPr lang="en-US" dirty="0"/>
+              <a:t> slave </a:t>
+            </a:r>
+            <a:r>
+              <a:rPr lang="en-US" dirty="0" err="1"/>
+              <a:t>bazi</a:t>
+            </a:r>
+            <a:r>
+              <a:rPr lang="en-US" dirty="0"/>
+              <a:t> </a:t>
+            </a:r>
+            <a:r>
+              <a:rPr lang="en-US" dirty="0" err="1"/>
+              <a:t>kao</a:t>
+            </a:r>
+            <a:r>
+              <a:rPr lang="en-US" dirty="0"/>
+              <a:t> SYSDBA, </a:t>
+            </a:r>
+            <a:r>
+              <a:rPr lang="en-US" dirty="0" err="1"/>
+              <a:t>što</a:t>
+            </a:r>
+            <a:r>
+              <a:rPr lang="en-US" dirty="0"/>
+              <a:t> je </a:t>
+            </a:r>
+            <a:r>
+              <a:rPr lang="en-US" dirty="0" err="1"/>
+              <a:t>preduslov</a:t>
+            </a:r>
+            <a:r>
+              <a:rPr lang="en-US" dirty="0"/>
+              <a:t> da agent </a:t>
+            </a:r>
+            <a:r>
+              <a:rPr lang="en-US" dirty="0" err="1"/>
+              <a:t>može</a:t>
+            </a:r>
+            <a:r>
+              <a:rPr lang="en-US" dirty="0"/>
+              <a:t> da </a:t>
+            </a:r>
+            <a:r>
+              <a:rPr lang="en-US" dirty="0" err="1"/>
+              <a:t>primenjuje</a:t>
+            </a:r>
+            <a:r>
+              <a:rPr lang="en-US" dirty="0"/>
+              <a:t> </a:t>
+            </a:r>
+            <a:r>
+              <a:rPr lang="en-US" dirty="0" err="1"/>
+              <a:t>promene</a:t>
+            </a:r>
+            <a:r>
+              <a:rPr lang="en-US" dirty="0"/>
+              <a:t> </a:t>
+            </a:r>
+            <a:r>
+              <a:rPr lang="en-US" dirty="0" err="1"/>
+              <a:t>na</a:t>
+            </a:r>
+            <a:r>
+              <a:rPr lang="en-US" dirty="0"/>
+              <a:t> slave </a:t>
+            </a:r>
+            <a:r>
+              <a:rPr lang="en-US" dirty="0" err="1"/>
+              <a:t>bazi</a:t>
+            </a:r>
+            <a:r>
+              <a:rPr lang="en-US" dirty="0"/>
+              <a:t> bez </a:t>
+            </a:r>
+            <a:r>
+              <a:rPr lang="en-US" dirty="0" err="1"/>
+              <a:t>zasebnih</a:t>
+            </a:r>
+            <a:r>
+              <a:rPr lang="en-US" dirty="0"/>
+              <a:t> </a:t>
+            </a:r>
+            <a:r>
+              <a:rPr lang="en-US" dirty="0" err="1"/>
+              <a:t>kredencijala</a:t>
+            </a:r>
+            <a:r>
+              <a:rPr lang="en-US" dirty="0"/>
+              <a:t>. </a:t>
+            </a:r>
+          </a:p>
           <a:p>
             <a:endParaRPr lang="en-US" dirty="0"/>
           </a:p>
@@ -10057,7 +14910,7 @@
               <a:buNone/>
             </a:pPr>
             <a:r>
-              <a:rPr lang="en-US" sz="1400" b="1" dirty="0">
+              <a:rPr lang="en-US" sz="1600" b="1" dirty="0">
                 <a:solidFill>
                   <a:srgbClr val="1B2A4A"/>
                 </a:solidFill>
@@ -10067,7 +14920,7 @@
               </a:rPr>
               <a:t>Kontekst i CAP teorema</a:t>
             </a:r>
-            <a:endParaRPr lang="en-US" sz="1400" b="1" dirty="0"/>
+            <a:endParaRPr lang="en-US" sz="1600" b="1" dirty="0"/>
           </a:p>
         </p:txBody>
       </p:sp>
@@ -10096,7 +14949,7 @@
               <a:buNone/>
             </a:pPr>
             <a:r>
-              <a:rPr lang="en-US" sz="1200" dirty="0">
+              <a:rPr lang="en-US" sz="1400" dirty="0">
                 <a:solidFill>
                   <a:srgbClr val="475569"/>
                 </a:solidFill>
@@ -10106,7 +14959,7 @@
               </a:rPr>
               <a:t>Konzistentnost vs Dostupnost — fundamentalni kompromis</a:t>
             </a:r>
-            <a:endParaRPr lang="en-US" sz="1200" dirty="0"/>
+            <a:endParaRPr lang="en-US" sz="1400" dirty="0"/>
           </a:p>
         </p:txBody>
       </p:sp>
@@ -10244,7 +15097,7 @@
               <a:buNone/>
             </a:pPr>
             <a:r>
-              <a:rPr lang="en-US" sz="1400" b="1" dirty="0">
+              <a:rPr lang="en-US" sz="1600" b="1" dirty="0">
                 <a:solidFill>
                   <a:srgbClr val="1B2A4A"/>
                 </a:solidFill>
@@ -10254,7 +15107,7 @@
               </a:rPr>
               <a:t>Preslikavanje (Mirroring)</a:t>
             </a:r>
-            <a:endParaRPr lang="en-US" sz="1400" b="1" dirty="0"/>
+            <a:endParaRPr lang="en-US" sz="1600" b="1" dirty="0"/>
           </a:p>
         </p:txBody>
       </p:sp>
@@ -10283,7 +15136,7 @@
               <a:buNone/>
             </a:pPr>
             <a:r>
-              <a:rPr lang="en-US" sz="1200" dirty="0">
+              <a:rPr lang="en-US" sz="1400" dirty="0">
                 <a:solidFill>
                   <a:srgbClr val="475569"/>
                 </a:solidFill>
@@ -10294,7 +15147,7 @@
               <a:t>Arhitektura, MANUAL/AUTO re</a:t>
             </a:r>
             <a:r>
-              <a:rPr lang="sr-Latn-RS" sz="1200" dirty="0">
+              <a:rPr lang="sr-Latn-RS" sz="1400" dirty="0">
                 <a:solidFill>
                   <a:srgbClr val="475569"/>
                 </a:solidFill>
@@ -10305,7 +15158,7 @@
               <a:t>ž</a:t>
             </a:r>
             <a:r>
-              <a:rPr lang="en-US" sz="1200" dirty="0" err="1">
+              <a:rPr lang="en-US" sz="1400" dirty="0" err="1">
                 <a:solidFill>
                   <a:srgbClr val="475569"/>
                 </a:solidFill>
@@ -10316,7 +15169,7 @@
               <a:t>imi</a:t>
             </a:r>
             <a:r>
-              <a:rPr lang="en-US" sz="1200" dirty="0">
+              <a:rPr lang="en-US" sz="1400" dirty="0">
                 <a:solidFill>
                   <a:srgbClr val="475569"/>
                 </a:solidFill>
@@ -10326,7 +15179,7 @@
               </a:rPr>
               <a:t>, scenario oporavka</a:t>
             </a:r>
-            <a:endParaRPr lang="en-US" sz="1200" dirty="0"/>
+            <a:endParaRPr lang="en-US" sz="1400" dirty="0"/>
           </a:p>
         </p:txBody>
       </p:sp>
@@ -10464,7 +15317,7 @@
               <a:buNone/>
             </a:pPr>
             <a:r>
-              <a:rPr lang="en-US" sz="1400" b="1" dirty="0">
+              <a:rPr lang="en-US" sz="1600" b="1" dirty="0">
                 <a:solidFill>
                   <a:srgbClr val="1B2A4A"/>
                 </a:solidFill>
@@ -10474,7 +15327,7 @@
               </a:rPr>
               <a:t>Nativna binarna replikacija</a:t>
             </a:r>
-            <a:endParaRPr lang="en-US" sz="1400" b="1" dirty="0"/>
+            <a:endParaRPr lang="en-US" sz="1600" b="1" dirty="0"/>
           </a:p>
         </p:txBody>
       </p:sp>
@@ -10503,7 +15356,7 @@
               <a:buNone/>
             </a:pPr>
             <a:r>
-              <a:rPr lang="en-US" sz="1200" dirty="0">
+              <a:rPr lang="en-US" sz="1400" dirty="0">
                 <a:solidFill>
                   <a:srgbClr val="475569"/>
                 </a:solidFill>
@@ -10513,7 +15366,7 @@
               </a:rPr>
               <a:t>Firebird 4.0 — replikacioni dnevnici, sinhronizacija</a:t>
             </a:r>
-            <a:endParaRPr lang="en-US" sz="1200" dirty="0"/>
+            <a:endParaRPr lang="en-US" sz="1400" dirty="0"/>
           </a:p>
         </p:txBody>
       </p:sp>
@@ -10651,7 +15504,7 @@
               <a:buNone/>
             </a:pPr>
             <a:r>
-              <a:rPr lang="en-US" sz="1400" b="1" dirty="0">
+              <a:rPr lang="en-US" sz="1600" b="1" dirty="0">
                 <a:solidFill>
                   <a:srgbClr val="1B2A4A"/>
                 </a:solidFill>
@@ -10661,7 +15514,7 @@
               </a:rPr>
               <a:t>Sinhrona vs Asinhrona replikacija</a:t>
             </a:r>
-            <a:endParaRPr lang="en-US" sz="1400" b="1" dirty="0"/>
+            <a:endParaRPr lang="en-US" sz="1600" b="1" dirty="0"/>
           </a:p>
         </p:txBody>
       </p:sp>
@@ -10690,7 +15543,7 @@
               <a:buNone/>
             </a:pPr>
             <a:r>
-              <a:rPr lang="en-US" sz="1200" dirty="0">
+              <a:rPr lang="en-US" sz="1400" dirty="0">
                 <a:solidFill>
                   <a:srgbClr val="475569"/>
                 </a:solidFill>
@@ -10700,7 +15553,7 @@
               </a:rPr>
               <a:t>Zero Data Loss vs Replication Lag</a:t>
             </a:r>
-            <a:endParaRPr lang="en-US" sz="1200" dirty="0"/>
+            <a:endParaRPr lang="en-US" sz="1400" dirty="0"/>
           </a:p>
         </p:txBody>
       </p:sp>
@@ -10838,7 +15691,7 @@
               <a:buNone/>
             </a:pPr>
             <a:r>
-              <a:rPr lang="en-US" sz="1400" b="1" dirty="0">
+              <a:rPr lang="en-US" sz="1600" b="1" dirty="0">
                 <a:solidFill>
                   <a:srgbClr val="1B2A4A"/>
                 </a:solidFill>
@@ -10849,7 +15702,7 @@
               <a:t>Logi</a:t>
             </a:r>
             <a:r>
-              <a:rPr lang="sr-Latn-RS" sz="1400" b="1" dirty="0">
+              <a:rPr lang="sr-Latn-RS" sz="1600" b="1" dirty="0">
                 <a:solidFill>
                   <a:srgbClr val="1B2A4A"/>
                 </a:solidFill>
@@ -10860,7 +15713,7 @@
               <a:t>č</a:t>
             </a:r>
             <a:r>
-              <a:rPr lang="en-US" sz="1400" b="1" dirty="0">
+              <a:rPr lang="en-US" sz="1600" b="1" dirty="0">
                 <a:solidFill>
                   <a:srgbClr val="1B2A4A"/>
                 </a:solidFill>
@@ -10871,7 +15724,7 @@
               <a:t>ka </a:t>
             </a:r>
             <a:r>
-              <a:rPr lang="en-US" sz="1400" b="1" dirty="0" err="1">
+              <a:rPr lang="en-US" sz="1600" b="1" dirty="0" err="1">
                 <a:solidFill>
                   <a:srgbClr val="1B2A4A"/>
                 </a:solidFill>
@@ -10881,7 +15734,7 @@
               </a:rPr>
               <a:t>replikacija</a:t>
             </a:r>
-            <a:endParaRPr lang="en-US" sz="1400" b="1" dirty="0"/>
+            <a:endParaRPr lang="en-US" sz="1600" b="1" dirty="0"/>
           </a:p>
         </p:txBody>
       </p:sp>
@@ -10910,7 +15763,7 @@
               <a:buNone/>
             </a:pPr>
             <a:r>
-              <a:rPr lang="en-US" sz="1200" dirty="0">
+              <a:rPr lang="en-US" sz="1400" dirty="0">
                 <a:solidFill>
                   <a:srgbClr val="475569"/>
                 </a:solidFill>
@@ -10921,7 +15774,7 @@
               <a:t>Trigeri, REPLICATION_LOG tabela, re</a:t>
             </a:r>
             <a:r>
-              <a:rPr lang="sr-Latn-RS" sz="1200" dirty="0">
+              <a:rPr lang="sr-Latn-RS" sz="1400" dirty="0">
                 <a:solidFill>
                   <a:srgbClr val="475569"/>
                 </a:solidFill>
@@ -10932,7 +15785,7 @@
               <a:t>š</a:t>
             </a:r>
             <a:r>
-              <a:rPr lang="en-US" sz="1200" dirty="0" err="1">
+              <a:rPr lang="en-US" sz="1400" dirty="0" err="1">
                 <a:solidFill>
                   <a:srgbClr val="475569"/>
                 </a:solidFill>
@@ -10943,7 +15796,7 @@
               <a:t>avanje</a:t>
             </a:r>
             <a:r>
-              <a:rPr lang="en-US" sz="1200" dirty="0">
+              <a:rPr lang="en-US" sz="1400" dirty="0">
                 <a:solidFill>
                   <a:srgbClr val="475569"/>
                 </a:solidFill>
@@ -10953,7 +15806,7 @@
               </a:rPr>
               <a:t> konflikata</a:t>
             </a:r>
-            <a:endParaRPr lang="en-US" sz="1200" dirty="0"/>
+            <a:endParaRPr lang="en-US" sz="1400" dirty="0"/>
           </a:p>
         </p:txBody>
       </p:sp>
@@ -11091,7 +15944,7 @@
               <a:buNone/>
             </a:pPr>
             <a:r>
-              <a:rPr lang="en-US" sz="1400" b="1" dirty="0">
+              <a:rPr lang="en-US" sz="1600" b="1" dirty="0">
                 <a:solidFill>
                   <a:srgbClr val="1B2A4A"/>
                 </a:solidFill>
@@ -11101,7 +15954,7 @@
               </a:rPr>
               <a:t>Multi-Master topologije</a:t>
             </a:r>
-            <a:endParaRPr lang="en-US" sz="1400" b="1" dirty="0"/>
+            <a:endParaRPr lang="en-US" sz="1600" b="1" dirty="0"/>
           </a:p>
         </p:txBody>
       </p:sp>
@@ -11130,7 +15983,7 @@
               <a:buNone/>
             </a:pPr>
             <a:r>
-              <a:rPr lang="en-US" sz="1200" dirty="0">
+              <a:rPr lang="en-US" sz="1400" dirty="0">
                 <a:solidFill>
                   <a:srgbClr val="475569"/>
                 </a:solidFill>
@@ -11141,7 +15994,7 @@
               <a:t>Star, Mesh, Ring — eho efekat </a:t>
             </a:r>
             <a:r>
-              <a:rPr lang="en-US" sz="1200" dirty="0" err="1">
+              <a:rPr lang="en-US" sz="1400" dirty="0" err="1">
                 <a:solidFill>
                   <a:srgbClr val="475569"/>
                 </a:solidFill>
@@ -11152,7 +16005,7 @@
               <a:t>i</a:t>
             </a:r>
             <a:r>
-              <a:rPr lang="en-US" sz="1200" dirty="0">
+              <a:rPr lang="en-US" sz="1400" dirty="0">
                 <a:solidFill>
                   <a:srgbClr val="475569"/>
                 </a:solidFill>
@@ -11163,7 +16016,7 @@
               <a:t> re</a:t>
             </a:r>
             <a:r>
-              <a:rPr lang="sr-Latn-RS" sz="1200" dirty="0">
+              <a:rPr lang="sr-Latn-RS" sz="1400" dirty="0">
                 <a:solidFill>
                   <a:srgbClr val="475569"/>
                 </a:solidFill>
@@ -11174,7 +16027,7 @@
               <a:t>ša</a:t>
             </a:r>
             <a:r>
-              <a:rPr lang="en-US" sz="1200" dirty="0" err="1">
+              <a:rPr lang="en-US" sz="1400" dirty="0" err="1">
                 <a:solidFill>
                   <a:srgbClr val="475569"/>
                 </a:solidFill>
@@ -11184,7 +16037,7 @@
               </a:rPr>
               <a:t>vanje</a:t>
             </a:r>
-            <a:endParaRPr lang="en-US" sz="1200" dirty="0"/>
+            <a:endParaRPr lang="en-US" sz="1400" dirty="0"/>
           </a:p>
         </p:txBody>
       </p:sp>
@@ -11322,7 +16175,7 @@
               <a:buNone/>
             </a:pPr>
             <a:r>
-              <a:rPr lang="en-US" sz="1400" b="1" dirty="0" err="1">
+              <a:rPr lang="en-US" sz="1600" b="1" dirty="0" err="1">
                 <a:solidFill>
                   <a:srgbClr val="1B2A4A"/>
                 </a:solidFill>
@@ -11333,7 +16186,7 @@
               <a:t>Prakti</a:t>
             </a:r>
             <a:r>
-              <a:rPr lang="sr-Latn-RS" sz="1400" b="1" dirty="0">
+              <a:rPr lang="sr-Latn-RS" sz="1600" b="1" dirty="0">
                 <a:solidFill>
                   <a:srgbClr val="1B2A4A"/>
                 </a:solidFill>
@@ -11344,7 +16197,7 @@
               <a:t>č</a:t>
             </a:r>
             <a:r>
-              <a:rPr lang="en-US" sz="1400" b="1" dirty="0" err="1">
+              <a:rPr lang="en-US" sz="1600" b="1" dirty="0" err="1">
                 <a:solidFill>
                   <a:srgbClr val="1B2A4A"/>
                 </a:solidFill>
@@ -11355,7 +16208,7 @@
               <a:t>na</a:t>
             </a:r>
             <a:r>
-              <a:rPr lang="en-US" sz="1400" b="1" dirty="0">
+              <a:rPr lang="en-US" sz="1600" b="1" dirty="0">
                 <a:solidFill>
                   <a:srgbClr val="1B2A4A"/>
                 </a:solidFill>
@@ -11365,7 +16218,7 @@
               </a:rPr>
               <a:t> implementacija</a:t>
             </a:r>
-            <a:endParaRPr lang="en-US" sz="1400" b="1" dirty="0"/>
+            <a:endParaRPr lang="en-US" sz="1600" b="1" dirty="0"/>
           </a:p>
         </p:txBody>
       </p:sp>
@@ -11394,7 +16247,7 @@
               <a:buNone/>
             </a:pPr>
             <a:r>
-              <a:rPr lang="en-US" sz="1200" dirty="0">
+              <a:rPr lang="en-US" sz="1400" dirty="0">
                 <a:solidFill>
                   <a:srgbClr val="475569"/>
                 </a:solidFill>
@@ -11404,7 +16257,7 @@
               </a:rPr>
               <a:t>8 koraka konfiguracije + 5 verifikacionih primera</a:t>
             </a:r>
-            <a:endParaRPr lang="en-US" sz="1200" dirty="0"/>
+            <a:endParaRPr lang="en-US" sz="1400" dirty="0"/>
           </a:p>
         </p:txBody>
       </p:sp>
@@ -14006,9 +18859,6 @@
             </a:endParaRPr>
           </a:p>
           <a:p>
-            <a:pPr marL="0" indent="0">
-              <a:buNone/>
-            </a:pPr>
             <a:r>
               <a:rPr lang="en-US" sz="1200" dirty="0">
                 <a:solidFill>
@@ -14018,7 +18868,51 @@
                 <a:ea typeface="Calibri" pitchFamily="34" charset="-122"/>
                 <a:cs typeface="Calibri" pitchFamily="34" charset="-120"/>
               </a:rPr>
-              <a:t>CREATE SHADOW 1 MANUAL 'D:\backup\firma.shd';</a:t>
+              <a:t>CREATE SHADOW 1 MANUAL 'D:\</a:t>
+            </a:r>
+            <a:r>
+              <a:rPr lang="sr-Latn-RS" sz="1200" dirty="0">
+                <a:solidFill>
+                  <a:srgbClr val="1B2A4A"/>
+                </a:solidFill>
+                <a:latin typeface="Consolas" panose="020B0609020204030204" pitchFamily="49" charset="0"/>
+                <a:ea typeface="Calibri" pitchFamily="34" charset="-122"/>
+                <a:cs typeface="Calibri" pitchFamily="34" charset="-120"/>
+              </a:rPr>
+              <a:t>Mirror</a:t>
+            </a:r>
+            <a:r>
+              <a:rPr lang="en-US" sz="1200" dirty="0">
+                <a:solidFill>
+                  <a:srgbClr val="1B2A4A"/>
+                </a:solidFill>
+                <a:latin typeface="Consolas" panose="020B0609020204030204" pitchFamily="49" charset="0"/>
+                <a:ea typeface="Calibri" pitchFamily="34" charset="-122"/>
+                <a:cs typeface="Calibri" pitchFamily="34" charset="-120"/>
+              </a:rPr>
+              <a:t>\</a:t>
+            </a:r>
+            <a:r>
+              <a:rPr lang="sr-Latn-RS" sz="1200" dirty="0">
+                <a:solidFill>
+                  <a:srgbClr val="1B2A4A"/>
+                </a:solidFill>
+                <a:latin typeface="Consolas" panose="020B0609020204030204" pitchFamily="49" charset="0"/>
+                <a:ea typeface="Calibri" pitchFamily="34" charset="-122"/>
+                <a:cs typeface="Calibri" pitchFamily="34" charset="-120"/>
+              </a:rPr>
+              <a:t>naziv_baze</a:t>
+            </a:r>
+            <a:r>
+              <a:rPr lang="en-US" sz="1200" dirty="0">
+                <a:solidFill>
+                  <a:srgbClr val="1B2A4A"/>
+                </a:solidFill>
+                <a:latin typeface="Consolas" panose="020B0609020204030204" pitchFamily="49" charset="0"/>
+                <a:ea typeface="Calibri" pitchFamily="34" charset="-122"/>
+                <a:cs typeface="Calibri" pitchFamily="34" charset="-120"/>
+              </a:rPr>
+              <a:t>.shd';</a:t>
             </a:r>
             <a:endParaRPr lang="en-US" sz="1200" dirty="0">
               <a:solidFill>
@@ -14297,9 +19191,6 @@
             </a:endParaRPr>
           </a:p>
           <a:p>
-            <a:pPr marL="0" indent="0">
-              <a:buNone/>
-            </a:pPr>
             <a:r>
               <a:rPr lang="en-US" sz="1200" dirty="0">
                 <a:solidFill>
@@ -14309,7 +19200,73 @@
                 <a:ea typeface="Calibri" pitchFamily="34" charset="-122"/>
                 <a:cs typeface="Calibri" pitchFamily="34" charset="-120"/>
               </a:rPr>
-              <a:t>CREATE SHADOW 1 AUTO 'D:\backup\firma.shd';</a:t>
+              <a:t>CREATE SHADOW 1 AUTO 'D:\</a:t>
+            </a:r>
+            <a:r>
+              <a:rPr lang="sr-Latn-RS" sz="1200" dirty="0">
+                <a:solidFill>
+                  <a:srgbClr val="1B2A4A"/>
+                </a:solidFill>
+                <a:latin typeface="Consolas" panose="020B0609020204030204" pitchFamily="49" charset="0"/>
+                <a:ea typeface="Calibri" pitchFamily="34" charset="-122"/>
+                <a:cs typeface="Calibri" pitchFamily="34" charset="-120"/>
+              </a:rPr>
+              <a:t>Mirror</a:t>
+            </a:r>
+            <a:r>
+              <a:rPr lang="en-US" sz="1200" dirty="0">
+                <a:solidFill>
+                  <a:srgbClr val="1B2A4A"/>
+                </a:solidFill>
+                <a:latin typeface="Consolas" panose="020B0609020204030204" pitchFamily="49" charset="0"/>
+                <a:ea typeface="Calibri" pitchFamily="34" charset="-122"/>
+                <a:cs typeface="Calibri" pitchFamily="34" charset="-120"/>
+              </a:rPr>
+              <a:t>\</a:t>
+            </a:r>
+            <a:r>
+              <a:rPr lang="sr-Latn-RS" sz="1200" dirty="0">
+                <a:solidFill>
+                  <a:srgbClr val="1B2A4A"/>
+                </a:solidFill>
+                <a:latin typeface="Consolas" panose="020B0609020204030204" pitchFamily="49" charset="0"/>
+                <a:ea typeface="Calibri" pitchFamily="34" charset="-122"/>
+                <a:cs typeface="Calibri" pitchFamily="34" charset="-120"/>
+              </a:rPr>
+              <a:t>naziv_baze</a:t>
+            </a:r>
+            <a:r>
+              <a:rPr lang="en-US" sz="1200" dirty="0">
+                <a:solidFill>
+                  <a:srgbClr val="1B2A4A"/>
+                </a:solidFill>
+                <a:latin typeface="Consolas" panose="020B0609020204030204" pitchFamily="49" charset="0"/>
+                <a:ea typeface="Calibri" pitchFamily="34" charset="-122"/>
+                <a:cs typeface="Calibri" pitchFamily="34" charset="-120"/>
+              </a:rPr>
+              <a:t>.</a:t>
+            </a:r>
+            <a:r>
+              <a:rPr lang="en-US" sz="1200" dirty="0" err="1">
+                <a:solidFill>
+                  <a:srgbClr val="1B2A4A"/>
+                </a:solidFill>
+                <a:latin typeface="Consolas" panose="020B0609020204030204" pitchFamily="49" charset="0"/>
+                <a:ea typeface="Calibri" pitchFamily="34" charset="-122"/>
+                <a:cs typeface="Calibri" pitchFamily="34" charset="-120"/>
+              </a:rPr>
+              <a:t>shd</a:t>
+            </a:r>
+            <a:r>
+              <a:rPr lang="en-US" sz="1200" dirty="0">
+                <a:solidFill>
+                  <a:srgbClr val="1B2A4A"/>
+                </a:solidFill>
+                <a:latin typeface="Consolas" panose="020B0609020204030204" pitchFamily="49" charset="0"/>
+                <a:ea typeface="Calibri" pitchFamily="34" charset="-122"/>
+                <a:cs typeface="Calibri" pitchFamily="34" charset="-120"/>
+              </a:rPr>
+              <a:t>';</a:t>
             </a:r>
             <a:endParaRPr lang="en-US" sz="1200" dirty="0">
               <a:solidFill>
@@ -18305,7 +23262,7 @@
         <p:spPr>
           <a:xfrm>
             <a:off x="228600" y="777240"/>
-            <a:ext cx="8686800" cy="658368"/>
+            <a:ext cx="8686800" cy="854964"/>
           </a:xfrm>
           <a:prstGeom prst="rect">
             <a:avLst/>
@@ -18410,7 +23367,7 @@
         <p:spPr>
           <a:xfrm>
             <a:off x="365760" y="1079556"/>
-            <a:ext cx="8503920" cy="237744"/>
+            <a:ext cx="8503920" cy="479496"/>
           </a:xfrm>
           <a:prstGeom prst="rect">
             <a:avLst/>
@@ -18734,7 +23691,7 @@
         </p:nvSpPr>
         <p:spPr>
           <a:xfrm>
-            <a:off x="228600" y="1591056"/>
+            <a:off x="228600" y="1705356"/>
             <a:ext cx="4160520" cy="1572768"/>
           </a:xfrm>
           <a:prstGeom prst="rect">
@@ -18768,7 +23725,7 @@
         </p:nvSpPr>
         <p:spPr>
           <a:xfrm>
-            <a:off x="228600" y="1591056"/>
+            <a:off x="228600" y="1705356"/>
             <a:ext cx="4160520" cy="329184"/>
           </a:xfrm>
           <a:prstGeom prst="rect">
@@ -18795,7 +23752,7 @@
         </p:nvSpPr>
         <p:spPr>
           <a:xfrm>
-            <a:off x="320040" y="1627632"/>
+            <a:off x="320040" y="1741932"/>
             <a:ext cx="3977640" cy="256032"/>
           </a:xfrm>
           <a:prstGeom prst="rect">
@@ -18834,7 +23791,7 @@
         </p:nvSpPr>
         <p:spPr>
           <a:xfrm>
-            <a:off x="320040" y="1975104"/>
+            <a:off x="320040" y="2089404"/>
             <a:ext cx="3977640" cy="1115568"/>
           </a:xfrm>
           <a:prstGeom prst="rect">
@@ -18992,7 +23949,7 @@
         </p:nvSpPr>
         <p:spPr>
           <a:xfrm>
-            <a:off x="4572000" y="1591056"/>
+            <a:off x="4572000" y="1705356"/>
             <a:ext cx="4343400" cy="1572768"/>
           </a:xfrm>
           <a:prstGeom prst="rect">
@@ -19026,7 +23983,7 @@
         </p:nvSpPr>
         <p:spPr>
           <a:xfrm>
-            <a:off x="4572000" y="1591056"/>
+            <a:off x="4572000" y="1705356"/>
             <a:ext cx="4343400" cy="329184"/>
           </a:xfrm>
           <a:prstGeom prst="rect">
@@ -19053,7 +24010,7 @@
         </p:nvSpPr>
         <p:spPr>
           <a:xfrm>
-            <a:off x="4663440" y="1627632"/>
+            <a:off x="4663440" y="1741932"/>
             <a:ext cx="4160520" cy="256032"/>
           </a:xfrm>
           <a:prstGeom prst="rect">
@@ -19092,7 +24049,7 @@
         </p:nvSpPr>
         <p:spPr>
           <a:xfrm>
-            <a:off x="4663440" y="1975104"/>
+            <a:off x="4663440" y="2089404"/>
             <a:ext cx="4160520" cy="1115568"/>
           </a:xfrm>
           <a:prstGeom prst="rect">
@@ -19369,7 +24326,7 @@
         </p:nvSpPr>
         <p:spPr>
           <a:xfrm>
-            <a:off x="228600" y="3310128"/>
+            <a:off x="228600" y="3424428"/>
             <a:ext cx="2743200" cy="1600200"/>
           </a:xfrm>
           <a:prstGeom prst="rect">
@@ -19408,7 +24365,7 @@
         </p:nvSpPr>
         <p:spPr>
           <a:xfrm>
-            <a:off x="228600" y="3310128"/>
+            <a:off x="228600" y="3424428"/>
             <a:ext cx="64008" cy="1600200"/>
           </a:xfrm>
           <a:prstGeom prst="rect">
@@ -19435,7 +24392,7 @@
         </p:nvSpPr>
         <p:spPr>
           <a:xfrm>
-            <a:off x="365760" y="3383280"/>
+            <a:off x="365760" y="3497580"/>
             <a:ext cx="2560320" cy="292608"/>
           </a:xfrm>
           <a:prstGeom prst="rect">
@@ -19452,7 +24409,7 @@
               <a:buNone/>
             </a:pPr>
             <a:r>
-              <a:rPr lang="en-US" sz="1400" b="1" dirty="0">
+              <a:rPr lang="en-US" sz="1600" b="1" dirty="0">
                 <a:solidFill>
                   <a:srgbClr val="1B2A4A"/>
                 </a:solidFill>
@@ -19462,7 +24419,7 @@
               </a:rPr>
               <a:t>Last Write Wins</a:t>
             </a:r>
-            <a:endParaRPr lang="en-US" sz="1400" dirty="0"/>
+            <a:endParaRPr lang="en-US" sz="1600" dirty="0"/>
           </a:p>
         </p:txBody>
       </p:sp>
@@ -19474,8 +24431,8 @@
         </p:nvSpPr>
         <p:spPr>
           <a:xfrm>
-            <a:off x="365760" y="3657600"/>
-            <a:ext cx="2560320" cy="1179576"/>
+            <a:off x="365760" y="3771900"/>
+            <a:ext cx="2560320" cy="2379038"/>
           </a:xfrm>
           <a:prstGeom prst="rect">
             <a:avLst/>
@@ -19679,7 +24636,7 @@
         </p:nvSpPr>
         <p:spPr>
           <a:xfrm>
-            <a:off x="3127248" y="3310128"/>
+            <a:off x="3127248" y="3424428"/>
             <a:ext cx="2743200" cy="1600200"/>
           </a:xfrm>
           <a:prstGeom prst="rect">
@@ -19718,7 +24675,7 @@
         </p:nvSpPr>
         <p:spPr>
           <a:xfrm>
-            <a:off x="3127248" y="3310128"/>
+            <a:off x="3127248" y="3424428"/>
             <a:ext cx="64008" cy="1600200"/>
           </a:xfrm>
           <a:prstGeom prst="rect">
@@ -19745,7 +24702,7 @@
         </p:nvSpPr>
         <p:spPr>
           <a:xfrm>
-            <a:off x="3264408" y="3383280"/>
+            <a:off x="3264408" y="3497580"/>
             <a:ext cx="2560320" cy="292608"/>
           </a:xfrm>
           <a:prstGeom prst="rect">
@@ -19762,7 +24719,7 @@
               <a:buNone/>
             </a:pPr>
             <a:r>
-              <a:rPr lang="en-US" sz="1400" b="1" dirty="0">
+              <a:rPr lang="en-US" sz="1600" b="1" dirty="0">
                 <a:solidFill>
                   <a:srgbClr val="1B2A4A"/>
                 </a:solidFill>
@@ -19772,7 +24729,7 @@
               </a:rPr>
               <a:t>Static Priority</a:t>
             </a:r>
-            <a:endParaRPr lang="en-US" sz="1400" dirty="0"/>
+            <a:endParaRPr lang="en-US" sz="1600" dirty="0"/>
           </a:p>
         </p:txBody>
       </p:sp>
@@ -19784,8 +24741,8 @@
         </p:nvSpPr>
         <p:spPr>
           <a:xfrm>
-            <a:off x="3264408" y="3657600"/>
-            <a:ext cx="2560320" cy="1179576"/>
+            <a:off x="3264408" y="3771900"/>
+            <a:ext cx="2560320" cy="2379038"/>
           </a:xfrm>
           <a:prstGeom prst="rect">
             <a:avLst/>
@@ -19956,7 +24913,7 @@
         </p:nvSpPr>
         <p:spPr>
           <a:xfrm>
-            <a:off x="6025896" y="3310128"/>
+            <a:off x="6025896" y="3424428"/>
             <a:ext cx="2743200" cy="1600200"/>
           </a:xfrm>
           <a:prstGeom prst="rect">
@@ -19995,7 +24952,7 @@
         </p:nvSpPr>
         <p:spPr>
           <a:xfrm>
-            <a:off x="6025896" y="3310128"/>
+            <a:off x="6025896" y="3424428"/>
             <a:ext cx="64008" cy="1600200"/>
           </a:xfrm>
           <a:prstGeom prst="rect">
@@ -20022,7 +24979,7 @@
         </p:nvSpPr>
         <p:spPr>
           <a:xfrm>
-            <a:off x="6163056" y="3383280"/>
+            <a:off x="6163056" y="3497580"/>
             <a:ext cx="2560320" cy="292608"/>
           </a:xfrm>
           <a:prstGeom prst="rect">
@@ -20039,7 +24996,7 @@
               <a:buNone/>
             </a:pPr>
             <a:r>
-              <a:rPr lang="en-US" sz="1400" b="1" dirty="0">
+              <a:rPr lang="en-US" sz="1600" b="1" dirty="0">
                 <a:solidFill>
                   <a:srgbClr val="1B2A4A"/>
                 </a:solidFill>
@@ -20049,7 +25006,7 @@
               </a:rPr>
               <a:t>Aplikativna logika</a:t>
             </a:r>
-            <a:endParaRPr lang="en-US" sz="1400" dirty="0"/>
+            <a:endParaRPr lang="en-US" sz="1600" dirty="0"/>
           </a:p>
         </p:txBody>
       </p:sp>
@@ -20061,8 +25018,8 @@
         </p:nvSpPr>
         <p:spPr>
           <a:xfrm>
-            <a:off x="6163056" y="3657600"/>
-            <a:ext cx="2560320" cy="1179576"/>
+            <a:off x="6163056" y="3771900"/>
+            <a:ext cx="2560320" cy="2379038"/>
           </a:xfrm>
           <a:prstGeom prst="rect">
             <a:avLst/>
@@ -20266,7 +25223,7 @@
         </p:nvSpPr>
         <p:spPr>
           <a:xfrm>
-            <a:off x="228600" y="4974336"/>
+            <a:off x="228600" y="5088636"/>
             <a:ext cx="8686800" cy="0"/>
           </a:xfrm>
           <a:prstGeom prst="rect">
@@ -23063,7 +28020,7 @@
           <a:bodyPr/>
           <a:lstStyle/>
           <a:p>
-            <a:endParaRPr/>
+            <a:endParaRPr sz="1200"/>
           </a:p>
         </p:txBody>
       </p:sp>
@@ -23594,11 +28551,90 @@
                 <a:solidFill>
                   <a:srgbClr val="475569"/>
                 </a:solidFill>
-                <a:latin typeface="Consolas" pitchFamily="34" charset="0"/>
                 <a:ea typeface="Consolas" pitchFamily="34" charset="-122"/>
                 <a:cs typeface="Consolas" pitchFamily="34" charset="-120"/>
               </a:rPr>
-              <a:t>(master: ukljucuje pracenje tabela)</a:t>
+              <a:t>(master: </a:t>
+            </a:r>
+            <a:r>
+              <a:rPr lang="en-US" sz="1200" dirty="0" err="1">
+                <a:solidFill>
+                  <a:srgbClr val="475569"/>
+                </a:solidFill>
+                <a:ea typeface="Consolas" pitchFamily="34" charset="-122"/>
+                <a:cs typeface="Consolas" pitchFamily="34" charset="-120"/>
+              </a:rPr>
+              <a:t>uklju</a:t>
+            </a:r>
+            <a:r>
+              <a:rPr lang="sr-Latn-RS" sz="1200" dirty="0">
+                <a:solidFill>
+                  <a:srgbClr val="475569"/>
+                </a:solidFill>
+                <a:ea typeface="Consolas" pitchFamily="34" charset="-122"/>
+                <a:cs typeface="Consolas" pitchFamily="34" charset="-120"/>
+              </a:rPr>
+              <a:t>č</a:t>
+            </a:r>
+            <a:r>
+              <a:rPr lang="en-US" sz="1200" dirty="0" err="1">
+                <a:solidFill>
+                  <a:srgbClr val="475569"/>
+                </a:solidFill>
+                <a:ea typeface="Consolas" pitchFamily="34" charset="-122"/>
+                <a:cs typeface="Consolas" pitchFamily="34" charset="-120"/>
+              </a:rPr>
+              <a:t>uje</a:t>
+            </a:r>
+            <a:r>
+              <a:rPr lang="en-US" sz="1200" dirty="0">
+                <a:solidFill>
+                  <a:srgbClr val="475569"/>
+                </a:solidFill>
+                <a:ea typeface="Consolas" pitchFamily="34" charset="-122"/>
+                <a:cs typeface="Consolas" pitchFamily="34" charset="-120"/>
+              </a:rPr>
+              <a:t> </a:t>
+            </a:r>
+            <a:r>
+              <a:rPr lang="en-US" sz="1200" dirty="0" err="1">
+                <a:solidFill>
+                  <a:srgbClr val="475569"/>
+                </a:solidFill>
+                <a:ea typeface="Consolas" pitchFamily="34" charset="-122"/>
+                <a:cs typeface="Consolas" pitchFamily="34" charset="-120"/>
+              </a:rPr>
+              <a:t>pra</a:t>
+            </a:r>
+            <a:r>
+              <a:rPr lang="sr-Latn-RS" sz="1200" dirty="0">
+                <a:solidFill>
+                  <a:srgbClr val="475569"/>
+                </a:solidFill>
+                <a:ea typeface="Consolas" pitchFamily="34" charset="-122"/>
+                <a:cs typeface="Consolas" pitchFamily="34" charset="-120"/>
+              </a:rPr>
+              <a:t>ć</a:t>
+            </a:r>
+            <a:r>
+              <a:rPr lang="en-US" sz="1200" dirty="0" err="1">
+                <a:solidFill>
+                  <a:srgbClr val="475569"/>
+                </a:solidFill>
+                <a:ea typeface="Consolas" pitchFamily="34" charset="-122"/>
+                <a:cs typeface="Consolas" pitchFamily="34" charset="-120"/>
+              </a:rPr>
+              <a:t>enje</a:t>
+            </a:r>
+            <a:r>
+              <a:rPr lang="en-US" sz="1200" dirty="0">
+                <a:solidFill>
+                  <a:srgbClr val="475569"/>
+                </a:solidFill>
+                <a:ea typeface="Consolas" pitchFamily="34" charset="-122"/>
+                <a:cs typeface="Consolas" pitchFamily="34" charset="-120"/>
+              </a:rPr>
+              <a:t> tabela)</a:t>
             </a:r>
             <a:endParaRPr lang="en-US" sz="1200" dirty="0"/>
           </a:p>
@@ -23776,7 +28812,7 @@
         <p:spPr>
           <a:xfrm>
             <a:off x="6967728" y="3429000"/>
-            <a:ext cx="1901952" cy="1325880"/>
+            <a:ext cx="2029968" cy="1325880"/>
           </a:xfrm>
           <a:prstGeom prst="rect">
             <a:avLst/>
@@ -23792,7 +28828,7 @@
               <a:buNone/>
             </a:pPr>
             <a:r>
-              <a:rPr lang="en-US" sz="1200" dirty="0">
+              <a:rPr lang="en-US" sz="1100" dirty="0">
                 <a:solidFill>
                   <a:srgbClr val="475569"/>
                 </a:solidFill>
@@ -23802,14 +28838,14 @@
               </a:rPr>
               <a:t>CREATE MAPPING repl_agent USING PLUGIN SRP</a:t>
             </a:r>
-            <a:endParaRPr lang="en-US" sz="1200" dirty="0"/>
+            <a:endParaRPr lang="en-US" sz="1100" dirty="0"/>
           </a:p>
           <a:p>
             <a:pPr marL="0" indent="0">
               <a:buNone/>
             </a:pPr>
             <a:r>
-              <a:rPr lang="en-US" sz="1200" dirty="0">
+              <a:rPr lang="en-US" sz="1100" dirty="0">
                 <a:solidFill>
                   <a:srgbClr val="475569"/>
                 </a:solidFill>
@@ -23819,14 +28855,14 @@
               </a:rPr>
               <a:t>FROM USER replication_user TO USER SYSDBA;</a:t>
             </a:r>
-            <a:endParaRPr lang="en-US" sz="1200" dirty="0"/>
+            <a:endParaRPr lang="en-US" sz="1100" dirty="0"/>
           </a:p>
           <a:p>
             <a:pPr marL="0" indent="0">
               <a:buNone/>
             </a:pPr>
             <a:r>
-              <a:rPr lang="en-US" sz="1200" dirty="0">
+              <a:rPr lang="en-US" sz="1100" dirty="0">
                 <a:solidFill>
                   <a:srgbClr val="475569"/>
                 </a:solidFill>
@@ -23836,7 +28872,7 @@
               <a:t>(</a:t>
             </a:r>
             <a:r>
-              <a:rPr lang="en-US" sz="1200" dirty="0" err="1">
+              <a:rPr lang="en-US" sz="1100" dirty="0" err="1">
                 <a:solidFill>
                   <a:srgbClr val="475569"/>
                 </a:solidFill>
@@ -23846,7 +28882,7 @@
               <a:t>repli</a:t>
             </a:r>
             <a:r>
-              <a:rPr lang="sr-Latn-RS" sz="1200" dirty="0">
+              <a:rPr lang="sr-Latn-RS" sz="1100" dirty="0">
                 <a:solidFill>
                   <a:srgbClr val="475569"/>
                 </a:solidFill>
@@ -23856,7 +28892,7 @@
               <a:t>k</a:t>
             </a:r>
             <a:r>
-              <a:rPr lang="en-US" sz="1200" dirty="0">
+              <a:rPr lang="en-US" sz="1100" dirty="0">
                 <a:solidFill>
                   <a:srgbClr val="475569"/>
                 </a:solidFill>
@@ -23865,7 +28901,7 @@
               </a:rPr>
               <a:t>a prihvata agenta kao SYSDBA)</a:t>
             </a:r>
-            <a:endParaRPr lang="en-US" sz="1200" dirty="0"/>
+            <a:endParaRPr lang="en-US" sz="1100" dirty="0"/>
           </a:p>
         </p:txBody>
       </p:sp>

--- a/seminarski-3/Replikacija podataka (replication and mirroring) kod Firebird baze podataka.pptx
+++ b/seminarski-3/Replikacija podataka (replication and mirroring) kod Firebird baze podataka.pptx
@@ -7328,66 +7328,7 @@
               <a:rPr lang="en-US" dirty="0" err="1"/>
               <a:t>tabelu</a:t>
             </a:r>
-            <a:r>
-              <a:rPr lang="en-US" dirty="0"/>
-              <a:t>, za </a:t>
-            </a:r>
-            <a:r>
-              <a:rPr lang="en-US" dirty="0" err="1"/>
-              <a:t>razliku</a:t>
-            </a:r>
-            <a:r>
-              <a:rPr lang="en-US" dirty="0"/>
-              <a:t> od </a:t>
-            </a:r>
-            <a:r>
-              <a:rPr lang="en-US" dirty="0" err="1"/>
-              <a:t>binarne</a:t>
-            </a:r>
-            <a:r>
-              <a:rPr lang="en-US" dirty="0"/>
-              <a:t> </a:t>
-            </a:r>
-            <a:r>
-              <a:rPr lang="en-US" dirty="0" err="1"/>
-              <a:t>replikacije</a:t>
-            </a:r>
-            <a:r>
-              <a:rPr lang="en-US" dirty="0"/>
-              <a:t> </a:t>
-            </a:r>
-            <a:r>
-              <a:rPr lang="en-US" dirty="0" err="1"/>
-              <a:t>koja</a:t>
-            </a:r>
-            <a:r>
-              <a:rPr lang="en-US" dirty="0"/>
-              <a:t> </a:t>
-            </a:r>
-            <a:r>
-              <a:rPr lang="en-US" dirty="0" err="1"/>
-              <a:t>kopira</a:t>
-            </a:r>
-            <a:r>
-              <a:rPr lang="en-US" dirty="0"/>
-              <a:t> </a:t>
-            </a:r>
-            <a:r>
-              <a:rPr lang="en-US" dirty="0" err="1"/>
-              <a:t>fizičke</a:t>
-            </a:r>
-            <a:r>
-              <a:rPr lang="en-US" dirty="0"/>
-              <a:t> </a:t>
-            </a:r>
-            <a:r>
-              <a:rPr lang="en-US" dirty="0" err="1"/>
-              <a:t>stranice</a:t>
-            </a:r>
-            <a:r>
-              <a:rPr lang="en-US" dirty="0"/>
-              <a:t>.</a:t>
-            </a:r>
+            <a:endParaRPr lang="en-US" dirty="0"/>
           </a:p>
           <a:p>
             <a:r>
@@ -7548,40 +7489,9 @@
             </a:r>
             <a:r>
               <a:rPr lang="en-US" dirty="0"/>
-              <a:t> PostgreSQL-a, </a:t>
-            </a:r>
-            <a:r>
-              <a:rPr lang="en-US" dirty="0" err="1"/>
-              <a:t>što</a:t>
-            </a:r>
-            <a:r>
-              <a:rPr lang="en-US" dirty="0"/>
-              <a:t> </a:t>
-            </a:r>
-            <a:r>
-              <a:rPr lang="en-US" dirty="0" err="1"/>
-              <a:t>binarnu</a:t>
-            </a:r>
-            <a:r>
-              <a:rPr lang="en-US" dirty="0"/>
-              <a:t> </a:t>
-            </a:r>
-            <a:r>
-              <a:rPr lang="en-US" dirty="0" err="1"/>
-              <a:t>replikaciju</a:t>
-            </a:r>
-            <a:r>
-              <a:rPr lang="en-US" dirty="0"/>
-              <a:t> ne </a:t>
-            </a:r>
-            <a:r>
-              <a:rPr lang="en-US" dirty="0" err="1"/>
-              <a:t>može</a:t>
-            </a:r>
-            <a:r>
-              <a:rPr lang="en-US" dirty="0"/>
-              <a:t>.</a:t>
-            </a:r>
+              <a:t> PostgreSQL-a</a:t>
+            </a:r>
+            <a:endParaRPr lang="sr-Latn-RS" dirty="0"/>
           </a:p>
           <a:p>
             <a:r>
@@ -18416,7 +18326,40 @@
                 <a:ea typeface="Calibri" pitchFamily="34" charset="-122"/>
                 <a:cs typeface="Calibri" pitchFamily="34" charset="-120"/>
               </a:rPr>
-              <a:t>Upis je UVEK sinhroni — baza ceka potvrdu OBA diska. Operise na nivou stranica (4–16 KB), ne SQL naredbi.</a:t>
+              <a:t>Upis je UVEK sinhroni — baza ceka potvrdu OBA diska. </a:t>
+            </a:r>
+            <a:r>
+              <a:rPr lang="en-US" sz="1400" b="1" dirty="0" err="1">
+                <a:solidFill>
+                  <a:srgbClr val="1B2A4A"/>
+                </a:solidFill>
+                <a:latin typeface="Calibri" pitchFamily="34" charset="0"/>
+                <a:ea typeface="Calibri" pitchFamily="34" charset="-122"/>
+                <a:cs typeface="Calibri" pitchFamily="34" charset="-120"/>
+              </a:rPr>
+              <a:t>Operi</a:t>
+            </a:r>
+            <a:r>
+              <a:rPr lang="sr-Latn-RS" sz="1400" b="1" dirty="0">
+                <a:solidFill>
+                  <a:srgbClr val="1B2A4A"/>
+                </a:solidFill>
+                <a:latin typeface="Calibri" pitchFamily="34" charset="0"/>
+                <a:ea typeface="Calibri" pitchFamily="34" charset="-122"/>
+                <a:cs typeface="Calibri" pitchFamily="34" charset="-120"/>
+              </a:rPr>
+              <a:t>š</a:t>
+            </a:r>
+            <a:r>
+              <a:rPr lang="en-US" sz="1400" b="1" dirty="0">
+                <a:solidFill>
+                  <a:srgbClr val="1B2A4A"/>
+                </a:solidFill>
+                <a:latin typeface="Calibri" pitchFamily="34" charset="0"/>
+                <a:ea typeface="Calibri" pitchFamily="34" charset="-122"/>
+                <a:cs typeface="Calibri" pitchFamily="34" charset="-120"/>
+              </a:rPr>
+              <a:t>e na nivou stranica (4–16 KB), ne SQL naredbi.</a:t>
             </a:r>
             <a:endParaRPr lang="en-US" sz="1400" b="1" dirty="0">
               <a:solidFill>
@@ -26080,7 +26023,40 @@
                 <a:ea typeface="Calibri" pitchFamily="34" charset="-122"/>
                 <a:cs typeface="Calibri" pitchFamily="34" charset="-120"/>
               </a:rPr>
-              <a:t>Nema SPOF — izuzetno visoka tolerancija na kvarove.</a:t>
+              <a:t>Nema </a:t>
+            </a:r>
+            <a:r>
+              <a:rPr lang="sr-Latn-RS" sz="1400">
+                <a:solidFill>
+                  <a:srgbClr val="475569"/>
+                </a:solidFill>
+                <a:latin typeface="Calibri" pitchFamily="34" charset="0"/>
+                <a:ea typeface="Calibri" pitchFamily="34" charset="-122"/>
+                <a:cs typeface="Calibri" pitchFamily="34" charset="-120"/>
+              </a:rPr>
+              <a:t>tačke kvara (SPOF)</a:t>
+            </a:r>
+            <a:r>
+              <a:rPr lang="en-US" sz="1400">
+                <a:solidFill>
+                  <a:srgbClr val="475569"/>
+                </a:solidFill>
+                <a:latin typeface="Calibri" pitchFamily="34" charset="0"/>
+                <a:ea typeface="Calibri" pitchFamily="34" charset="-122"/>
+                <a:cs typeface="Calibri" pitchFamily="34" charset="-120"/>
+              </a:rPr>
+              <a:t> </a:t>
+            </a:r>
+            <a:r>
+              <a:rPr lang="en-US" sz="1400" dirty="0">
+                <a:solidFill>
+                  <a:srgbClr val="475569"/>
+                </a:solidFill>
+                <a:latin typeface="Calibri" pitchFamily="34" charset="0"/>
+                <a:ea typeface="Calibri" pitchFamily="34" charset="-122"/>
+                <a:cs typeface="Calibri" pitchFamily="34" charset="-120"/>
+              </a:rPr>
+              <a:t>— izuzetno visoka tolerancija na kvarove.</a:t>
             </a:r>
             <a:endParaRPr lang="en-US" sz="1400" dirty="0"/>
           </a:p>

--- a/seminarski-3/Replikacija podataka (replication and mirroring) kod Firebird baze podataka.pptx
+++ b/seminarski-3/Replikacija podataka (replication and mirroring) kod Firebird baze podataka.pptx
@@ -5256,11 +5256,11 @@
           <a:p>
             <a:r>
               <a:rPr lang="en-US" dirty="0"/>
-              <a:t>Firebird 4.0 </a:t>
-            </a:r>
-            <a:r>
-              <a:rPr lang="en-US" dirty="0" err="1"/>
-              <a:t>uvodi</a:t>
+              <a:t>"Firebird 4.0 je </a:t>
+            </a:r>
+            <a:r>
+              <a:rPr lang="en-US" dirty="0" err="1"/>
+              <a:t>uveo</a:t>
             </a:r>
             <a:r>
               <a:rPr lang="en-US" dirty="0"/>
@@ -5296,23 +5296,55 @@
             </a:r>
             <a:r>
               <a:rPr lang="en-US" dirty="0"/>
-              <a:t> u </a:t>
-            </a:r>
-            <a:r>
-              <a:rPr lang="en-US" dirty="0" err="1"/>
-              <a:t>standardnu</a:t>
-            </a:r>
-            <a:r>
-              <a:rPr lang="en-US" dirty="0"/>
-              <a:t> </a:t>
-            </a:r>
-            <a:r>
-              <a:rPr lang="en-US" dirty="0" err="1"/>
-              <a:t>distribuciju</a:t>
-            </a:r>
-            <a:r>
-              <a:rPr lang="en-US" dirty="0"/>
-              <a:t> bez alata </a:t>
+              <a:t>, </a:t>
+            </a:r>
+            <a:r>
+              <a:rPr lang="en-US" dirty="0" err="1"/>
+              <a:t>što</a:t>
+            </a:r>
+            <a:r>
+              <a:rPr lang="en-US" dirty="0"/>
+              <a:t> </a:t>
+            </a:r>
+            <a:r>
+              <a:rPr lang="en-US" dirty="0" err="1"/>
+              <a:t>znači</a:t>
+            </a:r>
+            <a:r>
+              <a:rPr lang="en-US" dirty="0"/>
+              <a:t> da </a:t>
+            </a:r>
+            <a:r>
+              <a:rPr lang="en-US" dirty="0" err="1"/>
+              <a:t>više</a:t>
+            </a:r>
+            <a:r>
+              <a:rPr lang="en-US" dirty="0"/>
+              <a:t> </a:t>
+            </a:r>
+            <a:r>
+              <a:rPr lang="en-US" dirty="0" err="1"/>
+              <a:t>nisu</a:t>
+            </a:r>
+            <a:r>
+              <a:rPr lang="en-US" dirty="0"/>
+              <a:t> </a:t>
+            </a:r>
+            <a:r>
+              <a:rPr lang="en-US" dirty="0" err="1"/>
+              <a:t>potrebni</a:t>
+            </a:r>
+            <a:r>
+              <a:rPr lang="en-US" dirty="0"/>
+              <a:t> </a:t>
+            </a:r>
+            <a:r>
+              <a:rPr lang="en-US" dirty="0" err="1"/>
+              <a:t>alati</a:t>
+            </a:r>
+            <a:r>
+              <a:rPr lang="en-US" dirty="0"/>
+              <a:t> </a:t>
             </a:r>
             <a:r>
               <a:rPr lang="en-US" dirty="0" err="1"/>
@@ -5328,6 +5360,820 @@
             </a:r>
             <a:r>
               <a:rPr lang="en-US" dirty="0"/>
+              <a:t> </a:t>
+            </a:r>
+            <a:r>
+              <a:rPr lang="en-US" dirty="0" err="1"/>
+              <a:t>niti</a:t>
+            </a:r>
+            <a:r>
+              <a:rPr lang="en-US" dirty="0"/>
+              <a:t> </a:t>
+            </a:r>
+            <a:r>
+              <a:rPr lang="en-US" dirty="0" err="1"/>
+              <a:t>ručno</a:t>
+            </a:r>
+            <a:r>
+              <a:rPr lang="en-US" dirty="0"/>
+              <a:t> </a:t>
+            </a:r>
+            <a:r>
+              <a:rPr lang="en-US" dirty="0" err="1"/>
+              <a:t>pisani</a:t>
+            </a:r>
+            <a:r>
+              <a:rPr lang="en-US" dirty="0"/>
+              <a:t> </a:t>
+            </a:r>
+            <a:r>
+              <a:rPr lang="en-US" dirty="0" err="1"/>
+              <a:t>trigeri</a:t>
+            </a:r>
+            <a:r>
+              <a:rPr lang="en-US" dirty="0"/>
+              <a:t>.</a:t>
+            </a:r>
+          </a:p>
+          <a:p>
+            <a:r>
+              <a:rPr lang="en-US" dirty="0"/>
+              <a:t>Ceo </a:t>
+            </a:r>
+            <a:r>
+              <a:rPr lang="en-US" dirty="0" err="1"/>
+              <a:t>proces</a:t>
+            </a:r>
+            <a:r>
+              <a:rPr lang="en-US" dirty="0"/>
+              <a:t> </a:t>
+            </a:r>
+            <a:r>
+              <a:rPr lang="en-US" dirty="0" err="1"/>
+              <a:t>funkcioniše</a:t>
+            </a:r>
+            <a:r>
+              <a:rPr lang="en-US" dirty="0"/>
+              <a:t> </a:t>
+            </a:r>
+            <a:r>
+              <a:rPr lang="en-US" dirty="0" err="1"/>
+              <a:t>kao</a:t>
+            </a:r>
+            <a:r>
+              <a:rPr lang="en-US" dirty="0"/>
+              <a:t> </a:t>
+            </a:r>
+            <a:r>
+              <a:rPr lang="en-US" dirty="0" err="1"/>
+              <a:t>lanac</a:t>
+            </a:r>
+            <a:r>
+              <a:rPr lang="en-US" dirty="0"/>
+              <a:t> od pet </a:t>
+            </a:r>
+            <a:r>
+              <a:rPr lang="en-US" dirty="0" err="1"/>
+              <a:t>koraka</a:t>
+            </a:r>
+            <a:r>
+              <a:rPr lang="en-US" dirty="0"/>
+              <a:t>. Kada </a:t>
+            </a:r>
+            <a:r>
+              <a:rPr lang="en-US" dirty="0" err="1"/>
+              <a:t>korisnik</a:t>
+            </a:r>
+            <a:r>
+              <a:rPr lang="en-US" dirty="0"/>
+              <a:t> </a:t>
+            </a:r>
+            <a:r>
+              <a:rPr lang="en-US" dirty="0" err="1"/>
+              <a:t>uradi</a:t>
+            </a:r>
+            <a:r>
+              <a:rPr lang="en-US" dirty="0"/>
+              <a:t> commit </a:t>
+            </a:r>
+            <a:r>
+              <a:rPr lang="en-US" dirty="0" err="1"/>
+              <a:t>na</a:t>
+            </a:r>
+            <a:r>
+              <a:rPr lang="en-US" dirty="0"/>
+              <a:t> master </a:t>
+            </a:r>
+            <a:r>
+              <a:rPr lang="en-US" dirty="0" err="1"/>
+              <a:t>bazi</a:t>
+            </a:r>
+            <a:r>
+              <a:rPr lang="en-US" dirty="0"/>
+              <a:t>, </a:t>
+            </a:r>
+            <a:r>
+              <a:rPr lang="en-US" dirty="0" err="1"/>
+              <a:t>promene</a:t>
+            </a:r>
+            <a:r>
+              <a:rPr lang="en-US" dirty="0"/>
+              <a:t> se ne </a:t>
+            </a:r>
+            <a:r>
+              <a:rPr lang="en-US" dirty="0" err="1"/>
+              <a:t>šalju</a:t>
+            </a:r>
+            <a:r>
+              <a:rPr lang="en-US" dirty="0"/>
+              <a:t> </a:t>
+            </a:r>
+            <a:r>
+              <a:rPr lang="en-US" dirty="0" err="1"/>
+              <a:t>odmah</a:t>
+            </a:r>
+            <a:r>
+              <a:rPr lang="en-US" dirty="0"/>
+              <a:t> </a:t>
+            </a:r>
+            <a:r>
+              <a:rPr lang="en-US" dirty="0" err="1"/>
+              <a:t>na</a:t>
+            </a:r>
+            <a:r>
+              <a:rPr lang="en-US" dirty="0"/>
+              <a:t> slave. </a:t>
+            </a:r>
+            <a:r>
+              <a:rPr lang="en-US" dirty="0" err="1"/>
+              <a:t>Umesto</a:t>
+            </a:r>
+            <a:r>
+              <a:rPr lang="en-US" dirty="0"/>
+              <a:t> toga, one se </a:t>
+            </a:r>
+            <a:r>
+              <a:rPr lang="en-US" dirty="0" err="1"/>
+              <a:t>prvo</a:t>
+            </a:r>
+            <a:r>
+              <a:rPr lang="en-US" dirty="0"/>
+              <a:t> </a:t>
+            </a:r>
+            <a:r>
+              <a:rPr lang="en-US" dirty="0" err="1"/>
+              <a:t>akumuliraju</a:t>
+            </a:r>
+            <a:r>
+              <a:rPr lang="en-US" dirty="0"/>
+              <a:t> u Journal </a:t>
+            </a:r>
+            <a:r>
+              <a:rPr lang="en-US" dirty="0" err="1"/>
+              <a:t>direktorijumu</a:t>
+            </a:r>
+            <a:r>
+              <a:rPr lang="en-US" dirty="0"/>
+              <a:t> — to je </a:t>
+            </a:r>
+            <a:r>
+              <a:rPr lang="en-US" dirty="0" err="1"/>
+              <a:t>kao</a:t>
+            </a:r>
+            <a:r>
+              <a:rPr lang="en-US" dirty="0"/>
+              <a:t> </a:t>
+            </a:r>
+            <a:r>
+              <a:rPr lang="en-US" dirty="0" err="1"/>
+              <a:t>radni</a:t>
+            </a:r>
+            <a:r>
+              <a:rPr lang="en-US" dirty="0"/>
+              <a:t> </a:t>
+            </a:r>
+            <a:r>
+              <a:rPr lang="en-US" dirty="0" err="1"/>
+              <a:t>sto</a:t>
+            </a:r>
+            <a:r>
+              <a:rPr lang="en-US" dirty="0"/>
+              <a:t> </a:t>
+            </a:r>
+            <a:r>
+              <a:rPr lang="en-US" dirty="0" err="1"/>
+              <a:t>gde</a:t>
+            </a:r>
+            <a:r>
+              <a:rPr lang="en-US" dirty="0"/>
+              <a:t> se </a:t>
+            </a:r>
+            <a:r>
+              <a:rPr lang="en-US" dirty="0" err="1"/>
+              <a:t>skupljaju</a:t>
+            </a:r>
+            <a:r>
+              <a:rPr lang="en-US" dirty="0"/>
+              <a:t> </a:t>
+            </a:r>
+            <a:r>
+              <a:rPr lang="en-US" dirty="0" err="1"/>
+              <a:t>sve</a:t>
+            </a:r>
+            <a:r>
+              <a:rPr lang="en-US" dirty="0"/>
+              <a:t> </a:t>
+            </a:r>
+            <a:r>
+              <a:rPr lang="en-US" dirty="0" err="1"/>
+              <a:t>beleške</a:t>
+            </a:r>
+            <a:r>
+              <a:rPr lang="en-US" dirty="0"/>
+              <a:t> </a:t>
+            </a:r>
+            <a:r>
+              <a:rPr lang="en-US" dirty="0" err="1"/>
+              <a:t>dok</a:t>
+            </a:r>
+            <a:r>
+              <a:rPr lang="en-US" dirty="0"/>
+              <a:t> se ne </a:t>
+            </a:r>
+            <a:r>
+              <a:rPr lang="en-US" dirty="0" err="1"/>
+              <a:t>napuni</a:t>
+            </a:r>
+            <a:r>
+              <a:rPr lang="en-US" dirty="0"/>
+              <a:t> buffer. Kada se buffer </a:t>
+            </a:r>
+            <a:r>
+              <a:rPr lang="en-US" dirty="0" err="1"/>
+              <a:t>napuni</a:t>
+            </a:r>
+            <a:r>
+              <a:rPr lang="en-US" dirty="0"/>
+              <a:t>, </a:t>
+            </a:r>
+            <a:r>
+              <a:rPr lang="en-US" dirty="0" err="1"/>
+              <a:t>ili</a:t>
+            </a:r>
+            <a:r>
+              <a:rPr lang="en-US" dirty="0"/>
+              <a:t> </a:t>
+            </a:r>
+            <a:r>
+              <a:rPr lang="en-US" dirty="0" err="1"/>
+              <a:t>kada</a:t>
+            </a:r>
+            <a:r>
+              <a:rPr lang="en-US" dirty="0"/>
+              <a:t> </a:t>
+            </a:r>
+            <a:r>
+              <a:rPr lang="en-US" dirty="0" err="1"/>
+              <a:t>istekne</a:t>
+            </a:r>
+            <a:r>
+              <a:rPr lang="en-US" dirty="0"/>
+              <a:t> </a:t>
+            </a:r>
+            <a:r>
+              <a:rPr lang="en-US" dirty="0" err="1"/>
+              <a:t>journal_archive_timeout</a:t>
+            </a:r>
+            <a:r>
+              <a:rPr lang="en-US" dirty="0"/>
+              <a:t>, segment se </a:t>
+            </a:r>
+            <a:r>
+              <a:rPr lang="en-US" dirty="0" err="1"/>
+              <a:t>ispisuje</a:t>
+            </a:r>
+            <a:r>
+              <a:rPr lang="en-US" dirty="0"/>
+              <a:t> </a:t>
+            </a:r>
+            <a:r>
+              <a:rPr lang="en-US" dirty="0" err="1"/>
+              <a:t>na</a:t>
+            </a:r>
+            <a:r>
+              <a:rPr lang="en-US" dirty="0"/>
+              <a:t> disk.</a:t>
+            </a:r>
+          </a:p>
+          <a:p>
+            <a:r>
+              <a:rPr lang="en-US" dirty="0" err="1"/>
+              <a:t>Popunjeni</a:t>
+            </a:r>
+            <a:r>
+              <a:rPr lang="en-US" dirty="0"/>
+              <a:t> segment se </a:t>
+            </a:r>
+            <a:r>
+              <a:rPr lang="en-US" dirty="0" err="1"/>
+              <a:t>zatim</a:t>
+            </a:r>
+            <a:r>
+              <a:rPr lang="en-US" dirty="0"/>
+              <a:t> </a:t>
+            </a:r>
+            <a:r>
+              <a:rPr lang="en-US" dirty="0" err="1"/>
+              <a:t>premešta</a:t>
+            </a:r>
+            <a:r>
+              <a:rPr lang="en-US" dirty="0"/>
+              <a:t> u Archive </a:t>
+            </a:r>
+            <a:r>
+              <a:rPr lang="en-US" dirty="0" err="1"/>
+              <a:t>direktorijum</a:t>
+            </a:r>
+            <a:r>
+              <a:rPr lang="en-US" dirty="0"/>
+              <a:t> — to je </a:t>
+            </a:r>
+            <a:r>
+              <a:rPr lang="en-US" dirty="0" err="1"/>
+              <a:t>fascikla</a:t>
+            </a:r>
+            <a:r>
+              <a:rPr lang="en-US" dirty="0"/>
+              <a:t> </a:t>
+            </a:r>
+            <a:r>
+              <a:rPr lang="en-US" dirty="0" err="1"/>
+              <a:t>sa</a:t>
+            </a:r>
+            <a:r>
+              <a:rPr lang="en-US" dirty="0"/>
+              <a:t> </a:t>
+            </a:r>
+            <a:r>
+              <a:rPr lang="en-US" dirty="0" err="1"/>
+              <a:t>gotovim</a:t>
+            </a:r>
+            <a:r>
+              <a:rPr lang="en-US" dirty="0"/>
+              <a:t> </a:t>
+            </a:r>
+            <a:r>
+              <a:rPr lang="en-US" dirty="0" err="1"/>
+              <a:t>beleškama</a:t>
+            </a:r>
+            <a:r>
+              <a:rPr lang="en-US" dirty="0"/>
+              <a:t>. </a:t>
+            </a:r>
+            <a:r>
+              <a:rPr lang="en-US" dirty="0" err="1"/>
+              <a:t>Replikacioni</a:t>
+            </a:r>
+            <a:r>
+              <a:rPr lang="en-US" dirty="0"/>
+              <a:t> agent, koji je </a:t>
+            </a:r>
+            <a:r>
+              <a:rPr lang="en-US" dirty="0" err="1"/>
+              <a:t>ugrađen</a:t>
+            </a:r>
+            <a:r>
+              <a:rPr lang="en-US" dirty="0"/>
+              <a:t> deo Firebird engine-a, </a:t>
+            </a:r>
+            <a:r>
+              <a:rPr lang="en-US" dirty="0" err="1"/>
+              <a:t>kontinuirano</a:t>
+            </a:r>
+            <a:r>
+              <a:rPr lang="en-US" dirty="0"/>
+              <a:t> </a:t>
+            </a:r>
+            <a:r>
+              <a:rPr lang="en-US" dirty="0" err="1"/>
+              <a:t>skenira</a:t>
+            </a:r>
+            <a:r>
+              <a:rPr lang="en-US" dirty="0"/>
+              <a:t> taj Archive folder. </a:t>
+            </a:r>
+            <a:r>
+              <a:rPr lang="en-US" dirty="0" err="1"/>
+              <a:t>Čim</a:t>
+            </a:r>
+            <a:r>
+              <a:rPr lang="en-US" dirty="0"/>
+              <a:t> </a:t>
+            </a:r>
+            <a:r>
+              <a:rPr lang="en-US" dirty="0" err="1"/>
+              <a:t>pronađe</a:t>
+            </a:r>
+            <a:r>
+              <a:rPr lang="en-US" dirty="0"/>
+              <a:t> novi segment, </a:t>
+            </a:r>
+            <a:r>
+              <a:rPr lang="en-US" dirty="0" err="1"/>
+              <a:t>preuzima</a:t>
+            </a:r>
+            <a:r>
+              <a:rPr lang="en-US" dirty="0"/>
+              <a:t> ga </a:t>
+            </a:r>
+            <a:r>
+              <a:rPr lang="en-US" dirty="0" err="1"/>
+              <a:t>i</a:t>
+            </a:r>
+            <a:r>
+              <a:rPr lang="en-US" dirty="0"/>
+              <a:t> </a:t>
+            </a:r>
+            <a:r>
+              <a:rPr lang="en-US" dirty="0" err="1"/>
+              <a:t>primenjuje</a:t>
+            </a:r>
+            <a:r>
+              <a:rPr lang="en-US" dirty="0"/>
+              <a:t> </a:t>
+            </a:r>
+            <a:r>
+              <a:rPr lang="en-US" dirty="0" err="1"/>
+              <a:t>na</a:t>
+            </a:r>
+            <a:r>
+              <a:rPr lang="en-US" dirty="0"/>
+              <a:t> slave </a:t>
+            </a:r>
+            <a:r>
+              <a:rPr lang="en-US" dirty="0" err="1"/>
+              <a:t>bazu</a:t>
+            </a:r>
+            <a:r>
+              <a:rPr lang="en-US" dirty="0"/>
+              <a:t> </a:t>
+            </a:r>
+            <a:r>
+              <a:rPr lang="en-US" dirty="0" err="1"/>
+              <a:t>kroz</a:t>
+            </a:r>
+            <a:r>
+              <a:rPr lang="en-US" dirty="0"/>
+              <a:t> SQL replay — </a:t>
+            </a:r>
+            <a:r>
+              <a:rPr lang="en-US" dirty="0" err="1"/>
+              <a:t>reprodukuje</a:t>
+            </a:r>
+            <a:r>
+              <a:rPr lang="en-US" dirty="0"/>
+              <a:t> </a:t>
+            </a:r>
+            <a:r>
+              <a:rPr lang="en-US" dirty="0" err="1"/>
+              <a:t>svaku</a:t>
+            </a:r>
+            <a:r>
+              <a:rPr lang="en-US" dirty="0"/>
+              <a:t> </a:t>
+            </a:r>
+            <a:r>
+              <a:rPr lang="en-US" dirty="0" err="1"/>
+              <a:t>promenu</a:t>
+            </a:r>
+            <a:r>
+              <a:rPr lang="en-US" dirty="0"/>
+              <a:t> </a:t>
+            </a:r>
+            <a:r>
+              <a:rPr lang="en-US" dirty="0" err="1"/>
+              <a:t>redom</a:t>
+            </a:r>
+            <a:r>
+              <a:rPr lang="en-US" dirty="0"/>
+              <a:t>.</a:t>
+            </a:r>
+          </a:p>
+          <a:p>
+            <a:r>
+              <a:rPr lang="en-US" dirty="0"/>
+              <a:t>Slave </a:t>
+            </a:r>
+            <a:r>
+              <a:rPr lang="en-US" dirty="0" err="1"/>
+              <a:t>baza</a:t>
+            </a:r>
+            <a:r>
+              <a:rPr lang="en-US" dirty="0"/>
+              <a:t> </a:t>
+            </a:r>
+            <a:r>
+              <a:rPr lang="en-US" dirty="0" err="1"/>
+              <a:t>pri</a:t>
+            </a:r>
+            <a:r>
+              <a:rPr lang="en-US" dirty="0"/>
+              <a:t> tome </a:t>
+            </a:r>
+            <a:r>
+              <a:rPr lang="en-US" dirty="0" err="1"/>
+              <a:t>prihvata</a:t>
+            </a:r>
+            <a:r>
+              <a:rPr lang="en-US" dirty="0"/>
+              <a:t> </a:t>
+            </a:r>
+            <a:r>
+              <a:rPr lang="en-US" dirty="0" err="1"/>
+              <a:t>segmente</a:t>
+            </a:r>
+            <a:r>
+              <a:rPr lang="en-US" dirty="0"/>
+              <a:t> </a:t>
+            </a:r>
+            <a:r>
+              <a:rPr lang="en-US" dirty="0" err="1"/>
+              <a:t>isključivo</a:t>
+            </a:r>
+            <a:r>
+              <a:rPr lang="en-US" dirty="0"/>
+              <a:t> od </a:t>
+            </a:r>
+            <a:r>
+              <a:rPr lang="en-US" dirty="0" err="1"/>
+              <a:t>mastera</a:t>
+            </a:r>
+            <a:r>
+              <a:rPr lang="en-US" dirty="0"/>
+              <a:t> </a:t>
+            </a:r>
+            <a:r>
+              <a:rPr lang="en-US" dirty="0" err="1"/>
+              <a:t>sa</a:t>
+            </a:r>
+            <a:r>
+              <a:rPr lang="en-US" dirty="0"/>
+              <a:t> </a:t>
+            </a:r>
+            <a:r>
+              <a:rPr lang="en-US" dirty="0" err="1"/>
+              <a:t>tačno</a:t>
+            </a:r>
+            <a:r>
+              <a:rPr lang="en-US" dirty="0"/>
+              <a:t> </a:t>
+            </a:r>
+            <a:r>
+              <a:rPr lang="en-US" dirty="0" err="1"/>
+              <a:t>određenim</a:t>
+            </a:r>
+            <a:r>
+              <a:rPr lang="en-US" dirty="0"/>
+              <a:t> Source GUID-</a:t>
+            </a:r>
+            <a:r>
+              <a:rPr lang="en-US" dirty="0" err="1"/>
+              <a:t>om.</a:t>
+            </a:r>
+            <a:r>
+              <a:rPr lang="en-US" dirty="0"/>
+              <a:t> Ovo je </a:t>
+            </a:r>
+            <a:r>
+              <a:rPr lang="en-US" dirty="0" err="1"/>
+              <a:t>sigurnosni</a:t>
+            </a:r>
+            <a:r>
+              <a:rPr lang="en-US" dirty="0"/>
+              <a:t> </a:t>
+            </a:r>
+            <a:r>
+              <a:rPr lang="en-US" dirty="0" err="1"/>
+              <a:t>mehanizam</a:t>
+            </a:r>
+            <a:r>
+              <a:rPr lang="en-US" dirty="0"/>
+              <a:t> koji </a:t>
+            </a:r>
+            <a:r>
+              <a:rPr lang="en-US" dirty="0" err="1"/>
+              <a:t>sprečava</a:t>
+            </a:r>
+            <a:r>
+              <a:rPr lang="en-US" dirty="0"/>
+              <a:t> da slave </a:t>
+            </a:r>
+            <a:r>
+              <a:rPr lang="en-US" dirty="0" err="1"/>
+              <a:t>slučajno</a:t>
+            </a:r>
+            <a:r>
+              <a:rPr lang="en-US" dirty="0"/>
+              <a:t> </a:t>
+            </a:r>
+            <a:r>
+              <a:rPr lang="en-US" dirty="0" err="1"/>
+              <a:t>primi</a:t>
+            </a:r>
+            <a:r>
+              <a:rPr lang="en-US" dirty="0"/>
+              <a:t> </a:t>
+            </a:r>
+            <a:r>
+              <a:rPr lang="en-US" dirty="0" err="1"/>
+              <a:t>podatke</a:t>
+            </a:r>
+            <a:r>
+              <a:rPr lang="en-US" dirty="0"/>
+              <a:t> </a:t>
+            </a:r>
+            <a:r>
+              <a:rPr lang="en-US" dirty="0" err="1"/>
+              <a:t>sa</a:t>
+            </a:r>
+            <a:r>
+              <a:rPr lang="en-US" dirty="0"/>
+              <a:t> </a:t>
+            </a:r>
+            <a:r>
+              <a:rPr lang="en-US" dirty="0" err="1"/>
+              <a:t>pogrešnog</a:t>
+            </a:r>
+            <a:r>
+              <a:rPr lang="en-US" dirty="0"/>
+              <a:t> </a:t>
+            </a:r>
+            <a:r>
+              <a:rPr lang="en-US" dirty="0" err="1"/>
+              <a:t>servera</a:t>
+            </a:r>
+            <a:r>
+              <a:rPr lang="en-US" dirty="0"/>
+              <a:t>. </a:t>
+            </a:r>
+            <a:r>
+              <a:rPr lang="en-US" dirty="0" err="1"/>
+              <a:t>Ključna</a:t>
+            </a:r>
+            <a:r>
+              <a:rPr lang="en-US" dirty="0"/>
+              <a:t> </a:t>
+            </a:r>
+            <a:r>
+              <a:rPr lang="en-US" dirty="0" err="1"/>
+              <a:t>prednost</a:t>
+            </a:r>
+            <a:r>
+              <a:rPr lang="en-US" dirty="0"/>
+              <a:t> </a:t>
+            </a:r>
+            <a:r>
+              <a:rPr lang="en-US" dirty="0" err="1"/>
+              <a:t>ovog</a:t>
+            </a:r>
+            <a:r>
+              <a:rPr lang="en-US" dirty="0"/>
+              <a:t> </a:t>
+            </a:r>
+            <a:r>
+              <a:rPr lang="en-US" dirty="0" err="1"/>
+              <a:t>sistema</a:t>
+            </a:r>
+            <a:r>
+              <a:rPr lang="en-US" dirty="0"/>
+              <a:t> je </a:t>
+            </a:r>
+            <a:r>
+              <a:rPr lang="en-US" dirty="0" err="1"/>
+              <a:t>što</a:t>
+            </a:r>
+            <a:r>
+              <a:rPr lang="en-US" dirty="0"/>
+              <a:t> </a:t>
+            </a:r>
+            <a:r>
+              <a:rPr lang="en-US" dirty="0" err="1"/>
+              <a:t>journal_archive_timeout</a:t>
+            </a:r>
+            <a:r>
+              <a:rPr lang="en-US" dirty="0"/>
+              <a:t> </a:t>
+            </a:r>
+            <a:r>
+              <a:rPr lang="en-US" dirty="0" err="1"/>
+              <a:t>parametar</a:t>
+            </a:r>
+            <a:r>
+              <a:rPr lang="en-US" dirty="0"/>
+              <a:t> </a:t>
+            </a:r>
+            <a:r>
+              <a:rPr lang="en-US" dirty="0" err="1"/>
+              <a:t>garantuje</a:t>
+            </a:r>
+            <a:r>
+              <a:rPr lang="en-US" dirty="0"/>
+              <a:t> da </a:t>
+            </a:r>
+            <a:r>
+              <a:rPr lang="en-US" dirty="0" err="1"/>
+              <a:t>čak</a:t>
+            </a:r>
+            <a:r>
+              <a:rPr lang="en-US" dirty="0"/>
+              <a:t> </a:t>
+            </a:r>
+            <a:r>
+              <a:rPr lang="en-US" dirty="0" err="1"/>
+              <a:t>i</a:t>
+            </a:r>
+            <a:r>
+              <a:rPr lang="en-US" dirty="0"/>
+              <a:t> </a:t>
+            </a:r>
+            <a:r>
+              <a:rPr lang="en-US" dirty="0" err="1"/>
+              <a:t>ako</a:t>
+            </a:r>
+            <a:r>
+              <a:rPr lang="en-US" dirty="0"/>
+              <a:t> buffer </a:t>
+            </a:r>
+            <a:r>
+              <a:rPr lang="en-US" dirty="0" err="1"/>
+              <a:t>nije</a:t>
+            </a:r>
+            <a:r>
+              <a:rPr lang="en-US" dirty="0"/>
+              <a:t> pun, </a:t>
+            </a:r>
+            <a:r>
+              <a:rPr lang="en-US" dirty="0" err="1"/>
+              <a:t>podaci</a:t>
+            </a:r>
+            <a:r>
+              <a:rPr lang="en-US" dirty="0"/>
+              <a:t> </a:t>
+            </a:r>
+            <a:r>
+              <a:rPr lang="en-US" dirty="0" err="1"/>
+              <a:t>će</a:t>
+            </a:r>
+            <a:r>
+              <a:rPr lang="en-US" dirty="0"/>
+              <a:t> </a:t>
+            </a:r>
+            <a:r>
+              <a:rPr lang="en-US" dirty="0" err="1"/>
+              <a:t>biti</a:t>
+            </a:r>
+            <a:r>
+              <a:rPr lang="en-US" dirty="0"/>
+              <a:t> </a:t>
+            </a:r>
+            <a:r>
+              <a:rPr lang="en-US" dirty="0" err="1"/>
+              <a:t>poslati</a:t>
+            </a:r>
+            <a:r>
+              <a:rPr lang="en-US" dirty="0"/>
+              <a:t> </a:t>
+            </a:r>
+            <a:r>
+              <a:rPr lang="en-US" dirty="0" err="1"/>
+              <a:t>nakon</a:t>
+            </a:r>
+            <a:r>
+              <a:rPr lang="en-US" dirty="0"/>
+              <a:t> </a:t>
+            </a:r>
+            <a:r>
+              <a:rPr lang="en-US" dirty="0" err="1"/>
+              <a:t>definisanog</a:t>
+            </a:r>
+            <a:r>
+              <a:rPr lang="en-US" dirty="0"/>
+              <a:t> </a:t>
+            </a:r>
+            <a:r>
+              <a:rPr lang="en-US" dirty="0" err="1"/>
+              <a:t>broja</a:t>
+            </a:r>
+            <a:r>
+              <a:rPr lang="en-US" dirty="0"/>
+              <a:t> </a:t>
+            </a:r>
+            <a:r>
+              <a:rPr lang="en-US" dirty="0" err="1"/>
+              <a:t>sekundi</a:t>
+            </a:r>
+            <a:r>
+              <a:rPr lang="en-US" dirty="0"/>
               <a:t> — </a:t>
             </a:r>
             <a:r>
@@ -5340,282 +6186,23 @@
             </a:r>
             <a:r>
               <a:rPr lang="en-US" dirty="0" err="1"/>
-              <a:t>predstavlja</a:t>
-            </a:r>
-            <a:r>
-              <a:rPr lang="en-US" dirty="0"/>
-              <a:t> </a:t>
-            </a:r>
-            <a:r>
-              <a:rPr lang="en-US" dirty="0" err="1"/>
-              <a:t>revolucionarnu</a:t>
-            </a:r>
-            <a:r>
-              <a:rPr lang="en-US" dirty="0"/>
-              <a:t> </a:t>
-            </a:r>
-            <a:r>
-              <a:rPr lang="en-US" dirty="0" err="1"/>
-              <a:t>promenu</a:t>
-            </a:r>
-            <a:r>
-              <a:rPr lang="en-US" dirty="0"/>
-              <a:t> </a:t>
-            </a:r>
-            <a:r>
-              <a:rPr lang="en-US" dirty="0" err="1"/>
-              <a:t>jer</a:t>
-            </a:r>
-            <a:r>
-              <a:rPr lang="en-US" dirty="0"/>
-              <a:t> je </a:t>
-            </a:r>
-            <a:r>
-              <a:rPr lang="en-US" dirty="0" err="1"/>
-              <a:t>replikacija</a:t>
-            </a:r>
-            <a:r>
-              <a:rPr lang="en-US" dirty="0"/>
-              <a:t> </a:t>
-            </a:r>
-            <a:r>
-              <a:rPr lang="en-US" dirty="0" err="1"/>
-              <a:t>sada</a:t>
-            </a:r>
-            <a:r>
-              <a:rPr lang="en-US" dirty="0"/>
-              <a:t> </a:t>
-            </a:r>
-            <a:r>
-              <a:rPr lang="en-US" dirty="0" err="1"/>
-              <a:t>integralni</a:t>
-            </a:r>
-            <a:r>
-              <a:rPr lang="en-US" dirty="0"/>
-              <a:t> deo </a:t>
-            </a:r>
-            <a:r>
-              <a:rPr lang="en-US" dirty="0" err="1"/>
-              <a:t>samog</a:t>
-            </a:r>
-            <a:r>
-              <a:rPr lang="en-US" dirty="0"/>
-              <a:t> engine-a.</a:t>
-            </a:r>
-            <a:r>
-              <a:rPr lang="sr-Latn-RS" dirty="0"/>
-              <a:t> </a:t>
-            </a:r>
-            <a:endParaRPr lang="en-US" dirty="0"/>
-          </a:p>
-          <a:p>
-            <a:r>
-              <a:rPr lang="en-US" dirty="0" err="1"/>
-              <a:t>Proces</a:t>
-            </a:r>
-            <a:r>
-              <a:rPr lang="en-US" dirty="0"/>
-              <a:t> </a:t>
-            </a:r>
-            <a:r>
-              <a:rPr lang="en-US" dirty="0" err="1"/>
-              <a:t>funkcioniše</a:t>
-            </a:r>
-            <a:r>
-              <a:rPr lang="en-US" dirty="0"/>
-              <a:t> </a:t>
-            </a:r>
-            <a:r>
-              <a:rPr lang="en-US" dirty="0" err="1"/>
-              <a:t>kroz</a:t>
-            </a:r>
-            <a:r>
-              <a:rPr lang="en-US" dirty="0"/>
-              <a:t> </a:t>
-            </a:r>
-            <a:r>
-              <a:rPr lang="en-US" dirty="0" err="1"/>
-              <a:t>četiri</a:t>
-            </a:r>
-            <a:r>
-              <a:rPr lang="en-US" dirty="0"/>
-              <a:t> </a:t>
-            </a:r>
-            <a:r>
-              <a:rPr lang="en-US" dirty="0" err="1"/>
-              <a:t>koraka</a:t>
-            </a:r>
-            <a:r>
-              <a:rPr lang="en-US" dirty="0"/>
-              <a:t> — </a:t>
-            </a:r>
-            <a:r>
-              <a:rPr lang="en-US" dirty="0" err="1"/>
-              <a:t>svaki</a:t>
-            </a:r>
-            <a:r>
-              <a:rPr lang="en-US" dirty="0"/>
-              <a:t> COMMIT </a:t>
-            </a:r>
-            <a:r>
-              <a:rPr lang="en-US" dirty="0" err="1"/>
-              <a:t>na</a:t>
-            </a:r>
-            <a:r>
-              <a:rPr lang="en-US" dirty="0"/>
-              <a:t> master </a:t>
-            </a:r>
-            <a:r>
-              <a:rPr lang="en-US" dirty="0" err="1"/>
-              <a:t>bazi</a:t>
-            </a:r>
-            <a:r>
-              <a:rPr lang="en-US" dirty="0"/>
-              <a:t> </a:t>
-            </a:r>
-            <a:r>
-              <a:rPr lang="en-US" dirty="0" err="1"/>
-              <a:t>akumulira</a:t>
-            </a:r>
-            <a:r>
-              <a:rPr lang="en-US" dirty="0"/>
-              <a:t> </a:t>
-            </a:r>
-            <a:r>
-              <a:rPr lang="en-US" dirty="0" err="1"/>
-              <a:t>promene</a:t>
-            </a:r>
-            <a:r>
-              <a:rPr lang="en-US" dirty="0"/>
-              <a:t> u </a:t>
-            </a:r>
-            <a:r>
-              <a:rPr lang="en-US" b="1" dirty="0"/>
-              <a:t>Journal Segment</a:t>
-            </a:r>
-            <a:r>
-              <a:rPr lang="en-US" dirty="0"/>
-              <a:t> </a:t>
-            </a:r>
-            <a:r>
-              <a:rPr lang="en-US" dirty="0" err="1"/>
-              <a:t>memorijskom</a:t>
-            </a:r>
-            <a:r>
-              <a:rPr lang="en-US" dirty="0"/>
-              <a:t> </a:t>
-            </a:r>
-            <a:r>
-              <a:rPr lang="en-US" dirty="0" err="1"/>
-              <a:t>baferu</a:t>
-            </a:r>
-            <a:r>
-              <a:rPr lang="en-US" dirty="0"/>
-              <a:t>, </a:t>
-            </a:r>
-            <a:r>
-              <a:rPr lang="en-US" dirty="0" err="1"/>
-              <a:t>kada</a:t>
-            </a:r>
-            <a:r>
-              <a:rPr lang="en-US" dirty="0"/>
-              <a:t> se </a:t>
-            </a:r>
-            <a:r>
-              <a:rPr lang="en-US" dirty="0" err="1"/>
-              <a:t>napuni</a:t>
-            </a:r>
-            <a:r>
-              <a:rPr lang="en-US" dirty="0"/>
-              <a:t> </a:t>
-            </a:r>
-            <a:r>
-              <a:rPr lang="en-US" dirty="0" err="1"/>
-              <a:t>vrši</a:t>
-            </a:r>
-            <a:r>
-              <a:rPr lang="en-US" dirty="0"/>
-              <a:t> se flush </a:t>
-            </a:r>
-            <a:r>
-              <a:rPr lang="en-US" dirty="0" err="1"/>
-              <a:t>na</a:t>
-            </a:r>
-            <a:r>
-              <a:rPr lang="en-US" dirty="0"/>
-              <a:t> disk </a:t>
-            </a:r>
-            <a:r>
-              <a:rPr lang="en-US" dirty="0" err="1"/>
-              <a:t>kao</a:t>
-            </a:r>
-            <a:r>
-              <a:rPr lang="en-US" dirty="0"/>
-              <a:t> </a:t>
-            </a:r>
-            <a:r>
-              <a:rPr lang="en-US" dirty="0" err="1"/>
-              <a:t>binarni</a:t>
-            </a:r>
-            <a:r>
-              <a:rPr lang="en-US" dirty="0"/>
-              <a:t> segment, </a:t>
-            </a:r>
-            <a:r>
-              <a:rPr lang="en-US" b="1" dirty="0" err="1"/>
-              <a:t>Replikacioni</a:t>
-            </a:r>
-            <a:r>
-              <a:rPr lang="en-US" b="1" dirty="0"/>
-              <a:t> Agent</a:t>
-            </a:r>
-            <a:r>
-              <a:rPr lang="en-US" dirty="0"/>
-              <a:t> </a:t>
-            </a:r>
-            <a:r>
-              <a:rPr lang="en-US" dirty="0" err="1"/>
-              <a:t>kontinuirano</a:t>
-            </a:r>
-            <a:r>
-              <a:rPr lang="en-US" dirty="0"/>
-              <a:t> </a:t>
-            </a:r>
-            <a:r>
-              <a:rPr lang="en-US" dirty="0" err="1"/>
-              <a:t>skenira</a:t>
-            </a:r>
-            <a:r>
-              <a:rPr lang="en-US" dirty="0"/>
-              <a:t> archive directory </a:t>
-            </a:r>
-            <a:r>
-              <a:rPr lang="en-US" dirty="0" err="1"/>
-              <a:t>i</a:t>
-            </a:r>
-            <a:r>
-              <a:rPr lang="en-US" dirty="0"/>
-              <a:t> </a:t>
-            </a:r>
-            <a:r>
-              <a:rPr lang="en-US" dirty="0" err="1"/>
-              <a:t>primenjuje</a:t>
-            </a:r>
-            <a:r>
-              <a:rPr lang="en-US" dirty="0"/>
-              <a:t> </a:t>
-            </a:r>
-            <a:r>
-              <a:rPr lang="en-US" dirty="0" err="1"/>
-              <a:t>segmente</a:t>
-            </a:r>
-            <a:r>
-              <a:rPr lang="en-US" dirty="0"/>
-              <a:t> </a:t>
-            </a:r>
-            <a:r>
-              <a:rPr lang="en-US" dirty="0" err="1"/>
-              <a:t>na</a:t>
+              <a:t>direktno</a:t>
+            </a:r>
+            <a:r>
+              <a:rPr lang="en-US" dirty="0"/>
+              <a:t> </a:t>
+            </a:r>
+            <a:r>
+              <a:rPr lang="en-US" dirty="0" err="1"/>
+              <a:t>kontroliše</a:t>
+            </a:r>
+            <a:r>
+              <a:rPr lang="en-US" dirty="0"/>
+              <a:t> </a:t>
+            </a:r>
+            <a:r>
+              <a:rPr lang="en-US" dirty="0" err="1"/>
+              <a:t>koliko</a:t>
             </a:r>
             <a:r>
               <a:rPr lang="en-US" dirty="0"/>
@@ -5623,561 +6210,28 @@
             </a:r>
             <a:r>
               <a:rPr lang="en-US" dirty="0" err="1"/>
-              <a:t>bazu</a:t>
-            </a:r>
-            <a:r>
-              <a:rPr lang="en-US" dirty="0"/>
-              <a:t> </a:t>
-            </a:r>
-            <a:r>
-              <a:rPr lang="en-US" dirty="0" err="1"/>
-              <a:t>kroz</a:t>
-            </a:r>
-            <a:r>
-              <a:rPr lang="en-US" dirty="0"/>
-              <a:t> SQL replay.</a:t>
-            </a:r>
-            <a:r>
-              <a:rPr lang="sr-Latn-RS" dirty="0"/>
-              <a:t> </a:t>
-            </a:r>
-            <a:r>
-              <a:rPr lang="en-US" b="1" dirty="0"/>
-              <a:t>Journal Segment</a:t>
-            </a:r>
-            <a:r>
-              <a:rPr lang="en-US" dirty="0"/>
-              <a:t> je </a:t>
-            </a:r>
-            <a:r>
-              <a:rPr lang="en-US" dirty="0" err="1"/>
-              <a:t>privremeni</a:t>
-            </a:r>
-            <a:r>
-              <a:rPr lang="en-US" dirty="0"/>
-              <a:t> </a:t>
-            </a:r>
-            <a:r>
-              <a:rPr lang="en-US" dirty="0" err="1"/>
-              <a:t>memorijski</a:t>
-            </a:r>
-            <a:r>
-              <a:rPr lang="en-US" dirty="0"/>
-              <a:t> </a:t>
-            </a:r>
-            <a:r>
-              <a:rPr lang="en-US" dirty="0" err="1"/>
-              <a:t>bafer</a:t>
-            </a:r>
-            <a:r>
-              <a:rPr lang="en-US" dirty="0"/>
-              <a:t> </a:t>
-            </a:r>
-            <a:r>
-              <a:rPr lang="en-US" dirty="0" err="1"/>
-              <a:t>veličine</a:t>
-            </a:r>
-            <a:r>
-              <a:rPr lang="en-US" dirty="0"/>
-              <a:t> </a:t>
-            </a:r>
-            <a:r>
-              <a:rPr lang="en-US" dirty="0" err="1"/>
-              <a:t>BufferPoolSize</a:t>
-            </a:r>
-            <a:r>
-              <a:rPr lang="en-US" dirty="0"/>
-              <a:t> — </a:t>
-            </a:r>
-            <a:r>
-              <a:rPr lang="en-US" dirty="0" err="1"/>
-              <a:t>promene</a:t>
-            </a:r>
-            <a:r>
-              <a:rPr lang="en-US" dirty="0"/>
-              <a:t> se </a:t>
-            </a:r>
-            <a:r>
-              <a:rPr lang="en-US" dirty="0" err="1"/>
-              <a:t>akumuliraju</a:t>
-            </a:r>
-            <a:r>
-              <a:rPr lang="en-US" dirty="0"/>
-              <a:t> u </a:t>
-            </a:r>
-            <a:r>
-              <a:rPr lang="en-US" dirty="0" err="1"/>
-              <a:t>memoriji</a:t>
-            </a:r>
-            <a:r>
-              <a:rPr lang="en-US" dirty="0"/>
-              <a:t> </a:t>
-            </a:r>
-            <a:r>
-              <a:rPr lang="en-US" dirty="0" err="1"/>
-              <a:t>radi</a:t>
-            </a:r>
-            <a:r>
-              <a:rPr lang="en-US" dirty="0"/>
-              <a:t> </a:t>
-            </a:r>
-            <a:r>
-              <a:rPr lang="en-US" dirty="0" err="1"/>
-              <a:t>performansi</a:t>
-            </a:r>
-            <a:r>
-              <a:rPr lang="en-US" dirty="0"/>
-              <a:t> </a:t>
-            </a:r>
-            <a:r>
-              <a:rPr lang="en-US" dirty="0" err="1"/>
-              <a:t>i</a:t>
-            </a:r>
-            <a:r>
-              <a:rPr lang="en-US" dirty="0"/>
-              <a:t> </a:t>
-            </a:r>
-            <a:r>
-              <a:rPr lang="en-US" dirty="0" err="1"/>
-              <a:t>tek</a:t>
-            </a:r>
-            <a:r>
-              <a:rPr lang="en-US" dirty="0"/>
-              <a:t> </a:t>
-            </a:r>
-            <a:r>
-              <a:rPr lang="en-US" dirty="0" err="1"/>
-              <a:t>kada</a:t>
-            </a:r>
-            <a:r>
-              <a:rPr lang="en-US" dirty="0"/>
-              <a:t> se </a:t>
-            </a:r>
-            <a:r>
-              <a:rPr lang="en-US" dirty="0" err="1"/>
-              <a:t>napune</a:t>
-            </a:r>
-            <a:r>
-              <a:rPr lang="en-US" dirty="0"/>
-              <a:t> </a:t>
-            </a:r>
-            <a:r>
-              <a:rPr lang="en-US" dirty="0" err="1"/>
-              <a:t>upisuju</a:t>
-            </a:r>
-            <a:r>
-              <a:rPr lang="en-US" dirty="0"/>
-              <a:t> </a:t>
-            </a:r>
-            <a:r>
-              <a:rPr lang="en-US" dirty="0" err="1"/>
-              <a:t>na</a:t>
-            </a:r>
-            <a:r>
-              <a:rPr lang="en-US" dirty="0"/>
-              <a:t> disk </a:t>
-            </a:r>
-            <a:r>
-              <a:rPr lang="en-US" dirty="0" err="1"/>
-              <a:t>kao</a:t>
-            </a:r>
-            <a:r>
-              <a:rPr lang="en-US" dirty="0"/>
-              <a:t> </a:t>
-            </a:r>
-            <a:r>
-              <a:rPr lang="en-US" dirty="0" err="1"/>
-              <a:t>trajni</a:t>
-            </a:r>
-            <a:r>
-              <a:rPr lang="en-US" dirty="0"/>
-              <a:t> </a:t>
-            </a:r>
-            <a:r>
-              <a:rPr lang="en-US" dirty="0" err="1"/>
-              <a:t>arhivski</a:t>
-            </a:r>
-            <a:r>
-              <a:rPr lang="en-US" dirty="0"/>
-              <a:t> segment.</a:t>
-            </a:r>
-            <a:r>
-              <a:rPr lang="sr-Latn-RS" dirty="0"/>
-              <a:t> </a:t>
-            </a:r>
-            <a:r>
-              <a:rPr lang="en-US" b="1" dirty="0"/>
-              <a:t>Source GUID</a:t>
-            </a:r>
-            <a:r>
-              <a:rPr lang="en-US" dirty="0"/>
-              <a:t> je </a:t>
-            </a:r>
-            <a:r>
-              <a:rPr lang="en-US" dirty="0" err="1"/>
-              <a:t>sigurnosni</a:t>
-            </a:r>
-            <a:r>
-              <a:rPr lang="en-US" dirty="0"/>
-              <a:t> </a:t>
-            </a:r>
-            <a:r>
-              <a:rPr lang="en-US" dirty="0" err="1"/>
-              <a:t>mehanizam</a:t>
-            </a:r>
-            <a:r>
-              <a:rPr lang="en-US" dirty="0"/>
-              <a:t> koji </a:t>
-            </a:r>
-            <a:r>
-              <a:rPr lang="en-US" dirty="0" err="1"/>
-              <a:t>garantuje</a:t>
-            </a:r>
-            <a:r>
-              <a:rPr lang="en-US" dirty="0"/>
-              <a:t> da slave </a:t>
-            </a:r>
-            <a:r>
-              <a:rPr lang="en-US" dirty="0" err="1"/>
-              <a:t>baza</a:t>
-            </a:r>
-            <a:r>
-              <a:rPr lang="en-US" dirty="0"/>
-              <a:t> </a:t>
-            </a:r>
-            <a:r>
-              <a:rPr lang="en-US" dirty="0" err="1"/>
-              <a:t>prihvata</a:t>
-            </a:r>
-            <a:r>
-              <a:rPr lang="en-US" dirty="0"/>
-              <a:t> </a:t>
-            </a:r>
-            <a:r>
-              <a:rPr lang="en-US" dirty="0" err="1"/>
-              <a:t>logove</a:t>
-            </a:r>
-            <a:r>
-              <a:rPr lang="en-US" dirty="0"/>
-              <a:t> </a:t>
-            </a:r>
-            <a:r>
-              <a:rPr lang="en-US" dirty="0" err="1"/>
-              <a:t>isključivo</a:t>
-            </a:r>
-            <a:r>
-              <a:rPr lang="en-US" dirty="0"/>
-              <a:t> od </a:t>
-            </a:r>
-            <a:r>
-              <a:rPr lang="en-US" dirty="0" err="1"/>
-              <a:t>svog</a:t>
-            </a:r>
-            <a:r>
-              <a:rPr lang="en-US" dirty="0"/>
-              <a:t> </a:t>
-            </a:r>
-            <a:r>
-              <a:rPr lang="en-US" dirty="0" err="1"/>
-              <a:t>mastera</a:t>
-            </a:r>
-            <a:r>
-              <a:rPr lang="en-US" dirty="0"/>
-              <a:t> </a:t>
-            </a:r>
-            <a:r>
-              <a:rPr lang="en-US" dirty="0" err="1"/>
-              <a:t>sa</a:t>
-            </a:r>
-            <a:r>
-              <a:rPr lang="en-US" dirty="0"/>
-              <a:t> </a:t>
-            </a:r>
-            <a:r>
-              <a:rPr lang="en-US" dirty="0" err="1"/>
-              <a:t>tačno</a:t>
-            </a:r>
-            <a:r>
-              <a:rPr lang="en-US" dirty="0"/>
-              <a:t> </a:t>
-            </a:r>
-            <a:r>
-              <a:rPr lang="en-US" dirty="0" err="1"/>
-              <a:t>tim</a:t>
-            </a:r>
-            <a:r>
-              <a:rPr lang="en-US" dirty="0"/>
-              <a:t> GUID-om — </a:t>
-            </a:r>
-            <a:r>
-              <a:rPr lang="en-US" dirty="0" err="1"/>
-              <a:t>čime</a:t>
-            </a:r>
-            <a:r>
-              <a:rPr lang="en-US" dirty="0"/>
-              <a:t> se </a:t>
-            </a:r>
-            <a:r>
-              <a:rPr lang="en-US" dirty="0" err="1"/>
-              <a:t>sprečava</a:t>
-            </a:r>
-            <a:r>
-              <a:rPr lang="en-US" dirty="0"/>
-              <a:t> </a:t>
-            </a:r>
-            <a:r>
-              <a:rPr lang="en-US" dirty="0" err="1"/>
-              <a:t>nenamerno</a:t>
-            </a:r>
-            <a:r>
-              <a:rPr lang="en-US" dirty="0"/>
-              <a:t> </a:t>
-            </a:r>
-            <a:r>
-              <a:rPr lang="en-US" dirty="0" err="1"/>
-              <a:t>mešanje</a:t>
-            </a:r>
-            <a:r>
-              <a:rPr lang="en-US" dirty="0"/>
-              <a:t> </a:t>
-            </a:r>
-            <a:r>
-              <a:rPr lang="en-US" dirty="0" err="1"/>
-              <a:t>podataka</a:t>
-            </a:r>
-            <a:r>
-              <a:rPr lang="en-US" dirty="0"/>
-              <a:t> </a:t>
-            </a:r>
-            <a:r>
-              <a:rPr lang="en-US" dirty="0" err="1"/>
-              <a:t>sa</a:t>
-            </a:r>
-            <a:r>
-              <a:rPr lang="en-US" dirty="0"/>
-              <a:t> </a:t>
-            </a:r>
-            <a:r>
-              <a:rPr lang="en-US" dirty="0" err="1"/>
-              <a:t>pogrešnog</a:t>
-            </a:r>
-            <a:r>
-              <a:rPr lang="en-US" dirty="0"/>
-              <a:t> </a:t>
-            </a:r>
-            <a:r>
-              <a:rPr lang="en-US" dirty="0" err="1"/>
-              <a:t>servera</a:t>
-            </a:r>
-            <a:r>
-              <a:rPr lang="en-US" dirty="0"/>
-              <a:t>.</a:t>
-            </a:r>
-          </a:p>
-          <a:p>
-            <a:r>
-              <a:rPr lang="en-US" dirty="0" err="1"/>
-              <a:t>Ključni</a:t>
-            </a:r>
-            <a:r>
-              <a:rPr lang="en-US" dirty="0"/>
-              <a:t> </a:t>
-            </a:r>
-            <a:r>
-              <a:rPr lang="en-US" dirty="0" err="1"/>
-              <a:t>parametri</a:t>
-            </a:r>
-            <a:r>
-              <a:rPr lang="en-US" dirty="0"/>
-              <a:t> u </a:t>
-            </a:r>
-            <a:r>
-              <a:rPr lang="en-US" dirty="0" err="1"/>
-              <a:t>replication.conf</a:t>
-            </a:r>
-            <a:r>
-              <a:rPr lang="en-US" dirty="0"/>
-              <a:t> </a:t>
-            </a:r>
-            <a:r>
-              <a:rPr lang="en-US" dirty="0" err="1"/>
-              <a:t>definišu</a:t>
-            </a:r>
-            <a:r>
-              <a:rPr lang="en-US" dirty="0"/>
-              <a:t> </a:t>
-            </a:r>
-            <a:r>
-              <a:rPr lang="en-US" dirty="0" err="1"/>
-              <a:t>lokaciju</a:t>
-            </a:r>
-            <a:r>
-              <a:rPr lang="en-US" dirty="0"/>
-              <a:t> </a:t>
-            </a:r>
-            <a:r>
-              <a:rPr lang="en-US" dirty="0" err="1"/>
-              <a:t>privremenih</a:t>
-            </a:r>
-            <a:r>
-              <a:rPr lang="en-US" dirty="0"/>
-              <a:t> </a:t>
-            </a:r>
-            <a:r>
-              <a:rPr lang="en-US" dirty="0" err="1"/>
-              <a:t>segmenata</a:t>
-            </a:r>
-            <a:r>
-              <a:rPr lang="en-US" dirty="0"/>
-              <a:t> </a:t>
-            </a:r>
-            <a:r>
-              <a:rPr lang="en-US" dirty="0" err="1"/>
-              <a:t>i</a:t>
-            </a:r>
-            <a:r>
-              <a:rPr lang="en-US" dirty="0"/>
-              <a:t> </a:t>
-            </a:r>
-            <a:r>
-              <a:rPr lang="en-US" dirty="0" err="1"/>
-              <a:t>trajnog</a:t>
-            </a:r>
-            <a:r>
-              <a:rPr lang="en-US" dirty="0"/>
-              <a:t> </a:t>
-            </a:r>
-            <a:r>
-              <a:rPr lang="en-US" dirty="0" err="1"/>
-              <a:t>arhiva</a:t>
-            </a:r>
-            <a:r>
-              <a:rPr lang="en-US" dirty="0"/>
-              <a:t>, timeout pre flush-a </a:t>
-            </a:r>
-            <a:r>
-              <a:rPr lang="en-US" dirty="0" err="1"/>
-              <a:t>i</a:t>
-            </a:r>
-            <a:r>
-              <a:rPr lang="en-US" dirty="0"/>
-              <a:t> </a:t>
-            </a:r>
-            <a:r>
-              <a:rPr lang="en-US" dirty="0" err="1"/>
-              <a:t>adresu</a:t>
-            </a:r>
-            <a:r>
-              <a:rPr lang="en-US" dirty="0"/>
-              <a:t> slave </a:t>
-            </a:r>
-            <a:r>
-              <a:rPr lang="en-US" dirty="0" err="1"/>
-              <a:t>baze</a:t>
-            </a:r>
-            <a:r>
-              <a:rPr lang="en-US" dirty="0"/>
-              <a:t> — a </a:t>
-            </a:r>
-            <a:r>
-              <a:rPr lang="en-US" dirty="0" err="1"/>
-              <a:t>izbor</a:t>
-            </a:r>
-            <a:r>
-              <a:rPr lang="en-US" dirty="0"/>
-              <a:t> </a:t>
-            </a:r>
-            <a:r>
-              <a:rPr lang="en-US" dirty="0" err="1"/>
-              <a:t>između</a:t>
-            </a:r>
-            <a:r>
-              <a:rPr lang="en-US" dirty="0"/>
-              <a:t> </a:t>
-            </a:r>
-            <a:r>
-              <a:rPr lang="en-US" dirty="0" err="1"/>
-              <a:t>sinhroni</a:t>
-            </a:r>
-            <a:r>
-              <a:rPr lang="en-US" dirty="0"/>
-              <a:t> </a:t>
-            </a:r>
-            <a:r>
-              <a:rPr lang="en-US" dirty="0" err="1"/>
-              <a:t>i</a:t>
-            </a:r>
-            <a:r>
-              <a:rPr lang="en-US" dirty="0"/>
-              <a:t> </a:t>
-            </a:r>
-            <a:r>
-              <a:rPr lang="en-US" dirty="0" err="1"/>
-              <a:t>asinhroni</a:t>
-            </a:r>
-            <a:r>
-              <a:rPr lang="en-US" dirty="0"/>
-              <a:t> mod </a:t>
-            </a:r>
-            <a:r>
-              <a:rPr lang="en-US" dirty="0" err="1"/>
-              <a:t>direktno</a:t>
-            </a:r>
-            <a:r>
-              <a:rPr lang="en-US" dirty="0"/>
-              <a:t> </a:t>
-            </a:r>
-            <a:r>
-              <a:rPr lang="en-US" dirty="0" err="1"/>
-              <a:t>određuje</a:t>
-            </a:r>
-            <a:r>
-              <a:rPr lang="en-US" dirty="0"/>
-              <a:t> </a:t>
-            </a:r>
-            <a:r>
-              <a:rPr lang="en-US" dirty="0" err="1"/>
-              <a:t>balans</a:t>
-            </a:r>
-            <a:r>
-              <a:rPr lang="en-US" dirty="0"/>
-              <a:t> </a:t>
-            </a:r>
-            <a:r>
-              <a:rPr lang="en-US" dirty="0" err="1"/>
-              <a:t>između</a:t>
-            </a:r>
-            <a:r>
-              <a:rPr lang="en-US" dirty="0"/>
-              <a:t> Zero Data Loss </a:t>
-            </a:r>
-            <a:r>
-              <a:rPr lang="en-US" dirty="0" err="1"/>
-              <a:t>i</a:t>
-            </a:r>
-            <a:r>
-              <a:rPr lang="en-US" dirty="0"/>
-              <a:t> </a:t>
-            </a:r>
-            <a:r>
-              <a:rPr lang="en-US" dirty="0" err="1"/>
-              <a:t>performansi</a:t>
-            </a:r>
-            <a:r>
-              <a:rPr lang="en-US" dirty="0"/>
-              <a:t> </a:t>
-            </a:r>
-            <a:r>
-              <a:rPr lang="en-US" dirty="0" err="1"/>
-              <a:t>sistema</a:t>
-            </a:r>
-            <a:r>
-              <a:rPr lang="en-US" dirty="0"/>
-              <a:t>.</a:t>
-            </a:r>
-          </a:p>
-          <a:p>
-            <a:endParaRPr lang="en-US" dirty="0"/>
+              <a:t>može</a:t>
+            </a:r>
+            <a:r>
+              <a:rPr lang="en-US" dirty="0"/>
+              <a:t> </a:t>
+            </a:r>
+            <a:r>
+              <a:rPr lang="en-US" dirty="0" err="1"/>
+              <a:t>zaostajati</a:t>
+            </a:r>
+            <a:r>
+              <a:rPr lang="en-US" dirty="0"/>
+              <a:t> za </a:t>
+            </a:r>
+            <a:r>
+              <a:rPr lang="en-US" dirty="0" err="1"/>
+              <a:t>masterom</a:t>
+            </a:r>
+            <a:r>
+              <a:rPr lang="en-US" dirty="0"/>
+              <a:t>."</a:t>
+            </a:r>
           </a:p>
         </p:txBody>
       </p:sp>
@@ -6409,7 +6463,63 @@
             </a:r>
             <a:r>
               <a:rPr lang="en-US" dirty="0"/>
-              <a:t> Zero Data Loss (RPO = 0) — master </a:t>
+              <a:t> Zero Data Loss (RPO = 0 </a:t>
+            </a:r>
+            <a:r>
+              <a:rPr lang="en-US" b="1" dirty="0"/>
+              <a:t>RPO = Recovery Point Objective</a:t>
+            </a:r>
+            <a:r>
+              <a:rPr lang="en-US" b="0" dirty="0"/>
+              <a:t> -</a:t>
+            </a:r>
+            <a:r>
+              <a:rPr lang="en-US" b="1" dirty="0"/>
+              <a:t>"Koliko </a:t>
+            </a:r>
+            <a:r>
+              <a:rPr lang="en-US" b="1" dirty="0" err="1"/>
+              <a:t>podataka</a:t>
+            </a:r>
+            <a:r>
+              <a:rPr lang="en-US" b="1" dirty="0"/>
+              <a:t> </a:t>
+            </a:r>
+            <a:r>
+              <a:rPr lang="en-US" b="1" dirty="0" err="1"/>
+              <a:t>mogu</a:t>
+            </a:r>
+            <a:r>
+              <a:rPr lang="en-US" b="1" dirty="0"/>
+              <a:t> </a:t>
+            </a:r>
+            <a:r>
+              <a:rPr lang="en-US" b="1" dirty="0" err="1"/>
+              <a:t>izgubiti</a:t>
+            </a:r>
+            <a:r>
+              <a:rPr lang="en-US" b="1" dirty="0"/>
+              <a:t> u </a:t>
+            </a:r>
+            <a:r>
+              <a:rPr lang="en-US" b="1" dirty="0" err="1"/>
+              <a:t>najgorem</a:t>
+            </a:r>
+            <a:r>
+              <a:rPr lang="en-US" b="1" dirty="0"/>
+              <a:t> </a:t>
+            </a:r>
+            <a:r>
+              <a:rPr lang="en-US" b="1" dirty="0" err="1"/>
+              <a:t>slučaju</a:t>
+            </a:r>
+            <a:r>
+              <a:rPr lang="en-US" b="1" dirty="0"/>
+              <a:t>?</a:t>
+            </a:r>
+            <a:r>
+              <a:rPr lang="en-US" dirty="0"/>
+              <a:t>) — master </a:t>
             </a:r>
             <a:r>
               <a:rPr lang="en-US" dirty="0" err="1"/>
@@ -7491,9 +7601,10 @@
               <a:rPr lang="en-US" dirty="0"/>
               <a:t> PostgreSQL-a</a:t>
             </a:r>
-            <a:endParaRPr lang="sr-Latn-RS" dirty="0"/>
-          </a:p>
-          <a:p>
+            <a:r>
+              <a:rPr lang="en-US" b="0" dirty="0"/>
+              <a:t>. </a:t>
+            </a:r>
             <a:r>
               <a:rPr lang="en-US" b="1" dirty="0"/>
               <a:t>REPLICATION_LOG </a:t>
@@ -7640,10 +7751,8 @@
             </a:r>
             <a:r>
               <a:rPr lang="en-US" dirty="0"/>
-              <a:t> payload.</a:t>
-            </a:r>
-          </a:p>
-          <a:p>
+              <a:t> payload. </a:t>
+            </a:r>
             <a:r>
               <a:rPr lang="en-US" b="1" dirty="0"/>
               <a:t>Triger TRG_EMP_REPL</a:t>
@@ -7880,95 +7989,179 @@
           <a:p>
             <a:r>
               <a:rPr lang="en-US" dirty="0"/>
-              <a:t>Za </a:t>
-            </a:r>
-            <a:r>
-              <a:rPr lang="en-US" dirty="0" err="1"/>
-              <a:t>rešavanje</a:t>
-            </a:r>
-            <a:r>
-              <a:rPr lang="en-US" dirty="0"/>
-              <a:t> </a:t>
-            </a:r>
-            <a:r>
-              <a:rPr lang="en-US" dirty="0" err="1"/>
-              <a:t>konflikata</a:t>
-            </a:r>
-            <a:r>
-              <a:rPr lang="en-US" dirty="0"/>
-              <a:t> </a:t>
-            </a:r>
-            <a:r>
-              <a:rPr lang="en-US" dirty="0" err="1"/>
-              <a:t>postoje</a:t>
-            </a:r>
-            <a:r>
-              <a:rPr lang="en-US" dirty="0"/>
-              <a:t> tri </a:t>
-            </a:r>
-            <a:r>
-              <a:rPr lang="en-US" dirty="0" err="1"/>
-              <a:t>strategije</a:t>
-            </a:r>
-            <a:r>
-              <a:rPr lang="en-US" dirty="0"/>
-              <a:t> — </a:t>
-            </a:r>
+              <a:t>Kad </a:t>
+            </a:r>
+            <a:r>
+              <a:rPr lang="en-US" dirty="0" err="1"/>
+              <a:t>dva</a:t>
+            </a:r>
+            <a:r>
+              <a:rPr lang="en-US" dirty="0"/>
+              <a:t> </a:t>
+            </a:r>
+            <a:r>
+              <a:rPr lang="en-US" dirty="0" err="1"/>
+              <a:t>servera</a:t>
+            </a:r>
+            <a:r>
+              <a:rPr lang="en-US" dirty="0"/>
+              <a:t> </a:t>
+            </a:r>
+            <a:r>
+              <a:rPr lang="en-US" dirty="0" err="1"/>
+              <a:t>promene</a:t>
+            </a:r>
+            <a:r>
+              <a:rPr lang="en-US" dirty="0"/>
+              <a:t> </a:t>
+            </a:r>
+            <a:r>
+              <a:rPr lang="en-US" dirty="0" err="1"/>
+              <a:t>isti</a:t>
+            </a:r>
+            <a:r>
+              <a:rPr lang="en-US" dirty="0"/>
+              <a:t> red u </a:t>
+            </a:r>
+            <a:r>
+              <a:rPr lang="en-US" dirty="0" err="1"/>
+              <a:t>isto</a:t>
+            </a:r>
+            <a:r>
+              <a:rPr lang="en-US" dirty="0"/>
+              <a:t> </a:t>
+            </a:r>
+            <a:r>
+              <a:rPr lang="en-US" dirty="0" err="1"/>
+              <a:t>vreme</a:t>
+            </a:r>
+            <a:r>
+              <a:rPr lang="en-US" dirty="0"/>
+              <a:t>, ko </a:t>
+            </a:r>
+            <a:r>
+              <a:rPr lang="en-US" dirty="0" err="1"/>
+              <a:t>pobeđuje</a:t>
+            </a:r>
+            <a:r>
+              <a:rPr lang="en-US" dirty="0"/>
+              <a:t>?</a:t>
+            </a:r>
+          </a:p>
+          <a:p>
             <a:r>
               <a:rPr lang="en-US" b="1" dirty="0"/>
               <a:t>Last Write Wins</a:t>
             </a:r>
             <a:r>
               <a:rPr lang="en-US" dirty="0"/>
-              <a:t> </a:t>
-            </a:r>
-            <a:r>
-              <a:rPr lang="en-US" dirty="0" err="1"/>
-              <a:t>gde</a:t>
-            </a:r>
-            <a:r>
-              <a:rPr lang="en-US" dirty="0"/>
-              <a:t> timestamp </a:t>
-            </a:r>
-            <a:r>
-              <a:rPr lang="en-US" dirty="0" err="1"/>
-              <a:t>odlučuje</a:t>
-            </a:r>
-            <a:r>
-              <a:rPr lang="en-US" dirty="0"/>
-              <a:t> koji </a:t>
-            </a:r>
-            <a:r>
-              <a:rPr lang="en-US" dirty="0" err="1"/>
-              <a:t>zapis</a:t>
-            </a:r>
-            <a:r>
-              <a:rPr lang="en-US" dirty="0"/>
-              <a:t> </a:t>
-            </a:r>
-            <a:r>
-              <a:rPr lang="en-US" dirty="0" err="1"/>
-              <a:t>pobeđuje</a:t>
+              <a:t> → </a:t>
+            </a:r>
+            <a:r>
+              <a:rPr lang="en-US" dirty="0" err="1"/>
+              <a:t>pobedi</a:t>
+            </a:r>
+            <a:r>
+              <a:rPr lang="en-US" dirty="0"/>
+              <a:t> </a:t>
+            </a:r>
+            <a:r>
+              <a:rPr lang="en-US" dirty="0" err="1"/>
+              <a:t>onaj</a:t>
+            </a:r>
+            <a:r>
+              <a:rPr lang="en-US" dirty="0"/>
+              <a:t> </a:t>
+            </a:r>
+            <a:r>
+              <a:rPr lang="en-US" dirty="0" err="1"/>
+              <a:t>sa</a:t>
+            </a:r>
+            <a:r>
+              <a:rPr lang="en-US" dirty="0"/>
+              <a:t> </a:t>
+            </a:r>
+            <a:r>
+              <a:rPr lang="en-US" dirty="0" err="1"/>
+              <a:t>kasnijim</a:t>
+            </a:r>
+            <a:r>
+              <a:rPr lang="en-US" dirty="0"/>
+              <a:t> timestamp-</a:t>
+            </a:r>
+            <a:r>
+              <a:rPr lang="en-US" dirty="0" err="1"/>
+              <a:t>om.</a:t>
+            </a:r>
+            <a:r>
+              <a:rPr lang="en-US" dirty="0"/>
+              <a:t> </a:t>
+            </a:r>
+            <a:r>
+              <a:rPr lang="en-US" dirty="0" err="1"/>
+              <a:t>Najjednostavnije</a:t>
             </a:r>
             <a:r>
               <a:rPr lang="en-US" dirty="0"/>
               <a:t>, </a:t>
             </a:r>
+            <a:r>
+              <a:rPr lang="en-US" dirty="0" err="1"/>
+              <a:t>ali</a:t>
+            </a:r>
+            <a:r>
+              <a:rPr lang="en-US" dirty="0"/>
+              <a:t> </a:t>
+            </a:r>
+            <a:r>
+              <a:rPr lang="en-US" dirty="0" err="1"/>
+              <a:t>rizično</a:t>
+            </a:r>
+            <a:r>
+              <a:rPr lang="en-US" dirty="0"/>
+              <a:t> </a:t>
+            </a:r>
+            <a:r>
+              <a:rPr lang="en-US" dirty="0" err="1"/>
+              <a:t>ako</a:t>
+            </a:r>
+            <a:r>
+              <a:rPr lang="en-US" dirty="0"/>
+              <a:t> </a:t>
+            </a:r>
+            <a:r>
+              <a:rPr lang="en-US" dirty="0" err="1"/>
+              <a:t>satovi</a:t>
+            </a:r>
+            <a:r>
+              <a:rPr lang="en-US" dirty="0"/>
+              <a:t> </a:t>
+            </a:r>
+            <a:r>
+              <a:rPr lang="en-US" dirty="0" err="1"/>
+              <a:t>nisu</a:t>
+            </a:r>
+            <a:r>
+              <a:rPr lang="en-US" dirty="0"/>
+              <a:t> </a:t>
+            </a:r>
+            <a:r>
+              <a:rPr lang="en-US" dirty="0" err="1"/>
+              <a:t>sinhronizovani</a:t>
+            </a:r>
+            <a:r>
+              <a:rPr lang="en-US" dirty="0"/>
+              <a:t>.</a:t>
+            </a:r>
+          </a:p>
+          <a:p>
             <a:r>
               <a:rPr lang="en-US" b="1" dirty="0"/>
               <a:t>Static Priority</a:t>
             </a:r>
             <a:r>
               <a:rPr lang="en-US" dirty="0"/>
-              <a:t> </a:t>
-            </a:r>
-            <a:r>
-              <a:rPr lang="en-US" dirty="0" err="1"/>
-              <a:t>gde</a:t>
-            </a:r>
-            <a:r>
-              <a:rPr lang="en-US" dirty="0"/>
-              <a:t> master </a:t>
+              <a:t> → master </a:t>
             </a:r>
             <a:r>
               <a:rPr lang="en-US" dirty="0" err="1"/>
@@ -7984,23 +8177,15 @@
             </a:r>
             <a:r>
               <a:rPr lang="en-US" dirty="0"/>
-              <a:t> </a:t>
-            </a:r>
-            <a:r>
-              <a:rPr lang="en-US" dirty="0" err="1"/>
-              <a:t>nad</a:t>
-            </a:r>
-            <a:r>
-              <a:rPr lang="en-US" dirty="0"/>
-              <a:t> slave </a:t>
-            </a:r>
-            <a:r>
-              <a:rPr lang="en-US" dirty="0" err="1"/>
-              <a:t>čvorom</a:t>
-            </a:r>
-            <a:r>
-              <a:rPr lang="en-US" dirty="0"/>
-              <a:t>, </a:t>
+              <a:t> slave. </a:t>
+            </a:r>
+            <a:r>
+              <a:rPr lang="en-US" dirty="0" err="1"/>
+              <a:t>Jednostavno</a:t>
+            </a:r>
+            <a:r>
+              <a:rPr lang="en-US" dirty="0"/>
+              <a:t> </a:t>
             </a:r>
             <a:r>
               <a:rPr lang="en-US" dirty="0" err="1"/>
@@ -8010,6 +8195,16 @@
               <a:rPr lang="en-US" dirty="0"/>
               <a:t> </a:t>
             </a:r>
+            <a:r>
+              <a:rPr lang="en-US" dirty="0" err="1"/>
+              <a:t>predvidivo</a:t>
+            </a:r>
+            <a:r>
+              <a:rPr lang="en-US" dirty="0"/>
+              <a:t>.</a:t>
+            </a:r>
+          </a:p>
+          <a:p>
             <a:r>
               <a:rPr lang="en-US" b="1" dirty="0" err="1"/>
               <a:t>Aplikativna</a:t>
@@ -8024,19 +8219,51 @@
             </a:r>
             <a:r>
               <a:rPr lang="en-US" dirty="0"/>
-              <a:t> </a:t>
-            </a:r>
-            <a:r>
-              <a:rPr lang="en-US" dirty="0" err="1"/>
-              <a:t>kao</a:t>
-            </a:r>
-            <a:r>
-              <a:rPr lang="en-US" dirty="0"/>
-              <a:t> </a:t>
-            </a:r>
-            <a:r>
-              <a:rPr lang="en-US" dirty="0" err="1"/>
-              <a:t>najsigurniji</a:t>
+              <a:t> → za </a:t>
+            </a:r>
+            <a:r>
+              <a:rPr lang="en-US" dirty="0" err="1"/>
+              <a:t>finansije</a:t>
+            </a:r>
+            <a:r>
+              <a:rPr lang="en-US" dirty="0"/>
+              <a:t>/</a:t>
+            </a:r>
+            <a:r>
+              <a:rPr lang="en-US" dirty="0" err="1"/>
+              <a:t>zalihe</a:t>
+            </a:r>
+            <a:r>
+              <a:rPr lang="en-US" dirty="0"/>
+              <a:t>. </a:t>
+            </a:r>
+            <a:r>
+              <a:rPr lang="en-US" dirty="0" err="1"/>
+              <a:t>Čovek</a:t>
+            </a:r>
+            <a:r>
+              <a:rPr lang="en-US" dirty="0"/>
+              <a:t> </a:t>
+            </a:r>
+            <a:r>
+              <a:rPr lang="en-US" dirty="0" err="1"/>
+              <a:t>ručno</a:t>
+            </a:r>
+            <a:r>
+              <a:rPr lang="en-US" dirty="0"/>
+              <a:t> </a:t>
+            </a:r>
+            <a:r>
+              <a:rPr lang="en-US" dirty="0" err="1"/>
+              <a:t>odlučuje</a:t>
+            </a:r>
+            <a:r>
+              <a:rPr lang="en-US" dirty="0"/>
+              <a:t>. </a:t>
+            </a:r>
+            <a:r>
+              <a:rPr lang="en-US" dirty="0" err="1"/>
+              <a:t>Najsigurnije</a:t>
             </a:r>
             <a:r>
               <a:rPr lang="en-US" dirty="0"/>
@@ -8052,43 +8279,11 @@
             </a:r>
             <a:r>
               <a:rPr lang="en-US" dirty="0" err="1"/>
-              <a:t>najsloženiji</a:t>
-            </a:r>
-            <a:r>
-              <a:rPr lang="en-US" dirty="0"/>
-              <a:t> </a:t>
-            </a:r>
-            <a:r>
-              <a:rPr lang="en-US" dirty="0" err="1"/>
-              <a:t>pristup</a:t>
-            </a:r>
-            <a:r>
-              <a:rPr lang="en-US" dirty="0"/>
-              <a:t> za </a:t>
-            </a:r>
-            <a:r>
-              <a:rPr lang="en-US" dirty="0" err="1"/>
-              <a:t>kritične</a:t>
-            </a:r>
-            <a:r>
-              <a:rPr lang="en-US" dirty="0"/>
-              <a:t> </a:t>
-            </a:r>
-            <a:r>
-              <a:rPr lang="en-US" dirty="0" err="1"/>
-              <a:t>poslovne</a:t>
-            </a:r>
-            <a:r>
-              <a:rPr lang="en-US" dirty="0"/>
-              <a:t> </a:t>
-            </a:r>
-            <a:r>
-              <a:rPr lang="en-US" dirty="0" err="1"/>
-              <a:t>podatke</a:t>
-            </a:r>
-            <a:r>
-              <a:rPr lang="en-US" dirty="0"/>
-              <a:t>. </a:t>
+              <a:t>najkomplikovanije</a:t>
+            </a:r>
+            <a:r>
+              <a:rPr lang="en-US" dirty="0"/>
+              <a:t>.</a:t>
             </a:r>
           </a:p>
           <a:p>
@@ -11603,7 +11798,23 @@
                 <a:ea typeface="Consolas" pitchFamily="34" charset="-122"/>
                 <a:cs typeface="Consolas" pitchFamily="34" charset="-120"/>
               </a:rPr>
-              <a:t>INSERT INTO EMPLOYEE ... EMP_NO=1000; COMMIT;</a:t>
+              <a:t>INSERT INTO EMPLOYEE </a:t>
+            </a:r>
+          </a:p>
+          <a:p>
+            <a:pPr marL="0" indent="0">
+              <a:buNone/>
+            </a:pPr>
+            <a:r>
+              <a:rPr lang="en-US" sz="1200" dirty="0">
+                <a:solidFill>
+                  <a:srgbClr val="475569"/>
+                </a:solidFill>
+                <a:latin typeface="+mj-lt"/>
+                <a:ea typeface="Consolas" pitchFamily="34" charset="-122"/>
+                <a:cs typeface="Consolas" pitchFamily="34" charset="-120"/>
+              </a:rPr>
+              <a:t>EMP_NO=1000; COMMIT;</a:t>
             </a:r>
             <a:endParaRPr lang="en-US" sz="1200" dirty="0">
               <a:latin typeface="+mj-lt"/>
@@ -12955,7 +13166,7 @@
               <a:buNone/>
             </a:pPr>
             <a:r>
-              <a:rPr lang="en-US" sz="1200" dirty="0">
+              <a:rPr lang="en-US" sz="1400" dirty="0">
                 <a:solidFill>
                   <a:srgbClr val="475569"/>
                 </a:solidFill>
@@ -12965,7 +13176,7 @@
               </a:rPr>
               <a:t>ALTER PUBLICATION SET TABLE EMPLOYEE INACTIVE;</a:t>
             </a:r>
-            <a:endParaRPr lang="sr-Latn-RS" sz="1200" dirty="0">
+            <a:endParaRPr lang="sr-Latn-RS" sz="1400" dirty="0">
               <a:solidFill>
                 <a:srgbClr val="475569"/>
               </a:solidFill>
@@ -12978,7 +13189,7 @@
             <a:pPr marL="0" indent="0">
               <a:buNone/>
             </a:pPr>
-            <a:endParaRPr lang="en-US" sz="1200" dirty="0">
+            <a:endParaRPr lang="en-US" sz="1400" dirty="0">
               <a:latin typeface="+mj-lt"/>
             </a:endParaRPr>
           </a:p>
@@ -12987,7 +13198,7 @@
               <a:buNone/>
             </a:pPr>
             <a:r>
-              <a:rPr lang="sr-Latn-RS" sz="1200" dirty="0">
+              <a:rPr lang="sr-Latn-RS" sz="1400" dirty="0">
                 <a:solidFill>
                   <a:srgbClr val="475569"/>
                 </a:solidFill>
@@ -12998,7 +13209,7 @@
               <a:t>T</a:t>
             </a:r>
             <a:r>
-              <a:rPr lang="en-US" sz="1200" dirty="0" err="1">
+              <a:rPr lang="en-US" sz="1400" dirty="0" err="1">
                 <a:solidFill>
                   <a:srgbClr val="475569"/>
                 </a:solidFill>
@@ -13009,7 +13220,7 @@
               <a:t>abela</a:t>
             </a:r>
             <a:r>
-              <a:rPr lang="en-US" sz="1200" dirty="0">
+              <a:rPr lang="en-US" sz="1400" dirty="0">
                 <a:solidFill>
                   <a:srgbClr val="475569"/>
                 </a:solidFill>
@@ -13020,7 +13231,7 @@
               <a:t> se </a:t>
             </a:r>
             <a:r>
-              <a:rPr lang="en-US" sz="1200" dirty="0" err="1">
+              <a:rPr lang="en-US" sz="1400" dirty="0" err="1">
                 <a:solidFill>
                   <a:srgbClr val="475569"/>
                 </a:solidFill>
@@ -13031,7 +13242,7 @@
               <a:t>isklju</a:t>
             </a:r>
             <a:r>
-              <a:rPr lang="sr-Latn-RS" sz="1200" dirty="0">
+              <a:rPr lang="sr-Latn-RS" sz="1400" dirty="0">
                 <a:solidFill>
                   <a:srgbClr val="475569"/>
                 </a:solidFill>
@@ -13042,7 +13253,7 @@
               <a:t>č</a:t>
             </a:r>
             <a:r>
-              <a:rPr lang="en-US" sz="1200" dirty="0" err="1">
+              <a:rPr lang="en-US" sz="1400" dirty="0" err="1">
                 <a:solidFill>
                   <a:srgbClr val="475569"/>
                 </a:solidFill>
@@ -13053,7 +13264,7 @@
               <a:t>uje</a:t>
             </a:r>
             <a:r>
-              <a:rPr lang="en-US" sz="1200" dirty="0">
+              <a:rPr lang="en-US" sz="1400" dirty="0">
                 <a:solidFill>
                   <a:srgbClr val="475569"/>
                 </a:solidFill>
@@ -13064,7 +13275,7 @@
               <a:t> iz replikacije bez </a:t>
             </a:r>
             <a:r>
-              <a:rPr lang="en-US" sz="1200" dirty="0" err="1">
+              <a:rPr lang="en-US" sz="1400" dirty="0" err="1">
                 <a:solidFill>
                   <a:srgbClr val="475569"/>
                 </a:solidFill>
@@ -13075,7 +13286,7 @@
               <a:t>gubljenja</a:t>
             </a:r>
             <a:r>
-              <a:rPr lang="en-US" sz="1200" dirty="0">
+              <a:rPr lang="en-US" sz="1400" dirty="0">
                 <a:solidFill>
                   <a:srgbClr val="475569"/>
                 </a:solidFill>
@@ -13086,7 +13297,7 @@
               <a:t> </a:t>
             </a:r>
             <a:r>
-              <a:rPr lang="en-US" sz="1200" dirty="0" err="1">
+              <a:rPr lang="en-US" sz="1400" dirty="0" err="1">
                 <a:solidFill>
                   <a:srgbClr val="475569"/>
                 </a:solidFill>
@@ -13096,7 +13307,7 @@
               </a:rPr>
               <a:t>ostalih</a:t>
             </a:r>
-            <a:endParaRPr lang="sr-Latn-RS" sz="1200" dirty="0">
+            <a:endParaRPr lang="sr-Latn-RS" sz="1400" dirty="0">
               <a:solidFill>
                 <a:srgbClr val="475569"/>
               </a:solidFill>
@@ -13109,7 +13320,7 @@
             <a:pPr marL="0" indent="0">
               <a:buNone/>
             </a:pPr>
-            <a:endParaRPr lang="en-US" sz="1200" dirty="0">
+            <a:endParaRPr lang="en-US" sz="1400" dirty="0">
               <a:latin typeface="+mj-lt"/>
             </a:endParaRPr>
           </a:p>
@@ -13118,7 +13329,7 @@
               <a:buNone/>
             </a:pPr>
             <a:r>
-              <a:rPr lang="en-US" sz="1200" dirty="0" err="1">
+              <a:rPr lang="en-US" sz="1400" dirty="0" err="1">
                 <a:solidFill>
                   <a:srgbClr val="475569"/>
                 </a:solidFill>
@@ -13129,7 +13340,7 @@
               <a:t>Fleksibilnost</a:t>
             </a:r>
             <a:r>
-              <a:rPr lang="en-US" sz="1200" dirty="0">
+              <a:rPr lang="en-US" sz="1400" dirty="0">
                 <a:solidFill>
                   <a:srgbClr val="475569"/>
                 </a:solidFill>
@@ -13140,7 +13351,7 @@
               <a:t> </a:t>
             </a:r>
             <a:r>
-              <a:rPr lang="en-US" sz="1200" dirty="0" err="1">
+              <a:rPr lang="en-US" sz="1400" dirty="0" err="1">
                 <a:solidFill>
                   <a:srgbClr val="475569"/>
                 </a:solidFill>
@@ -13151,7 +13362,7 @@
               <a:t>logi</a:t>
             </a:r>
             <a:r>
-              <a:rPr lang="sr-Latn-RS" sz="1200" dirty="0">
+              <a:rPr lang="sr-Latn-RS" sz="1400" dirty="0">
                 <a:solidFill>
                   <a:srgbClr val="475569"/>
                 </a:solidFill>
@@ -13162,7 +13373,7 @@
               <a:t>č</a:t>
             </a:r>
             <a:r>
-              <a:rPr lang="en-US" sz="1200" dirty="0" err="1">
+              <a:rPr lang="en-US" sz="1400" dirty="0" err="1">
                 <a:solidFill>
                   <a:srgbClr val="475569"/>
                 </a:solidFill>
@@ -13173,7 +13384,7 @@
               <a:t>ke</a:t>
             </a:r>
             <a:r>
-              <a:rPr lang="en-US" sz="1200" dirty="0">
+              <a:rPr lang="en-US" sz="1400" dirty="0">
                 <a:solidFill>
                   <a:srgbClr val="475569"/>
                 </a:solidFill>
@@ -13184,7 +13395,7 @@
               <a:t> </a:t>
             </a:r>
             <a:r>
-              <a:rPr lang="en-US" sz="1200" dirty="0" err="1">
+              <a:rPr lang="en-US" sz="1400" dirty="0" err="1">
                 <a:solidFill>
                   <a:srgbClr val="475569"/>
                 </a:solidFill>
@@ -13195,7 +13406,7 @@
               <a:t>replikacije</a:t>
             </a:r>
             <a:r>
-              <a:rPr lang="sr-Latn-BA" sz="1200" dirty="0">
+              <a:rPr lang="sr-Latn-BA" sz="1400" dirty="0">
                 <a:solidFill>
                   <a:srgbClr val="475569"/>
                 </a:solidFill>
@@ -13205,7 +13416,7 @@
               </a:rPr>
               <a:t>.</a:t>
             </a:r>
-            <a:endParaRPr lang="en-US" sz="1200" dirty="0">
+            <a:endParaRPr lang="en-US" sz="1400" dirty="0">
               <a:latin typeface="+mj-lt"/>
             </a:endParaRPr>
           </a:p>
@@ -23634,8 +23845,8 @@
         </p:nvSpPr>
         <p:spPr>
           <a:xfrm>
-            <a:off x="228600" y="1705356"/>
-            <a:ext cx="4160520" cy="1572768"/>
+            <a:off x="228600" y="1705355"/>
+            <a:ext cx="4160520" cy="1968425"/>
           </a:xfrm>
           <a:prstGeom prst="rect">
             <a:avLst/>
@@ -23712,9 +23923,9 @@
               <a:buNone/>
             </a:pPr>
             <a:r>
-              <a:rPr lang="en-US" sz="1000" b="1" dirty="0">
-                <a:solidFill>
-                  <a:srgbClr val="14B8A6"/>
+              <a:rPr lang="en-US" sz="1000" dirty="0">
+                <a:solidFill>
+                  <a:schemeClr val="bg1"/>
                 </a:solidFill>
                 <a:latin typeface="Calibri" pitchFamily="34" charset="0"/>
                 <a:ea typeface="Calibri" pitchFamily="34" charset="-122"/>
@@ -23722,7 +23933,11 @@
               </a:rPr>
               <a:t>Tabela REPLICATION_LOG</a:t>
             </a:r>
-            <a:endParaRPr lang="en-US" sz="1000" dirty="0"/>
+            <a:endParaRPr lang="en-US" sz="1000" dirty="0">
+              <a:solidFill>
+                <a:schemeClr val="bg1"/>
+              </a:solidFill>
+            </a:endParaRPr>
           </a:p>
         </p:txBody>
       </p:sp>
@@ -23892,8 +24107,8 @@
         </p:nvSpPr>
         <p:spPr>
           <a:xfrm>
-            <a:off x="4572000" y="1705356"/>
-            <a:ext cx="4343400" cy="1572768"/>
+            <a:off x="4572000" y="1705355"/>
+            <a:ext cx="4343400" cy="1977569"/>
           </a:xfrm>
           <a:prstGeom prst="rect">
             <a:avLst/>
@@ -23941,7 +24156,11 @@
           <a:bodyPr/>
           <a:lstStyle/>
           <a:p>
-            <a:endParaRPr/>
+            <a:endParaRPr>
+              <a:solidFill>
+                <a:schemeClr val="bg1"/>
+              </a:solidFill>
+            </a:endParaRPr>
           </a:p>
         </p:txBody>
       </p:sp>
@@ -23970,9 +24189,9 @@
               <a:buNone/>
             </a:pPr>
             <a:r>
-              <a:rPr lang="en-US" sz="1000" b="1" dirty="0">
-                <a:solidFill>
-                  <a:srgbClr val="14B8A6"/>
+              <a:rPr lang="en-US" sz="1000" dirty="0">
+                <a:solidFill>
+                  <a:schemeClr val="bg1"/>
                 </a:solidFill>
                 <a:latin typeface="Calibri" pitchFamily="34" charset="0"/>
                 <a:ea typeface="Calibri" pitchFamily="34" charset="-122"/>
@@ -23980,7 +24199,11 @@
               </a:rPr>
               <a:t>Triger za hvatanje promena</a:t>
             </a:r>
-            <a:endParaRPr lang="en-US" sz="1000" dirty="0"/>
+            <a:endParaRPr lang="en-US" sz="1000" dirty="0">
+              <a:solidFill>
+                <a:schemeClr val="bg1"/>
+              </a:solidFill>
+            </a:endParaRPr>
           </a:p>
         </p:txBody>
       </p:sp>
@@ -24009,7 +24232,7 @@
               <a:buNone/>
             </a:pPr>
             <a:r>
-              <a:rPr lang="en-US" sz="850" dirty="0">
+              <a:rPr lang="en-US" sz="700" dirty="0">
                 <a:solidFill>
                   <a:srgbClr val="7DD3FC"/>
                 </a:solidFill>
@@ -24019,14 +24242,14 @@
               </a:rPr>
               <a:t>CREATE TRIGGER TRG_EMP_REPL</a:t>
             </a:r>
-            <a:endParaRPr lang="en-US" sz="850" dirty="0"/>
+            <a:endParaRPr lang="en-US" sz="700" dirty="0"/>
           </a:p>
           <a:p>
             <a:pPr marL="0" indent="0">
               <a:buNone/>
             </a:pPr>
             <a:r>
-              <a:rPr lang="en-US" sz="850" dirty="0">
+              <a:rPr lang="en-US" sz="700" dirty="0">
                 <a:solidFill>
                   <a:srgbClr val="7DD3FC"/>
                 </a:solidFill>
@@ -24036,14 +24259,14 @@
               </a:rPr>
               <a:t>  AFTER INSERT OR UPDATE OR DELETE ON EMPLOYEE</a:t>
             </a:r>
-            <a:endParaRPr lang="en-US" sz="850" dirty="0"/>
+            <a:endParaRPr lang="en-US" sz="700" dirty="0"/>
           </a:p>
           <a:p>
             <a:pPr marL="0" indent="0">
               <a:buNone/>
             </a:pPr>
             <a:r>
-              <a:rPr lang="en-US" sz="850" dirty="0">
+              <a:rPr lang="en-US" sz="700" dirty="0">
                 <a:solidFill>
                   <a:srgbClr val="7DD3FC"/>
                 </a:solidFill>
@@ -24053,14 +24276,14 @@
               </a:rPr>
               <a:t>AS</a:t>
             </a:r>
-            <a:endParaRPr lang="en-US" sz="850" dirty="0"/>
+            <a:endParaRPr lang="en-US" sz="700" dirty="0"/>
           </a:p>
           <a:p>
             <a:pPr marL="0" indent="0">
               <a:buNone/>
             </a:pPr>
             <a:r>
-              <a:rPr lang="en-US" sz="850" dirty="0">
+              <a:rPr lang="en-US" sz="700" dirty="0">
                 <a:solidFill>
                   <a:srgbClr val="7DD3FC"/>
                 </a:solidFill>
@@ -24070,14 +24293,14 @@
               </a:rPr>
               <a:t>BEGIN</a:t>
             </a:r>
-            <a:endParaRPr lang="en-US" sz="850" dirty="0"/>
+            <a:endParaRPr lang="en-US" sz="700" dirty="0"/>
           </a:p>
           <a:p>
             <a:pPr marL="0" indent="0">
               <a:buNone/>
             </a:pPr>
             <a:r>
-              <a:rPr lang="en-US" sz="850" dirty="0">
+              <a:rPr lang="en-US" sz="700" dirty="0">
                 <a:solidFill>
                   <a:srgbClr val="7DD3FC"/>
                 </a:solidFill>
@@ -24087,14 +24310,14 @@
               </a:rPr>
               <a:t>  IF (RDB$GET_CONTEXT('SYSTEM','REPLICATING') IS NULL) THEN</a:t>
             </a:r>
-            <a:endParaRPr lang="en-US" sz="850" dirty="0"/>
+            <a:endParaRPr lang="en-US" sz="700" dirty="0"/>
           </a:p>
           <a:p>
             <a:pPr marL="0" indent="0">
               <a:buNone/>
             </a:pPr>
             <a:r>
-              <a:rPr lang="en-US" sz="850" dirty="0">
+              <a:rPr lang="en-US" sz="700" dirty="0">
                 <a:solidFill>
                   <a:srgbClr val="7DD3FC"/>
                 </a:solidFill>
@@ -24104,14 +24327,14 @@
               </a:rPr>
               <a:t>  BEGIN</a:t>
             </a:r>
-            <a:endParaRPr lang="en-US" sz="850" dirty="0"/>
+            <a:endParaRPr lang="en-US" sz="700" dirty="0"/>
           </a:p>
           <a:p>
             <a:pPr marL="0" indent="0">
               <a:buNone/>
             </a:pPr>
             <a:r>
-              <a:rPr lang="en-US" sz="850" dirty="0">
+              <a:rPr lang="en-US" sz="700" dirty="0">
                 <a:solidFill>
                   <a:srgbClr val="7DD3FC"/>
                 </a:solidFill>
@@ -24121,14 +24344,14 @@
               </a:rPr>
               <a:t>    INSERT INTO REPLICATION_LOG</a:t>
             </a:r>
-            <a:endParaRPr lang="en-US" sz="850" dirty="0"/>
+            <a:endParaRPr lang="en-US" sz="700" dirty="0"/>
           </a:p>
           <a:p>
             <a:pPr marL="0" indent="0">
               <a:buNone/>
             </a:pPr>
             <a:r>
-              <a:rPr lang="en-US" sz="850" dirty="0">
+              <a:rPr lang="en-US" sz="700" dirty="0">
                 <a:solidFill>
                   <a:srgbClr val="7DD3FC"/>
                 </a:solidFill>
@@ -24138,14 +24361,14 @@
               </a:rPr>
               <a:t>      (TABLE_NAME, OPERATION, PK_VALUE, PAYLOAD)</a:t>
             </a:r>
-            <a:endParaRPr lang="en-US" sz="850" dirty="0"/>
+            <a:endParaRPr lang="en-US" sz="700" dirty="0"/>
           </a:p>
           <a:p>
             <a:pPr marL="0" indent="0">
               <a:buNone/>
             </a:pPr>
             <a:r>
-              <a:rPr lang="en-US" sz="850" dirty="0">
+              <a:rPr lang="en-US" sz="700" dirty="0">
                 <a:solidFill>
                   <a:srgbClr val="7DD3FC"/>
                 </a:solidFill>
@@ -24155,14 +24378,14 @@
               </a:rPr>
               <a:t>    VALUES ('EMPLOYEE',</a:t>
             </a:r>
-            <a:endParaRPr lang="en-US" sz="850" dirty="0"/>
+            <a:endParaRPr lang="en-US" sz="700" dirty="0"/>
           </a:p>
           <a:p>
             <a:pPr marL="0" indent="0">
               <a:buNone/>
             </a:pPr>
             <a:r>
-              <a:rPr lang="en-US" sz="850" dirty="0">
+              <a:rPr lang="en-US" sz="700" dirty="0">
                 <a:solidFill>
                   <a:srgbClr val="7DD3FC"/>
                 </a:solidFill>
@@ -24172,14 +24395,14 @@
               </a:rPr>
               <a:t>      CASE WHEN INSERTING THEN 'I'</a:t>
             </a:r>
-            <a:endParaRPr lang="en-US" sz="850" dirty="0"/>
+            <a:endParaRPr lang="en-US" sz="700" dirty="0"/>
           </a:p>
           <a:p>
             <a:pPr marL="0" indent="0">
               <a:buNone/>
             </a:pPr>
             <a:r>
-              <a:rPr lang="en-US" sz="850" dirty="0">
+              <a:rPr lang="en-US" sz="700" dirty="0">
                 <a:solidFill>
                   <a:srgbClr val="7DD3FC"/>
                 </a:solidFill>
@@ -24189,14 +24412,14 @@
               </a:rPr>
               <a:t>           WHEN UPDATING THEN 'U' ELSE 'D' END,</a:t>
             </a:r>
-            <a:endParaRPr lang="en-US" sz="850" dirty="0"/>
+            <a:endParaRPr lang="en-US" sz="700" dirty="0"/>
           </a:p>
           <a:p>
             <a:pPr marL="0" indent="0">
               <a:buNone/>
             </a:pPr>
             <a:r>
-              <a:rPr lang="en-US" sz="850" dirty="0">
+              <a:rPr lang="en-US" sz="700" dirty="0">
                 <a:solidFill>
                   <a:srgbClr val="7DD3FC"/>
                 </a:solidFill>
@@ -24206,14 +24429,14 @@
               </a:rPr>
               <a:t>      CAST(NEW.EMP_NO AS VARCHAR(50)),</a:t>
             </a:r>
-            <a:endParaRPr lang="en-US" sz="850" dirty="0"/>
+            <a:endParaRPr lang="en-US" sz="700" dirty="0"/>
           </a:p>
           <a:p>
             <a:pPr marL="0" indent="0">
               <a:buNone/>
             </a:pPr>
             <a:r>
-              <a:rPr lang="en-US" sz="850" dirty="0">
+              <a:rPr lang="en-US" sz="700" dirty="0">
                 <a:solidFill>
                   <a:srgbClr val="7DD3FC"/>
                 </a:solidFill>
@@ -24223,14 +24446,14 @@
               </a:rPr>
               <a:t>      /* JSON payload */ NULL);</a:t>
             </a:r>
-            <a:endParaRPr lang="en-US" sz="850" dirty="0"/>
+            <a:endParaRPr lang="en-US" sz="700" dirty="0"/>
           </a:p>
           <a:p>
             <a:pPr marL="0" indent="0">
               <a:buNone/>
             </a:pPr>
             <a:r>
-              <a:rPr lang="en-US" sz="850" dirty="0">
+              <a:rPr lang="en-US" sz="700" dirty="0">
                 <a:solidFill>
                   <a:srgbClr val="7DD3FC"/>
                 </a:solidFill>
@@ -24240,14 +24463,14 @@
               </a:rPr>
               <a:t>  END</a:t>
             </a:r>
-            <a:endParaRPr lang="en-US" sz="850" dirty="0"/>
+            <a:endParaRPr lang="en-US" sz="700" dirty="0"/>
           </a:p>
           <a:p>
             <a:pPr marL="0" indent="0">
               <a:buNone/>
             </a:pPr>
             <a:r>
-              <a:rPr lang="en-US" sz="850" dirty="0">
+              <a:rPr lang="en-US" sz="700" dirty="0">
                 <a:solidFill>
                   <a:srgbClr val="7DD3FC"/>
                 </a:solidFill>
@@ -24257,7 +24480,7 @@
               </a:rPr>
               <a:t>END;</a:t>
             </a:r>
-            <a:endParaRPr lang="en-US" sz="850" dirty="0"/>
+            <a:endParaRPr lang="en-US" sz="700" dirty="0"/>
           </a:p>
         </p:txBody>
       </p:sp>
@@ -24269,8 +24492,8 @@
         </p:nvSpPr>
         <p:spPr>
           <a:xfrm>
-            <a:off x="228600" y="3424428"/>
-            <a:ext cx="2743200" cy="1600200"/>
+            <a:off x="228600" y="3746934"/>
+            <a:ext cx="2743200" cy="1277693"/>
           </a:xfrm>
           <a:prstGeom prst="rect">
             <a:avLst/>
@@ -24308,8 +24531,8 @@
         </p:nvSpPr>
         <p:spPr>
           <a:xfrm>
-            <a:off x="228600" y="3424428"/>
-            <a:ext cx="64008" cy="1600200"/>
+            <a:off x="228600" y="3746934"/>
+            <a:ext cx="64008" cy="1277693"/>
           </a:xfrm>
           <a:prstGeom prst="rect">
             <a:avLst/>
@@ -24335,7 +24558,7 @@
         </p:nvSpPr>
         <p:spPr>
           <a:xfrm>
-            <a:off x="365760" y="3497580"/>
+            <a:off x="365760" y="3776980"/>
             <a:ext cx="2560320" cy="292608"/>
           </a:xfrm>
           <a:prstGeom prst="rect">
@@ -24374,7 +24597,7 @@
         </p:nvSpPr>
         <p:spPr>
           <a:xfrm>
-            <a:off x="365760" y="3771900"/>
+            <a:off x="365760" y="4051300"/>
             <a:ext cx="2560320" cy="2379038"/>
           </a:xfrm>
           <a:prstGeom prst="rect">
@@ -24579,8 +24802,8 @@
         </p:nvSpPr>
         <p:spPr>
           <a:xfrm>
-            <a:off x="3127248" y="3424428"/>
-            <a:ext cx="2743200" cy="1600200"/>
+            <a:off x="3127248" y="3746934"/>
+            <a:ext cx="2743200" cy="1277693"/>
           </a:xfrm>
           <a:prstGeom prst="rect">
             <a:avLst/>
@@ -24618,8 +24841,8 @@
         </p:nvSpPr>
         <p:spPr>
           <a:xfrm>
-            <a:off x="3127248" y="3424428"/>
-            <a:ext cx="64008" cy="1600200"/>
+            <a:off x="3127248" y="3746934"/>
+            <a:ext cx="64008" cy="1277693"/>
           </a:xfrm>
           <a:prstGeom prst="rect">
             <a:avLst/>
@@ -24645,7 +24868,7 @@
         </p:nvSpPr>
         <p:spPr>
           <a:xfrm>
-            <a:off x="3264408" y="3497580"/>
+            <a:off x="3264408" y="3776980"/>
             <a:ext cx="2560320" cy="292608"/>
           </a:xfrm>
           <a:prstGeom prst="rect">
@@ -24684,7 +24907,7 @@
         </p:nvSpPr>
         <p:spPr>
           <a:xfrm>
-            <a:off x="3264408" y="3771900"/>
+            <a:off x="3264408" y="4051300"/>
             <a:ext cx="2560320" cy="2379038"/>
           </a:xfrm>
           <a:prstGeom prst="rect">
@@ -24856,8 +25079,8 @@
         </p:nvSpPr>
         <p:spPr>
           <a:xfrm>
-            <a:off x="6025896" y="3424428"/>
-            <a:ext cx="2743200" cy="1600200"/>
+            <a:off x="6025896" y="3746934"/>
+            <a:ext cx="2743200" cy="1277693"/>
           </a:xfrm>
           <a:prstGeom prst="rect">
             <a:avLst/>
@@ -24895,8 +25118,8 @@
         </p:nvSpPr>
         <p:spPr>
           <a:xfrm>
-            <a:off x="6025896" y="3424428"/>
-            <a:ext cx="64008" cy="1600200"/>
+            <a:off x="6025896" y="3746934"/>
+            <a:ext cx="64008" cy="1277693"/>
           </a:xfrm>
           <a:prstGeom prst="rect">
             <a:avLst/>
@@ -24922,7 +25145,7 @@
         </p:nvSpPr>
         <p:spPr>
           <a:xfrm>
-            <a:off x="6163056" y="3497580"/>
+            <a:off x="6163056" y="3776980"/>
             <a:ext cx="2560320" cy="292608"/>
           </a:xfrm>
           <a:prstGeom prst="rect">
@@ -24961,7 +25184,7 @@
         </p:nvSpPr>
         <p:spPr>
           <a:xfrm>
-            <a:off x="6163056" y="3771900"/>
+            <a:off x="6163056" y="4051300"/>
             <a:ext cx="2560320" cy="2379038"/>
           </a:xfrm>
           <a:prstGeom prst="rect">
@@ -26026,7 +26249,7 @@
               <a:t>Nema </a:t>
             </a:r>
             <a:r>
-              <a:rPr lang="sr-Latn-RS" sz="1400">
+              <a:rPr lang="sr-Latn-RS" sz="1400" dirty="0">
                 <a:solidFill>
                   <a:srgbClr val="475569"/>
                 </a:solidFill>
@@ -26037,17 +26260,6 @@
               <a:t>tačke kvara (SPOF)</a:t>
             </a:r>
             <a:r>
-              <a:rPr lang="en-US" sz="1400">
-                <a:solidFill>
-                  <a:srgbClr val="475569"/>
-                </a:solidFill>
-                <a:latin typeface="Calibri" pitchFamily="34" charset="0"/>
-                <a:ea typeface="Calibri" pitchFamily="34" charset="-122"/>
-                <a:cs typeface="Calibri" pitchFamily="34" charset="-120"/>
-              </a:rPr>
-              <a:t> </a:t>
-            </a:r>
-            <a:r>
               <a:rPr lang="en-US" sz="1400" dirty="0">
                 <a:solidFill>
                   <a:srgbClr val="475569"/>
@@ -26056,7 +26268,7 @@
                 <a:ea typeface="Calibri" pitchFamily="34" charset="-122"/>
                 <a:cs typeface="Calibri" pitchFamily="34" charset="-120"/>
               </a:rPr>
-              <a:t>— izuzetno visoka tolerancija na kvarove.</a:t>
+              <a:t> — izuzetno visoka tolerancija na kvarove.</a:t>
             </a:r>
             <a:endParaRPr lang="en-US" sz="1400" dirty="0"/>
           </a:p>
@@ -28787,8 +28999,8 @@
         </p:nvSpPr>
         <p:spPr>
           <a:xfrm>
-            <a:off x="6967728" y="3429000"/>
-            <a:ext cx="2029968" cy="1325880"/>
+            <a:off x="6912864" y="3429000"/>
+            <a:ext cx="1938528" cy="1325880"/>
           </a:xfrm>
           <a:prstGeom prst="rect">
             <a:avLst/>
@@ -28804,7 +29016,7 @@
               <a:buNone/>
             </a:pPr>
             <a:r>
-              <a:rPr lang="en-US" sz="1100" dirty="0">
+              <a:rPr lang="en-US" sz="1000" dirty="0">
                 <a:solidFill>
                   <a:srgbClr val="475569"/>
                 </a:solidFill>
@@ -28814,14 +29026,14 @@
               </a:rPr>
               <a:t>CREATE MAPPING repl_agent USING PLUGIN SRP</a:t>
             </a:r>
-            <a:endParaRPr lang="en-US" sz="1100" dirty="0"/>
+            <a:endParaRPr lang="en-US" sz="1000" dirty="0"/>
           </a:p>
           <a:p>
             <a:pPr marL="0" indent="0">
               <a:buNone/>
             </a:pPr>
             <a:r>
-              <a:rPr lang="en-US" sz="1100" dirty="0">
+              <a:rPr lang="en-US" sz="1000" dirty="0">
                 <a:solidFill>
                   <a:srgbClr val="475569"/>
                 </a:solidFill>
@@ -28831,14 +29043,14 @@
               </a:rPr>
               <a:t>FROM USER replication_user TO USER SYSDBA;</a:t>
             </a:r>
-            <a:endParaRPr lang="en-US" sz="1100" dirty="0"/>
+            <a:endParaRPr lang="en-US" sz="1000" dirty="0"/>
           </a:p>
           <a:p>
             <a:pPr marL="0" indent="0">
               <a:buNone/>
             </a:pPr>
             <a:r>
-              <a:rPr lang="en-US" sz="1100" dirty="0">
+              <a:rPr lang="en-US" sz="1000" dirty="0">
                 <a:solidFill>
                   <a:srgbClr val="475569"/>
                 </a:solidFill>
@@ -28848,7 +29060,7 @@
               <a:t>(</a:t>
             </a:r>
             <a:r>
-              <a:rPr lang="en-US" sz="1100" dirty="0" err="1">
+              <a:rPr lang="en-US" sz="1000" dirty="0" err="1">
                 <a:solidFill>
                   <a:srgbClr val="475569"/>
                 </a:solidFill>
@@ -28858,7 +29070,7 @@
               <a:t>repli</a:t>
             </a:r>
             <a:r>
-              <a:rPr lang="sr-Latn-RS" sz="1100" dirty="0">
+              <a:rPr lang="sr-Latn-RS" sz="1000" dirty="0">
                 <a:solidFill>
                   <a:srgbClr val="475569"/>
                 </a:solidFill>
@@ -28868,7 +29080,7 @@
               <a:t>k</a:t>
             </a:r>
             <a:r>
-              <a:rPr lang="en-US" sz="1100" dirty="0">
+              <a:rPr lang="en-US" sz="1000" dirty="0">
                 <a:solidFill>
                   <a:srgbClr val="475569"/>
                 </a:solidFill>
@@ -28877,7 +29089,7 @@
               </a:rPr>
               <a:t>a prihvata agenta kao SYSDBA)</a:t>
             </a:r>
-            <a:endParaRPr lang="en-US" sz="1100" dirty="0"/>
+            <a:endParaRPr lang="en-US" sz="1000" dirty="0"/>
           </a:p>
         </p:txBody>
       </p:sp>
